--- a/deck/PreVent-pitch.pptx
+++ b/deck/PreVent-pitch.pptx
@@ -510,10 +510,7 @@
           <a:p>
             <a:r>
               <a:rPr lang="en-US" dirty="0"/>
-              <a:t>Hero slide. Three real news clippings of hospital cyberattacks.
-MIT Tech Review and WIRED both cover the Düsseldorf 2020 death (two outlets confirming).
-PBS Wisconsin shows Ascension 2024 — proof the attack class is still with us.
-Open to swapping MIT for Business Insurance Medtronic or HFMA Prospect if we want three distinct incidents.</a:t>
+              <a:t>Hero. Three real clippings. MIT + WIRED on same Düsseldorf 2020 incident. PBS covers Ascension 2024 — same attack class four years later.</a:t>
             </a:r>
             <a:endParaRPr lang="en-US" dirty="0"/>
           </a:p>
@@ -601,7 +598,7 @@
           <a:p>
             <a:r>
               <a:rPr lang="en-US" dirty="0"/>
-              <a:t>The lie: the device reports a healthy patient while the real patient is crashing. CWE-306 class — unsigned command accepted.</a:t>
+              <a:t>Reported vs reality. CWE-306 — unsigned command accepted. The device obeys and lies about it.</a:t>
             </a:r>
             <a:endParaRPr lang="en-US" dirty="0"/>
           </a:p>
@@ -689,7 +686,7 @@
           <a:p>
             <a:r>
               <a:rPr lang="en-US" dirty="0"/>
-              <a:t>Scale: the market we are defending. 460 attacks in 2025. More than half of devices run known-vulnerable firmware.</a:t>
+              <a:t>Scale: 460 attacks in 2025 (FBI IC3), ~53% of hospital devices run known-vulnerable firmware.</a:t>
             </a:r>
             <a:endParaRPr lang="en-US" dirty="0"/>
           </a:p>
@@ -777,7 +774,7 @@
           <a:p>
             <a:r>
               <a:rPr lang="en-US" dirty="0"/>
-              <a:t>Seven stages, Human gate highlighted. Every stage writes to one shared row — hardware, simulator, dashboard all read the same truth.</a:t>
+              <a:t>Seven stages. Human gate highlighted. One shared truth across hardware + simulator + dashboard.</a:t>
             </a:r>
             <a:endParaRPr lang="en-US" dirty="0"/>
           </a:p>
@@ -865,7 +862,7 @@
           <a:p>
             <a:r>
               <a:rPr lang="en-US" dirty="0"/>
-              <a:t>The AI at work. Dashboard screenshot shows streaming reasoning, visible confidence, self-correction, and the real patch diff.</a:t>
+              <a:t>Dashboard screenshot + four live-reasoning behaviors. The model shows its work and rejects its own first patch.</a:t>
             </a:r>
             <a:endParaRPr lang="en-US" dirty="0"/>
           </a:p>
@@ -953,7 +950,7 @@
           <a:p>
             <a:r>
               <a:rPr lang="en-US" dirty="0"/>
-              <a:t>The proof: same exploit, re-sent after the patch. Before 200 OK (red). After 401 Unauthorized (green). Hard-asserted — no LLM judging.</a:t>
+              <a:t>Proof: same bytes, re-sent after patch. 200 → 401. Hard-asserted. No LLM judging.</a:t>
             </a:r>
             <a:endParaRPr lang="en-US" dirty="0"/>
           </a:p>
@@ -1041,7 +1038,7 @@
           <a:p>
             <a:r>
               <a:rPr lang="en-US" dirty="0"/>
-              <a:t>Compliance: FDA §524B already requires a repeatable find-and-fix process. Every patch leaves this receipt behind.</a:t>
+              <a:t>FDA §524B already requires a repeatable find-and-fix process. Every patch leaves this receipt behind.</a:t>
             </a:r>
             <a:endParaRPr lang="en-US" dirty="0"/>
           </a:p>
@@ -1129,7 +1126,7 @@
           <a:p>
             <a:r>
               <a:rPr lang="en-US" dirty="0"/>
-              <a:t>Scale vision: 1 of 3,412 devices. The dot grid shows one red bed (the device PreVent just patched) in a sea of healed green devices.</a:t>
+              <a:t>Scale vision: 1 of 3,412. One red bed (today) in a sea of healed green devices (ward.)</a:t>
             </a:r>
             <a:endParaRPr lang="en-US" dirty="0"/>
           </a:p>
@@ -1315,53 +1312,14 @@
       </p:grpSpPr>
       <p:sp>
         <p:nvSpPr>
-          <p:cNvPr id="2" name="Text 0"/>
-          <p:cNvSpPr txBox="1"/>
-          <p:nvPr/>
-        </p:nvSpPr>
-        <p:spPr>
-          <a:xfrm>
-            <a:off x="457200" y="6537960"/>
-            <a:ext cx="11247120" cy="228600"/>
-          </a:xfrm>
-          <a:prstGeom prst="rect">
-            <a:avLst/>
-          </a:prstGeom>
-          <a:noFill/>
-          <a:ln/>
-        </p:spPr>
-        <p:txBody>
-          <a:bodyPr wrap="square" rtlCol="0" anchor="ctr"/>
-          <a:lstStyle/>
-          <a:p>
-            <a:pPr indent="0" marL="0">
-              <a:buNone/>
-            </a:pPr>
-            <a:r>
-              <a:rPr lang="en-US" sz="900" spc="300" kern="0" dirty="0">
-                <a:solidFill>
-                  <a:srgbClr val="777779"/>
-                </a:solidFill>
-                <a:latin typeface="Consolas" pitchFamily="34" charset="0"/>
-                <a:ea typeface="Consolas" pitchFamily="34" charset="-122"/>
-                <a:cs typeface="Consolas" pitchFamily="34" charset="-120"/>
-              </a:rPr>
-              <a:t>PREVENT · CAL HACKS 13.0 · OCT 2026</a:t>
-            </a:r>
-            <a:endParaRPr lang="en-US" sz="900" dirty="0"/>
-          </a:p>
-        </p:txBody>
-      </p:sp>
-      <p:sp>
-        <p:nvSpPr>
-          <p:cNvPr id="3" name="Shape 1"/>
-          <p:cNvSpPr/>
-          <p:nvPr/>
-        </p:nvSpPr>
-        <p:spPr>
-          <a:xfrm>
-            <a:off x="457200" y="6492240"/>
-            <a:ext cx="11247120" cy="0"/>
+          <p:cNvPr id="2" name="Shape 0"/>
+          <p:cNvSpPr/>
+          <p:nvPr/>
+        </p:nvSpPr>
+        <p:spPr>
+          <a:xfrm>
+            <a:off x="457200" y="6446520"/>
+            <a:ext cx="11274552" cy="0"/>
           </a:xfrm>
           <a:prstGeom prst="line">
             <a:avLst/>
@@ -1374,6 +1332,45 @@
             <a:prstDash val="solid"/>
           </a:ln>
         </p:spPr>
+      </p:sp>
+      <p:sp>
+        <p:nvSpPr>
+          <p:cNvPr id="3" name="Text 1"/>
+          <p:cNvSpPr txBox="1"/>
+          <p:nvPr/>
+        </p:nvSpPr>
+        <p:spPr>
+          <a:xfrm>
+            <a:off x="457200" y="6510528"/>
+            <a:ext cx="11274552" cy="274320"/>
+          </a:xfrm>
+          <a:prstGeom prst="rect">
+            <a:avLst/>
+          </a:prstGeom>
+          <a:noFill/>
+          <a:ln/>
+        </p:spPr>
+        <p:txBody>
+          <a:bodyPr wrap="square" lIns="0" tIns="0" rIns="0" bIns="0" rtlCol="0" anchor="ctr"/>
+          <a:lstStyle/>
+          <a:p>
+            <a:pPr indent="0" marL="0">
+              <a:buNone/>
+            </a:pPr>
+            <a:r>
+              <a:rPr lang="en-US" sz="900" spc="300" kern="0" dirty="0">
+                <a:solidFill>
+                  <a:srgbClr val="777779"/>
+                </a:solidFill>
+                <a:latin typeface="Consolas" pitchFamily="34" charset="0"/>
+                <a:ea typeface="Consolas" pitchFamily="34" charset="-122"/>
+                <a:cs typeface="Consolas" pitchFamily="34" charset="-120"/>
+              </a:rPr>
+              <a:t>PREVENT · CAL HACKS 13.0 · OCT 2026</a:t>
+            </a:r>
+            <a:endParaRPr lang="en-US" sz="900" dirty="0"/>
+          </a:p>
+        </p:txBody>
       </p:sp>
     </p:spTree>
   </p:cSld>
@@ -1687,7 +1684,7 @@
         <p:spPr>
           <a:xfrm>
             <a:off x="457200" y="365760"/>
-            <a:ext cx="11247120" cy="274320"/>
+            <a:ext cx="11274552" cy="274320"/>
           </a:xfrm>
           <a:prstGeom prst="rect">
             <a:avLst/>
@@ -1725,7 +1722,7 @@
                 <a:ea typeface="Consolas" pitchFamily="34" charset="-122"/>
                 <a:cs typeface="Consolas" pitchFamily="34" charset="-120"/>
               </a:rPr>
-              <a:t>—  EXHIBIT A · THE ATTACK CLASS IS REAL</a:t>
+              <a:t>—  EXHIBIT · THE ATTACK CLASS IS REAL</a:t>
             </a:r>
             <a:endParaRPr lang="en-US" sz="1000" dirty="0"/>
           </a:p>
@@ -1741,29 +1738,78 @@
         </p:nvPicPr>
         <p:blipFill>
           <a:blip r:embed="rId1"/>
-          <a:srcRect l="0" r="0" t="0" b="0"/>
-          <a:stretch/>
+          <a:stretch>
+            <a:fillRect/>
+          </a:stretch>
         </p:blipFill>
         <p:spPr>
           <a:xfrm rot="-180000">
-            <a:off x="365760" y="868680"/>
-            <a:ext cx="3657600" cy="4663440"/>
+            <a:off x="548640" y="914400"/>
+            <a:ext cx="3291840" cy="4261104"/>
           </a:xfrm>
           <a:prstGeom prst="rect">
             <a:avLst/>
           </a:prstGeom>
         </p:spPr>
       </p:pic>
-      <p:sp>
-        <p:nvSpPr>
-          <p:cNvPr id="4" name="Text 1"/>
-          <p:cNvSpPr txBox="1"/>
-          <p:nvPr/>
-        </p:nvSpPr>
-        <p:spPr>
-          <a:xfrm>
-            <a:off x="365760" y="5623560"/>
-            <a:ext cx="3657600" cy="685800"/>
+      <p:pic>
+        <p:nvPicPr>
+          <p:cNvPr id="4" name="Image 1" descr="/Users/sanjavan7/Documents/Startup Projects /calhacks/deck/assets/paper-wired-patient-dies.png">    </p:cNvPr>
+          <p:cNvPicPr>
+            <a:picLocks noChangeAspect="1"/>
+          </p:cNvPicPr>
+          <p:nvPr/>
+        </p:nvPicPr>
+        <p:blipFill>
+          <a:blip r:embed="rId2"/>
+          <a:stretch>
+            <a:fillRect/>
+          </a:stretch>
+        </p:blipFill>
+        <p:spPr>
+          <a:xfrm>
+            <a:off x="4178808" y="685800"/>
+            <a:ext cx="3840480" cy="4974336"/>
+          </a:xfrm>
+          <a:prstGeom prst="rect">
+            <a:avLst/>
+          </a:prstGeom>
+        </p:spPr>
+      </p:pic>
+      <p:pic>
+        <p:nvPicPr>
+          <p:cNvPr id="5" name="Image 2" descr="/Users/sanjavan7/Documents/Startup Projects /calhacks/deck/assets/paper-pbs-ascension.png">    </p:cNvPr>
+          <p:cNvPicPr>
+            <a:picLocks noChangeAspect="1"/>
+          </p:cNvPicPr>
+          <p:nvPr/>
+        </p:nvPicPr>
+        <p:blipFill>
+          <a:blip r:embed="rId3"/>
+          <a:stretch>
+            <a:fillRect/>
+          </a:stretch>
+        </p:blipFill>
+        <p:spPr>
+          <a:xfrm rot="180000">
+            <a:off x="8348472" y="914400"/>
+            <a:ext cx="3291840" cy="4261104"/>
+          </a:xfrm>
+          <a:prstGeom prst="rect">
+            <a:avLst/>
+          </a:prstGeom>
+        </p:spPr>
+      </p:pic>
+      <p:sp>
+        <p:nvSpPr>
+          <p:cNvPr id="6" name="Text 1"/>
+          <p:cNvSpPr txBox="1"/>
+          <p:nvPr/>
+        </p:nvSpPr>
+        <p:spPr>
+          <a:xfrm>
+            <a:off x="548640" y="5394960"/>
+            <a:ext cx="3291840" cy="365760"/>
           </a:xfrm>
           <a:prstGeom prst="rect">
             <a:avLst/>
@@ -1779,7 +1825,7 @@
               <a:buNone/>
             </a:pPr>
             <a:r>
-              <a:rPr lang="en-US" sz="1800" b="1" dirty="0">
+              <a:rPr lang="en-US" sz="1600" b="1" dirty="0">
                 <a:solidFill>
                   <a:srgbClr val="FAFAFA"/>
                 </a:solidFill>
@@ -1789,14 +1835,36 @@
               </a:rPr>
               <a:t>MIT Technology Review</a:t>
             </a:r>
-            <a:endParaRPr lang="en-US" sz="1800" dirty="0"/>
-          </a:p>
+            <a:endParaRPr lang="en-US" sz="1600" dirty="0"/>
+          </a:p>
+        </p:txBody>
+      </p:sp>
+      <p:sp>
+        <p:nvSpPr>
+          <p:cNvPr id="7" name="Text 2"/>
+          <p:cNvSpPr txBox="1"/>
+          <p:nvPr/>
+        </p:nvSpPr>
+        <p:spPr>
+          <a:xfrm>
+            <a:off x="548640" y="5742432"/>
+            <a:ext cx="3291840" cy="201168"/>
+          </a:xfrm>
+          <a:prstGeom prst="rect">
+            <a:avLst/>
+          </a:prstGeom>
+          <a:noFill/>
+          <a:ln/>
+        </p:spPr>
+        <p:txBody>
+          <a:bodyPr wrap="square" lIns="0" tIns="0" rIns="0" bIns="0" rtlCol="0" anchor="ctr"/>
+          <a:lstStyle/>
           <a:p>
             <a:pPr algn="ctr" indent="0" marL="0">
               <a:buNone/>
             </a:pPr>
             <a:r>
-              <a:rPr lang="en-US" sz="900" spc="200" kern="0" dirty="0">
+              <a:rPr lang="en-US" sz="850" spc="200" kern="0" dirty="0">
                 <a:solidFill>
                   <a:srgbClr val="777779"/>
                 </a:solidFill>
@@ -1804,16 +1872,38 @@
                 <a:ea typeface="Consolas" pitchFamily="34" charset="-122"/>
                 <a:cs typeface="Consolas" pitchFamily="34" charset="-120"/>
               </a:rPr>
-              <a:t>PATRICK HOWELL O'NEILL  ·  SEP 18  ·  2020</a:t>
-            </a:r>
-            <a:endParaRPr lang="en-US" sz="1800" dirty="0"/>
-          </a:p>
+              <a:t>PATRICK HOWELL O'NEILL  ·  SEP 18 · 2020</a:t>
+            </a:r>
+            <a:endParaRPr lang="en-US" sz="850" dirty="0"/>
+          </a:p>
+        </p:txBody>
+      </p:sp>
+      <p:sp>
+        <p:nvSpPr>
+          <p:cNvPr id="8" name="Text 3"/>
+          <p:cNvSpPr txBox="1"/>
+          <p:nvPr/>
+        </p:nvSpPr>
+        <p:spPr>
+          <a:xfrm>
+            <a:off x="548640" y="5925312"/>
+            <a:ext cx="3291840" cy="201168"/>
+          </a:xfrm>
+          <a:prstGeom prst="rect">
+            <a:avLst/>
+          </a:prstGeom>
+          <a:noFill/>
+          <a:ln/>
+        </p:spPr>
+        <p:txBody>
+          <a:bodyPr wrap="square" lIns="0" tIns="0" rIns="0" bIns="0" rtlCol="0" anchor="ctr"/>
+          <a:lstStyle/>
           <a:p>
             <a:pPr algn="ctr" indent="0" marL="0">
               <a:buNone/>
             </a:pPr>
             <a:r>
-              <a:rPr lang="en-US" sz="900" spc="200" kern="0" dirty="0">
+              <a:rPr lang="en-US" sz="850" spc="200" kern="0" dirty="0">
                 <a:solidFill>
                   <a:srgbClr val="BABABB"/>
                 </a:solidFill>
@@ -1823,43 +1913,20 @@
               </a:rPr>
               <a:t>first documented ransomware death</a:t>
             </a:r>
-            <a:endParaRPr lang="en-US" sz="1800" dirty="0"/>
-          </a:p>
-        </p:txBody>
-      </p:sp>
-      <p:pic>
-        <p:nvPicPr>
-          <p:cNvPr id="5" name="Image 1" descr="/Users/sanjavan7/Documents/Startup Projects /calhacks/deck/assets/paper-wired-patient-dies.png">    </p:cNvPr>
-          <p:cNvPicPr>
-            <a:picLocks noChangeAspect="1"/>
-          </p:cNvPicPr>
-          <p:nvPr/>
-        </p:nvPicPr>
-        <p:blipFill>
-          <a:blip r:embed="rId2"/>
-          <a:srcRect l="0" r="0" t="0" b="0"/>
-          <a:stretch/>
-        </p:blipFill>
-        <p:spPr>
-          <a:xfrm>
-            <a:off x="4297680" y="685800"/>
-            <a:ext cx="3931920" cy="4937760"/>
-          </a:xfrm>
-          <a:prstGeom prst="rect">
-            <a:avLst/>
-          </a:prstGeom>
-        </p:spPr>
-      </p:pic>
-      <p:sp>
-        <p:nvSpPr>
-          <p:cNvPr id="6" name="Text 2"/>
-          <p:cNvSpPr txBox="1"/>
-          <p:nvPr/>
-        </p:nvSpPr>
-        <p:spPr>
-          <a:xfrm>
-            <a:off x="4297680" y="5715000"/>
-            <a:ext cx="3931920" cy="685800"/>
+            <a:endParaRPr lang="en-US" sz="850" dirty="0"/>
+          </a:p>
+        </p:txBody>
+      </p:sp>
+      <p:sp>
+        <p:nvSpPr>
+          <p:cNvPr id="9" name="Text 4"/>
+          <p:cNvSpPr txBox="1"/>
+          <p:nvPr/>
+        </p:nvSpPr>
+        <p:spPr>
+          <a:xfrm>
+            <a:off x="4178808" y="5760720"/>
+            <a:ext cx="3840480" cy="365760"/>
           </a:xfrm>
           <a:prstGeom prst="rect">
             <a:avLst/>
@@ -1875,7 +1942,7 @@
               <a:buNone/>
             </a:pPr>
             <a:r>
-              <a:rPr lang="en-US" sz="2400" b="1" dirty="0">
+              <a:rPr lang="en-US" sz="2000" b="1" dirty="0">
                 <a:solidFill>
                   <a:srgbClr val="FF2D4A"/>
                 </a:solidFill>
@@ -1885,14 +1952,36 @@
               </a:rPr>
               <a:t>WIRED</a:t>
             </a:r>
-            <a:endParaRPr lang="en-US" sz="2400" dirty="0"/>
-          </a:p>
+            <a:endParaRPr lang="en-US" sz="2000" dirty="0"/>
+          </a:p>
+        </p:txBody>
+      </p:sp>
+      <p:sp>
+        <p:nvSpPr>
+          <p:cNvPr id="10" name="Text 5"/>
+          <p:cNvSpPr txBox="1"/>
+          <p:nvPr/>
+        </p:nvSpPr>
+        <p:spPr>
+          <a:xfrm>
+            <a:off x="4178808" y="6108192"/>
+            <a:ext cx="3840480" cy="201168"/>
+          </a:xfrm>
+          <a:prstGeom prst="rect">
+            <a:avLst/>
+          </a:prstGeom>
+          <a:noFill/>
+          <a:ln/>
+        </p:spPr>
+        <p:txBody>
+          <a:bodyPr wrap="square" lIns="0" tIns="0" rIns="0" bIns="0" rtlCol="0" anchor="ctr"/>
+          <a:lstStyle/>
           <a:p>
             <a:pPr algn="ctr" indent="0" marL="0">
               <a:buNone/>
             </a:pPr>
             <a:r>
-              <a:rPr lang="en-US" sz="900" spc="200" kern="0" dirty="0">
+              <a:rPr lang="en-US" sz="850" spc="200" kern="0" dirty="0">
                 <a:solidFill>
                   <a:srgbClr val="777779"/>
                 </a:solidFill>
@@ -1900,62 +1989,100 @@
                 <a:ea typeface="Consolas" pitchFamily="34" charset="-122"/>
                 <a:cs typeface="Consolas" pitchFamily="34" charset="-120"/>
               </a:rPr>
-              <a:t>DAN GOODIN  ·  ARS TECHNICA  ·  SEP 19  ·  2020</a:t>
-            </a:r>
-            <a:endParaRPr lang="en-US" sz="2400" dirty="0"/>
-          </a:p>
+              <a:t>DAN GOODIN · ARS TECHNICA · SEP 19 · 2020</a:t>
+            </a:r>
+            <a:endParaRPr lang="en-US" sz="850" dirty="0"/>
+          </a:p>
+        </p:txBody>
+      </p:sp>
+      <p:sp>
+        <p:nvSpPr>
+          <p:cNvPr id="11" name="Text 6"/>
+          <p:cNvSpPr txBox="1"/>
+          <p:nvPr/>
+        </p:nvSpPr>
+        <p:spPr>
+          <a:xfrm>
+            <a:off x="8348472" y="5394960"/>
+            <a:ext cx="3291840" cy="365760"/>
+          </a:xfrm>
+          <a:prstGeom prst="rect">
+            <a:avLst/>
+          </a:prstGeom>
+          <a:noFill/>
+          <a:ln/>
+        </p:spPr>
+        <p:txBody>
+          <a:bodyPr wrap="square" lIns="0" tIns="0" rIns="0" bIns="0" rtlCol="0" anchor="ctr"/>
+          <a:lstStyle/>
           <a:p>
             <a:pPr algn="ctr" indent="0" marL="0">
               <a:buNone/>
             </a:pPr>
             <a:r>
-              <a:rPr lang="en-US" sz="900" spc="200" kern="0" dirty="0">
-                <a:solidFill>
-                  <a:srgbClr val="FF2D4A"/>
+              <a:rPr lang="en-US" sz="1600" b="1" dirty="0">
+                <a:solidFill>
+                  <a:srgbClr val="FAFAFA"/>
+                </a:solidFill>
+                <a:latin typeface="Cambria" pitchFamily="34" charset="0"/>
+                <a:ea typeface="Cambria" pitchFamily="34" charset="-122"/>
+                <a:cs typeface="Cambria" pitchFamily="34" charset="-120"/>
+              </a:rPr>
+              <a:t>PBS Wisconsin</a:t>
+            </a:r>
+            <a:endParaRPr lang="en-US" sz="1600" dirty="0"/>
+          </a:p>
+        </p:txBody>
+      </p:sp>
+      <p:sp>
+        <p:nvSpPr>
+          <p:cNvPr id="12" name="Text 7"/>
+          <p:cNvSpPr txBox="1"/>
+          <p:nvPr/>
+        </p:nvSpPr>
+        <p:spPr>
+          <a:xfrm>
+            <a:off x="8348472" y="5742432"/>
+            <a:ext cx="3291840" cy="201168"/>
+          </a:xfrm>
+          <a:prstGeom prst="rect">
+            <a:avLst/>
+          </a:prstGeom>
+          <a:noFill/>
+          <a:ln/>
+        </p:spPr>
+        <p:txBody>
+          <a:bodyPr wrap="square" lIns="0" tIns="0" rIns="0" bIns="0" rtlCol="0" anchor="ctr"/>
+          <a:lstStyle/>
+          <a:p>
+            <a:pPr algn="ctr" indent="0" marL="0">
+              <a:buNone/>
+            </a:pPr>
+            <a:r>
+              <a:rPr lang="en-US" sz="850" spc="200" kern="0" dirty="0">
+                <a:solidFill>
+                  <a:srgbClr val="777779"/>
                 </a:solidFill>
                 <a:latin typeface="Consolas" pitchFamily="34" charset="0"/>
                 <a:ea typeface="Consolas" pitchFamily="34" charset="-122"/>
                 <a:cs typeface="Consolas" pitchFamily="34" charset="-120"/>
               </a:rPr>
-              <a:t>— EXHIBIT A —  KNOWN VPN VULN  ·  PATIENT DIED</a:t>
-            </a:r>
-            <a:endParaRPr lang="en-US" sz="2400" dirty="0"/>
-          </a:p>
-        </p:txBody>
-      </p:sp>
-      <p:pic>
-        <p:nvPicPr>
-          <p:cNvPr id="7" name="Image 2" descr="/Users/sanjavan7/Documents/Startup Projects /calhacks/deck/assets/paper-pbs-ascension.png">    </p:cNvPr>
-          <p:cNvPicPr>
-            <a:picLocks noChangeAspect="1"/>
-          </p:cNvPicPr>
-          <p:nvPr/>
-        </p:nvPicPr>
-        <p:blipFill>
-          <a:blip r:embed="rId3"/>
-          <a:srcRect l="0" r="0" t="0" b="0"/>
-          <a:stretch/>
-        </p:blipFill>
-        <p:spPr>
-          <a:xfrm rot="180000">
-            <a:off x="8503920" y="868680"/>
-            <a:ext cx="3657600" cy="4663440"/>
-          </a:xfrm>
-          <a:prstGeom prst="rect">
-            <a:avLst/>
-          </a:prstGeom>
-        </p:spPr>
-      </p:pic>
-      <p:sp>
-        <p:nvSpPr>
-          <p:cNvPr id="8" name="Text 3"/>
-          <p:cNvSpPr txBox="1"/>
-          <p:nvPr/>
-        </p:nvSpPr>
-        <p:spPr>
-          <a:xfrm>
-            <a:off x="8503920" y="5623560"/>
-            <a:ext cx="3657600" cy="685800"/>
+              <a:t>ASSOCIATED PRESS  ·  MAY 9 · 2024</a:t>
+            </a:r>
+            <a:endParaRPr lang="en-US" sz="850" dirty="0"/>
+          </a:p>
+        </p:txBody>
+      </p:sp>
+      <p:sp>
+        <p:nvSpPr>
+          <p:cNvPr id="13" name="Text 8"/>
+          <p:cNvSpPr txBox="1"/>
+          <p:nvPr/>
+        </p:nvSpPr>
+        <p:spPr>
+          <a:xfrm>
+            <a:off x="8348472" y="5925312"/>
+            <a:ext cx="3291840" cy="201168"/>
           </a:xfrm>
           <a:prstGeom prst="rect">
             <a:avLst/>
@@ -1971,41 +2098,46 @@
               <a:buNone/>
             </a:pPr>
             <a:r>
-              <a:rPr lang="en-US" sz="1800" b="1" dirty="0">
-                <a:solidFill>
-                  <a:srgbClr val="FAFAFA"/>
-                </a:solidFill>
-                <a:latin typeface="Cambria" pitchFamily="34" charset="0"/>
-                <a:ea typeface="Cambria" pitchFamily="34" charset="-122"/>
-                <a:cs typeface="Cambria" pitchFamily="34" charset="-120"/>
-              </a:rPr>
-              <a:t>PBS Wisconsin</a:t>
-            </a:r>
-            <a:endParaRPr lang="en-US" sz="1800" dirty="0"/>
-          </a:p>
-          <a:p>
-            <a:pPr algn="ctr" indent="0" marL="0">
-              <a:buNone/>
-            </a:pPr>
-            <a:r>
-              <a:rPr lang="en-US" sz="900" spc="200" kern="0" dirty="0">
-                <a:solidFill>
-                  <a:srgbClr val="777779"/>
+              <a:rPr lang="en-US" sz="850" spc="200" kern="0" dirty="0">
+                <a:solidFill>
+                  <a:srgbClr val="BABABB"/>
                 </a:solidFill>
                 <a:latin typeface="Consolas" pitchFamily="34" charset="0"/>
                 <a:ea typeface="Consolas" pitchFamily="34" charset="-122"/>
                 <a:cs typeface="Consolas" pitchFamily="34" charset="-120"/>
               </a:rPr>
-              <a:t>ASSOCIATED PRESS  ·  MAY 9  ·  2024</a:t>
-            </a:r>
-            <a:endParaRPr lang="en-US" sz="1800" dirty="0"/>
-          </a:p>
+              <a:t>4 years later  ·  same attack class</a:t>
+            </a:r>
+            <a:endParaRPr lang="en-US" sz="850" dirty="0"/>
+          </a:p>
+        </p:txBody>
+      </p:sp>
+      <p:sp>
+        <p:nvSpPr>
+          <p:cNvPr id="14" name="Text 9"/>
+          <p:cNvSpPr txBox="1"/>
+          <p:nvPr/>
+        </p:nvSpPr>
+        <p:spPr>
+          <a:xfrm>
+            <a:off x="457200" y="6199632"/>
+            <a:ext cx="11274552" cy="201168"/>
+          </a:xfrm>
+          <a:prstGeom prst="rect">
+            <a:avLst/>
+          </a:prstGeom>
+          <a:noFill/>
+          <a:ln/>
+        </p:spPr>
+        <p:txBody>
+          <a:bodyPr wrap="square" lIns="0" tIns="0" rIns="0" bIns="0" rtlCol="0" anchor="ctr"/>
+          <a:lstStyle/>
           <a:p>
             <a:pPr algn="ctr" indent="0" marL="0">
               <a:buNone/>
             </a:pPr>
             <a:r>
-              <a:rPr lang="en-US" sz="900" spc="200" kern="0" dirty="0">
+              <a:rPr lang="en-US" sz="1000" spc="200" kern="0" dirty="0">
                 <a:solidFill>
                   <a:srgbClr val="BABABB"/>
                 </a:solidFill>
@@ -2013,62 +2145,23 @@
                 <a:ea typeface="Consolas" pitchFamily="34" charset="-122"/>
                 <a:cs typeface="Consolas" pitchFamily="34" charset="-120"/>
               </a:rPr>
-              <a:t>4 years later  ·  same attack class</a:t>
-            </a:r>
-            <a:endParaRPr lang="en-US" sz="1800" dirty="0"/>
-          </a:p>
-        </p:txBody>
-      </p:sp>
-      <p:sp>
-        <p:nvSpPr>
-          <p:cNvPr id="9" name="Text 4"/>
-          <p:cNvSpPr txBox="1"/>
-          <p:nvPr/>
-        </p:nvSpPr>
-        <p:spPr>
-          <a:xfrm>
-            <a:off x="457200" y="6263640"/>
-            <a:ext cx="11247120" cy="228600"/>
-          </a:xfrm>
-          <a:prstGeom prst="rect">
-            <a:avLst/>
-          </a:prstGeom>
-          <a:noFill/>
-          <a:ln/>
-        </p:spPr>
-        <p:txBody>
-          <a:bodyPr wrap="square" lIns="0" tIns="0" rIns="0" bIns="0" rtlCol="0" anchor="ctr"/>
-          <a:lstStyle/>
-          <a:p>
+              <a:t>Different outlets. Four years apart.  </a:t>
+            </a:r>
             <a:pPr algn="ctr" indent="0" marL="0">
               <a:buNone/>
             </a:pPr>
             <a:r>
-              <a:rPr lang="en-US" sz="1100" spc="200" kern="0" dirty="0">
-                <a:solidFill>
-                  <a:srgbClr val="BABABB"/>
+              <a:rPr lang="en-US" sz="1000" spc="200" kern="0" dirty="0">
+                <a:solidFill>
+                  <a:srgbClr val="FF2D4A"/>
                 </a:solidFill>
                 <a:latin typeface="Consolas" pitchFamily="34" charset="0"/>
                 <a:ea typeface="Consolas" pitchFamily="34" charset="-122"/>
                 <a:cs typeface="Consolas" pitchFamily="34" charset="-120"/>
               </a:rPr>
-              <a:t>Different outlets. Four years apart.  </a:t>
-            </a:r>
-            <a:pPr algn="ctr" indent="0" marL="0">
-              <a:buNone/>
-            </a:pPr>
-            <a:r>
-              <a:rPr lang="en-US" sz="1100" spc="200" kern="0" dirty="0">
-                <a:solidFill>
-                  <a:srgbClr val="FF2D4A"/>
-                </a:solidFill>
-                <a:latin typeface="Consolas" pitchFamily="34" charset="0"/>
-                <a:ea typeface="Consolas" pitchFamily="34" charset="-122"/>
-                <a:cs typeface="Consolas" pitchFamily="34" charset="-120"/>
-              </a:rPr>
               <a:t>Same known vulnerability class · no tool to find, fix, and verify it at scale.</a:t>
             </a:r>
-            <a:endParaRPr lang="en-US" sz="1100" dirty="0"/>
+            <a:endParaRPr lang="en-US" sz="1000" dirty="0"/>
           </a:p>
         </p:txBody>
       </p:sp>
@@ -2106,7 +2199,7 @@
         <p:spPr>
           <a:xfrm>
             <a:off x="457200" y="365760"/>
-            <a:ext cx="11247120" cy="274320"/>
+            <a:ext cx="11274552" cy="274320"/>
           </a:xfrm>
           <a:prstGeom prst="rect">
             <a:avLst/>
@@ -2159,23 +2252,23 @@
         <p:spPr>
           <a:xfrm>
             <a:off x="457200" y="777240"/>
-            <a:ext cx="11247120" cy="1828800"/>
-          </a:xfrm>
-          <a:prstGeom prst="rect">
-            <a:avLst/>
-          </a:prstGeom>
-          <a:noFill/>
-          <a:ln/>
-        </p:spPr>
-        <p:txBody>
-          <a:bodyPr wrap="square" lIns="0" tIns="0" rIns="0" bIns="0" rtlCol="0" anchor="ctr"/>
-          <a:lstStyle/>
-          <a:p>
-            <a:pPr indent="0" marL="0">
-              <a:buNone/>
-            </a:pPr>
-            <a:r>
-              <a:rPr lang="en-US" sz="4400" b="1" spc="-100" kern="0" dirty="0">
+            <a:ext cx="11274552" cy="1737360"/>
+          </a:xfrm>
+          <a:prstGeom prst="rect">
+            <a:avLst/>
+          </a:prstGeom>
+          <a:noFill/>
+          <a:ln/>
+        </p:spPr>
+        <p:txBody>
+          <a:bodyPr wrap="square" lIns="0" tIns="0" rIns="0" bIns="0" rtlCol="0" anchor="ctr"/>
+          <a:lstStyle/>
+          <a:p>
+            <a:pPr indent="0" marL="0">
+              <a:buNone/>
+            </a:pPr>
+            <a:r>
+              <a:rPr lang="en-US" sz="3600" b="1" spc="-100" kern="0" dirty="0">
                 <a:solidFill>
                   <a:srgbClr val="FAFAFA"/>
                 </a:solidFill>
@@ -2189,7 +2282,7 @@
               <a:buNone/>
             </a:pPr>
             <a:r>
-              <a:rPr lang="en-US" sz="4400" i="1" spc="-100" kern="0" dirty="0">
+              <a:rPr lang="en-US" sz="3600" i="1" spc="-100" kern="0" dirty="0">
                 <a:solidFill>
                   <a:srgbClr val="FF2D4A"/>
                 </a:solidFill>
@@ -2202,14 +2295,14 @@
             <a:pPr indent="0" marL="0">
               <a:buNone/>
             </a:pPr>
-            <a:endParaRPr lang="en-US" sz="4400" dirty="0"/>
-          </a:p>
-          <a:p>
-            <a:pPr indent="0" marL="0">
-              <a:buNone/>
-            </a:pPr>
-            <a:r>
-              <a:rPr lang="en-US" sz="4400" b="1" spc="-100" kern="0" dirty="0">
+            <a:endParaRPr lang="en-US" sz="3600" dirty="0"/>
+          </a:p>
+          <a:p>
+            <a:pPr indent="0" marL="0">
+              <a:buNone/>
+            </a:pPr>
+            <a:r>
+              <a:rPr lang="en-US" sz="3600" b="1" spc="-100" kern="0" dirty="0">
                 <a:solidFill>
                   <a:srgbClr val="FAFAFA"/>
                 </a:solidFill>
@@ -2219,7 +2312,7 @@
               </a:rPr>
               <a:t>The patient keeps crashing.</a:t>
             </a:r>
-            <a:endParaRPr lang="en-US" sz="4400" dirty="0"/>
+            <a:endParaRPr lang="en-US" sz="3600" dirty="0"/>
           </a:p>
         </p:txBody>
       </p:sp>
@@ -2231,8 +2324,8 @@
         </p:nvSpPr>
         <p:spPr>
           <a:xfrm>
-            <a:off x="457200" y="3017520"/>
-            <a:ext cx="5577840" cy="2377440"/>
+            <a:off x="457200" y="2743200"/>
+            <a:ext cx="5486400" cy="2651760"/>
           </a:xfrm>
           <a:prstGeom prst="rect">
             <a:avLst/>
@@ -2256,8 +2349,8 @@
         </p:nvSpPr>
         <p:spPr>
           <a:xfrm>
-            <a:off x="731520" y="3200400"/>
-            <a:ext cx="5029200" cy="274320"/>
+            <a:off x="731520" y="2926080"/>
+            <a:ext cx="4937760" cy="274320"/>
           </a:xfrm>
           <a:prstGeom prst="rect">
             <a:avLst/>
@@ -2295,24 +2388,24 @@
         </p:nvSpPr>
         <p:spPr>
           <a:xfrm>
-            <a:off x="731520" y="3520440"/>
-            <a:ext cx="5029200" cy="1280160"/>
-          </a:xfrm>
-          <a:prstGeom prst="rect">
-            <a:avLst/>
-          </a:prstGeom>
-          <a:noFill/>
-          <a:ln/>
-        </p:spPr>
-        <p:txBody>
-          <a:bodyPr wrap="square" lIns="0" tIns="0" rIns="0" bIns="0" rtlCol="0" anchor="ctr"/>
-          <a:lstStyle/>
-          <a:p>
-            <a:pPr indent="0" marL="0">
-              <a:buNone/>
-            </a:pPr>
-            <a:r>
-              <a:rPr lang="en-US" sz="9200" b="1" spc="-200" kern="0" dirty="0">
+            <a:off x="731520" y="3246120"/>
+            <a:ext cx="4937760" cy="1463040"/>
+          </a:xfrm>
+          <a:prstGeom prst="rect">
+            <a:avLst/>
+          </a:prstGeom>
+          <a:noFill/>
+          <a:ln/>
+        </p:spPr>
+        <p:txBody>
+          <a:bodyPr wrap="square" lIns="0" tIns="0" rIns="0" bIns="0" rtlCol="0" anchor="ctr"/>
+          <a:lstStyle/>
+          <a:p>
+            <a:pPr indent="0" marL="0">
+              <a:buNone/>
+            </a:pPr>
+            <a:r>
+              <a:rPr lang="en-US" sz="4400" b="1" spc="-200" kern="0" dirty="0">
                 <a:solidFill>
                   <a:srgbClr val="BABABB"/>
                 </a:solidFill>
@@ -2320,13 +2413,13 @@
                 <a:ea typeface="Cambria" pitchFamily="34" charset="-122"/>
                 <a:cs typeface="Cambria" pitchFamily="34" charset="-120"/>
               </a:rPr>
-              <a:t>HR  </a:t>
-            </a:r>
-            <a:pPr indent="0" marL="0">
-              <a:buNone/>
-            </a:pPr>
-            <a:r>
-              <a:rPr lang="en-US" sz="9200" b="1" spc="-200" kern="0" dirty="0">
+              <a:t>HR </a:t>
+            </a:r>
+            <a:pPr indent="0" marL="0">
+              <a:buNone/>
+            </a:pPr>
+            <a:r>
+              <a:rPr lang="en-US" sz="10000" b="1" spc="-200" kern="0" dirty="0">
                 <a:solidFill>
                   <a:srgbClr val="22E07A"/>
                 </a:solidFill>
@@ -2340,7 +2433,7 @@
               <a:buNone/>
             </a:pPr>
             <a:r>
-              <a:rPr lang="en-US" sz="5000" b="1" spc="-200" kern="0" dirty="0">
+              <a:rPr lang="en-US" sz="4400" b="1" spc="-200" kern="0" dirty="0">
                 <a:solidFill>
                   <a:srgbClr val="BABABB"/>
                 </a:solidFill>
@@ -2348,13 +2441,13 @@
                 <a:ea typeface="Cambria" pitchFamily="34" charset="-122"/>
                 <a:cs typeface="Cambria" pitchFamily="34" charset="-120"/>
               </a:rPr>
-              <a:t>   SpO2  </a:t>
-            </a:r>
-            <a:pPr indent="0" marL="0">
-              <a:buNone/>
-            </a:pPr>
-            <a:r>
-              <a:rPr lang="en-US" sz="9200" b="1" spc="-200" kern="0" dirty="0">
+              <a:t>    SpO₂ </a:t>
+            </a:r>
+            <a:pPr indent="0" marL="0">
+              <a:buNone/>
+            </a:pPr>
+            <a:r>
+              <a:rPr lang="en-US" sz="10000" b="1" spc="-200" kern="0" dirty="0">
                 <a:solidFill>
                   <a:srgbClr val="22E07A"/>
                 </a:solidFill>
@@ -2362,9 +2455,23 @@
                 <a:ea typeface="Cambria" pitchFamily="34" charset="-122"/>
                 <a:cs typeface="Cambria" pitchFamily="34" charset="-120"/>
               </a:rPr>
-              <a:t>98%</a:t>
-            </a:r>
-            <a:endParaRPr lang="en-US" sz="9200" dirty="0"/>
+              <a:t>98</a:t>
+            </a:r>
+            <a:pPr indent="0" marL="0">
+              <a:buNone/>
+            </a:pPr>
+            <a:r>
+              <a:rPr lang="en-US" sz="5400" b="1" spc="-200" kern="0" dirty="0">
+                <a:solidFill>
+                  <a:srgbClr val="22E07A"/>
+                </a:solidFill>
+                <a:latin typeface="Cambria" pitchFamily="34" charset="0"/>
+                <a:ea typeface="Cambria" pitchFamily="34" charset="-122"/>
+                <a:cs typeface="Cambria" pitchFamily="34" charset="-120"/>
+              </a:rPr>
+              <a:t>%</a:t>
+            </a:r>
+            <a:endParaRPr lang="en-US" sz="4400" dirty="0"/>
           </a:p>
         </p:txBody>
       </p:sp>
@@ -2376,8 +2483,8 @@
         </p:nvSpPr>
         <p:spPr>
           <a:xfrm>
-            <a:off x="731520" y="4937760"/>
-            <a:ext cx="5029200" cy="365760"/>
+            <a:off x="731520" y="4800600"/>
+            <a:ext cx="4937760" cy="365760"/>
           </a:xfrm>
           <a:prstGeom prst="rect">
             <a:avLst/>
@@ -2415,14 +2522,14 @@
         </p:nvSpPr>
         <p:spPr>
           <a:xfrm>
-            <a:off x="6172200" y="3017520"/>
-            <a:ext cx="5577840" cy="2377440"/>
-          </a:xfrm>
-          <a:prstGeom prst="rect">
-            <a:avLst/>
-          </a:prstGeom>
-          <a:solidFill>
-            <a:srgbClr val="20080A"/>
+            <a:off x="6217920" y="2743200"/>
+            <a:ext cx="5486400" cy="2651760"/>
+          </a:xfrm>
+          <a:prstGeom prst="rect">
+            <a:avLst/>
+          </a:prstGeom>
+          <a:solidFill>
+            <a:srgbClr val="1F0609"/>
           </a:solidFill>
           <a:ln w="12700">
             <a:solidFill>
@@ -2440,8 +2547,8 @@
         </p:nvSpPr>
         <p:spPr>
           <a:xfrm>
-            <a:off x="6446520" y="3200400"/>
-            <a:ext cx="5029200" cy="274320"/>
+            <a:off x="6492240" y="2926080"/>
+            <a:ext cx="4937760" cy="274320"/>
           </a:xfrm>
           <a:prstGeom prst="rect">
             <a:avLst/>
@@ -2479,24 +2586,24 @@
         </p:nvSpPr>
         <p:spPr>
           <a:xfrm>
-            <a:off x="6446520" y="3520440"/>
-            <a:ext cx="5029200" cy="1280160"/>
-          </a:xfrm>
-          <a:prstGeom prst="rect">
-            <a:avLst/>
-          </a:prstGeom>
-          <a:noFill/>
-          <a:ln/>
-        </p:spPr>
-        <p:txBody>
-          <a:bodyPr wrap="square" lIns="0" tIns="0" rIns="0" bIns="0" rtlCol="0" anchor="ctr"/>
-          <a:lstStyle/>
-          <a:p>
-            <a:pPr indent="0" marL="0">
-              <a:buNone/>
-            </a:pPr>
-            <a:r>
-              <a:rPr lang="en-US" sz="9200" b="1" spc="-200" kern="0" dirty="0">
+            <a:off x="6492240" y="3246120"/>
+            <a:ext cx="4937760" cy="1463040"/>
+          </a:xfrm>
+          <a:prstGeom prst="rect">
+            <a:avLst/>
+          </a:prstGeom>
+          <a:noFill/>
+          <a:ln/>
+        </p:spPr>
+        <p:txBody>
+          <a:bodyPr wrap="square" lIns="0" tIns="0" rIns="0" bIns="0" rtlCol="0" anchor="ctr"/>
+          <a:lstStyle/>
+          <a:p>
+            <a:pPr indent="0" marL="0">
+              <a:buNone/>
+            </a:pPr>
+            <a:r>
+              <a:rPr lang="en-US" sz="4400" b="1" spc="-200" kern="0" dirty="0">
                 <a:solidFill>
                   <a:srgbClr val="BABABB"/>
                 </a:solidFill>
@@ -2504,13 +2611,13 @@
                 <a:ea typeface="Cambria" pitchFamily="34" charset="-122"/>
                 <a:cs typeface="Cambria" pitchFamily="34" charset="-120"/>
               </a:rPr>
-              <a:t>HR  </a:t>
-            </a:r>
-            <a:pPr indent="0" marL="0">
-              <a:buNone/>
-            </a:pPr>
-            <a:r>
-              <a:rPr lang="en-US" sz="9200" b="1" spc="-200" kern="0" dirty="0">
+              <a:t>HR </a:t>
+            </a:r>
+            <a:pPr indent="0" marL="0">
+              <a:buNone/>
+            </a:pPr>
+            <a:r>
+              <a:rPr lang="en-US" sz="10000" b="1" spc="-200" kern="0" dirty="0">
                 <a:solidFill>
                   <a:srgbClr val="FF2D4A"/>
                 </a:solidFill>
@@ -2524,7 +2631,7 @@
               <a:buNone/>
             </a:pPr>
             <a:r>
-              <a:rPr lang="en-US" sz="5000" b="1" spc="-200" kern="0" dirty="0">
+              <a:rPr lang="en-US" sz="4400" b="1" spc="-200" kern="0" dirty="0">
                 <a:solidFill>
                   <a:srgbClr val="BABABB"/>
                 </a:solidFill>
@@ -2532,13 +2639,13 @@
                 <a:ea typeface="Cambria" pitchFamily="34" charset="-122"/>
                 <a:cs typeface="Cambria" pitchFamily="34" charset="-120"/>
               </a:rPr>
-              <a:t>   SpO2  </a:t>
-            </a:r>
-            <a:pPr indent="0" marL="0">
-              <a:buNone/>
-            </a:pPr>
-            <a:r>
-              <a:rPr lang="en-US" sz="9200" b="1" spc="-200" kern="0" dirty="0">
+              <a:t>    SpO₂ </a:t>
+            </a:r>
+            <a:pPr indent="0" marL="0">
+              <a:buNone/>
+            </a:pPr>
+            <a:r>
+              <a:rPr lang="en-US" sz="10000" b="1" spc="-200" kern="0" dirty="0">
                 <a:solidFill>
                   <a:srgbClr val="FF2D4A"/>
                 </a:solidFill>
@@ -2546,9 +2653,23 @@
                 <a:ea typeface="Cambria" pitchFamily="34" charset="-122"/>
                 <a:cs typeface="Cambria" pitchFamily="34" charset="-120"/>
               </a:rPr>
-              <a:t>76%</a:t>
-            </a:r>
-            <a:endParaRPr lang="en-US" sz="9200" dirty="0"/>
+              <a:t>76</a:t>
+            </a:r>
+            <a:pPr indent="0" marL="0">
+              <a:buNone/>
+            </a:pPr>
+            <a:r>
+              <a:rPr lang="en-US" sz="5400" b="1" spc="-200" kern="0" dirty="0">
+                <a:solidFill>
+                  <a:srgbClr val="FF2D4A"/>
+                </a:solidFill>
+                <a:latin typeface="Cambria" pitchFamily="34" charset="0"/>
+                <a:ea typeface="Cambria" pitchFamily="34" charset="-122"/>
+                <a:cs typeface="Cambria" pitchFamily="34" charset="-120"/>
+              </a:rPr>
+              <a:t>%</a:t>
+            </a:r>
+            <a:endParaRPr lang="en-US" sz="4400" dirty="0"/>
           </a:p>
         </p:txBody>
       </p:sp>
@@ -2560,8 +2681,8 @@
         </p:nvSpPr>
         <p:spPr>
           <a:xfrm>
-            <a:off x="6446520" y="4937760"/>
-            <a:ext cx="5029200" cy="365760"/>
+            <a:off x="6492240" y="4800600"/>
+            <a:ext cx="4937760" cy="365760"/>
           </a:xfrm>
           <a:prstGeom prst="rect">
             <a:avLst/>
@@ -2599,8 +2720,8 @@
         </p:nvSpPr>
         <p:spPr>
           <a:xfrm>
-            <a:off x="457200" y="5897880"/>
-            <a:ext cx="11247120" cy="457200"/>
+            <a:off x="457200" y="5760720"/>
+            <a:ext cx="11274552" cy="365760"/>
           </a:xfrm>
           <a:prstGeom prst="rect">
             <a:avLst/>
@@ -2616,7 +2737,7 @@
               <a:buNone/>
             </a:pPr>
             <a:r>
-              <a:rPr lang="en-US" sz="2000" i="1" dirty="0">
+              <a:rPr lang="en-US" sz="1800" i="1" dirty="0">
                 <a:solidFill>
                   <a:srgbClr val="BABABB"/>
                 </a:solidFill>
@@ -2624,13 +2745,13 @@
                 <a:ea typeface="Cambria" pitchFamily="34" charset="-122"/>
                 <a:cs typeface="Cambria" pitchFamily="34" charset="-120"/>
               </a:rPr>
-              <a:t>No doctor sees the difference.  →  </a:t>
+              <a:t>No doctor sees the difference.    →    </a:t>
             </a:r>
             <a:pPr algn="ctr" indent="0" marL="0">
               <a:buNone/>
             </a:pPr>
             <a:r>
-              <a:rPr lang="en-US" sz="2000" b="1" i="1" dirty="0">
+              <a:rPr lang="en-US" sz="1800" b="1" i="1" dirty="0">
                 <a:solidFill>
                   <a:srgbClr val="FF2D4A"/>
                 </a:solidFill>
@@ -2640,7 +2761,7 @@
               </a:rPr>
               <a:t>That is why these attacks kill.</a:t>
             </a:r>
-            <a:endParaRPr lang="en-US" sz="2000" dirty="0"/>
+            <a:endParaRPr lang="en-US" sz="1800" dirty="0"/>
           </a:p>
         </p:txBody>
       </p:sp>
@@ -2678,7 +2799,7 @@
         <p:spPr>
           <a:xfrm>
             <a:off x="457200" y="365760"/>
-            <a:ext cx="11247120" cy="274320"/>
+            <a:ext cx="11274552" cy="274320"/>
           </a:xfrm>
           <a:prstGeom prst="rect">
             <a:avLst/>
@@ -2731,23 +2852,23 @@
         <p:spPr>
           <a:xfrm>
             <a:off x="457200" y="777240"/>
-            <a:ext cx="11247120" cy="1828800"/>
-          </a:xfrm>
-          <a:prstGeom prst="rect">
-            <a:avLst/>
-          </a:prstGeom>
-          <a:noFill/>
-          <a:ln/>
-        </p:spPr>
-        <p:txBody>
-          <a:bodyPr wrap="square" lIns="0" tIns="0" rIns="0" bIns="0" rtlCol="0" anchor="ctr"/>
-          <a:lstStyle/>
-          <a:p>
-            <a:pPr indent="0" marL="0">
-              <a:buNone/>
-            </a:pPr>
-            <a:r>
-              <a:rPr lang="en-US" sz="4000" b="1" spc="-100" kern="0" dirty="0">
+            <a:ext cx="11274552" cy="1737360"/>
+          </a:xfrm>
+          <a:prstGeom prst="rect">
+            <a:avLst/>
+          </a:prstGeom>
+          <a:noFill/>
+          <a:ln/>
+        </p:spPr>
+        <p:txBody>
+          <a:bodyPr wrap="square" lIns="0" tIns="0" rIns="0" bIns="0" rtlCol="0" anchor="ctr"/>
+          <a:lstStyle/>
+          <a:p>
+            <a:pPr indent="0" marL="0">
+              <a:buNone/>
+            </a:pPr>
+            <a:r>
+              <a:rPr lang="en-US" sz="3600" b="1" spc="-100" kern="0" dirty="0">
                 <a:solidFill>
                   <a:srgbClr val="FAFAFA"/>
                 </a:solidFill>
@@ -2755,19 +2876,14 @@
                 <a:ea typeface="Cambria" pitchFamily="34" charset="-122"/>
                 <a:cs typeface="Cambria" pitchFamily="34" charset="-120"/>
               </a:rPr>
-              <a:t>Ransomware doesn't break the device —</a:t>
-            </a:r>
-            <a:pPr indent="0" marL="0">
-              <a:buNone/>
-            </a:pPr>
-            <a:endParaRPr lang="en-US" sz="4000" dirty="0"/>
-          </a:p>
-          <a:p>
-            <a:pPr indent="0" marL="0">
-              <a:buNone/>
-            </a:pPr>
-            <a:r>
-              <a:rPr lang="en-US" sz="4000" b="1" spc="-100" kern="0" dirty="0">
+              <a:t>Ransomware doesn't break the device —
+</a:t>
+            </a:r>
+            <a:pPr indent="0" marL="0">
+              <a:buNone/>
+            </a:pPr>
+            <a:r>
+              <a:rPr lang="en-US" sz="3600" b="1" spc="-100" kern="0" dirty="0">
                 <a:solidFill>
                   <a:srgbClr val="FAFAFA"/>
                 </a:solidFill>
@@ -2777,14 +2893,11 @@
               </a:rPr>
               <a:t>it </a:t>
             </a:r>
-            <a:endParaRPr lang="en-US" sz="4000" dirty="0"/>
-          </a:p>
-          <a:p>
-            <a:pPr indent="0" marL="0">
-              <a:buNone/>
-            </a:pPr>
-            <a:r>
-              <a:rPr lang="en-US" sz="4000" b="1" i="1" spc="-100" kern="0" dirty="0">
+            <a:pPr indent="0" marL="0">
+              <a:buNone/>
+            </a:pPr>
+            <a:r>
+              <a:rPr lang="en-US" sz="3600" b="1" i="1" spc="-100" kern="0" dirty="0">
                 <a:solidFill>
                   <a:srgbClr val="FF2D4A"/>
                 </a:solidFill>
@@ -2794,7 +2907,7 @@
               </a:rPr>
               <a:t>pivots through it.</a:t>
             </a:r>
-            <a:endParaRPr lang="en-US" sz="4000" dirty="0"/>
+            <a:endParaRPr lang="en-US" sz="3600" dirty="0"/>
           </a:p>
         </p:txBody>
       </p:sp>
@@ -2823,158 +2936,13 @@
       </p:sp>
       <p:sp>
         <p:nvSpPr>
-          <p:cNvPr id="5" name="Text 3"/>
-          <p:cNvSpPr txBox="1"/>
-          <p:nvPr/>
-        </p:nvSpPr>
-        <p:spPr>
-          <a:xfrm>
-            <a:off x="457200" y="3108960"/>
-            <a:ext cx="5394960" cy="2103120"/>
-          </a:xfrm>
-          <a:prstGeom prst="rect">
-            <a:avLst/>
-          </a:prstGeom>
-          <a:noFill/>
-          <a:ln/>
-        </p:spPr>
-        <p:txBody>
-          <a:bodyPr wrap="square" lIns="0" tIns="0" rIns="0" bIns="0" rtlCol="0" anchor="ctr"/>
-          <a:lstStyle/>
-          <a:p>
-            <a:pPr indent="0" marL="0">
-              <a:buNone/>
-            </a:pPr>
-            <a:r>
-              <a:rPr lang="en-US" sz="22000" b="1" spc="-800" kern="0" dirty="0">
-                <a:solidFill>
-                  <a:srgbClr val="FF2D4A"/>
-                </a:solidFill>
-                <a:latin typeface="Cambria" pitchFamily="34" charset="0"/>
-                <a:ea typeface="Cambria" pitchFamily="34" charset="-122"/>
-                <a:cs typeface="Cambria" pitchFamily="34" charset="-120"/>
-              </a:rPr>
-              <a:t>460</a:t>
-            </a:r>
-            <a:endParaRPr lang="en-US" sz="22000" dirty="0"/>
-          </a:p>
-        </p:txBody>
-      </p:sp>
-      <p:sp>
-        <p:nvSpPr>
-          <p:cNvPr id="6" name="Text 4"/>
-          <p:cNvSpPr txBox="1"/>
-          <p:nvPr/>
-        </p:nvSpPr>
-        <p:spPr>
-          <a:xfrm>
-            <a:off x="457200" y="5212080"/>
-            <a:ext cx="5394960" cy="731520"/>
-          </a:xfrm>
-          <a:prstGeom prst="rect">
-            <a:avLst/>
-          </a:prstGeom>
-          <a:noFill/>
-          <a:ln/>
-        </p:spPr>
-        <p:txBody>
-          <a:bodyPr wrap="square" lIns="0" tIns="0" rIns="0" bIns="0" rtlCol="0" anchor="ctr"/>
-          <a:lstStyle/>
-          <a:p>
-            <a:pPr indent="0" marL="0">
-              <a:buNone/>
-            </a:pPr>
-            <a:r>
-              <a:rPr lang="en-US" sz="2000" i="1" dirty="0">
-                <a:solidFill>
-                  <a:srgbClr val="FAFAFA"/>
-                </a:solidFill>
-                <a:latin typeface="Cambria" pitchFamily="34" charset="0"/>
-                <a:ea typeface="Cambria" pitchFamily="34" charset="-122"/>
-                <a:cs typeface="Cambria" pitchFamily="34" charset="-120"/>
-              </a:rPr>
-              <a:t>US healthcare cyberattacks in </a:t>
-            </a:r>
-            <a:pPr indent="0" marL="0">
-              <a:buNone/>
-            </a:pPr>
-            <a:r>
-              <a:rPr lang="en-US" sz="2000" b="1" i="1" dirty="0">
-                <a:solidFill>
-                  <a:srgbClr val="FF2D4A"/>
-                </a:solidFill>
-                <a:latin typeface="Cambria" pitchFamily="34" charset="0"/>
-                <a:ea typeface="Cambria" pitchFamily="34" charset="-122"/>
-                <a:cs typeface="Cambria" pitchFamily="34" charset="-120"/>
-              </a:rPr>
-              <a:t>2025. </a:t>
-            </a:r>
-            <a:pPr indent="0" marL="0">
-              <a:buNone/>
-            </a:pPr>
-            <a:r>
-              <a:rPr lang="en-US" sz="2000" i="1" dirty="0">
-                <a:solidFill>
-                  <a:srgbClr val="FAFAFA"/>
-                </a:solidFill>
-                <a:latin typeface="Cambria" pitchFamily="34" charset="0"/>
-                <a:ea typeface="Cambria" pitchFamily="34" charset="-122"/>
-                <a:cs typeface="Cambria" pitchFamily="34" charset="-120"/>
-              </a:rPr>
-              <a:t>Up from 249 in 2023.</a:t>
-            </a:r>
-            <a:endParaRPr lang="en-US" sz="2000" dirty="0"/>
-          </a:p>
-        </p:txBody>
-      </p:sp>
-      <p:sp>
-        <p:nvSpPr>
-          <p:cNvPr id="7" name="Text 5"/>
-          <p:cNvSpPr txBox="1"/>
-          <p:nvPr/>
-        </p:nvSpPr>
-        <p:spPr>
-          <a:xfrm>
-            <a:off x="457200" y="6035040"/>
-            <a:ext cx="5394960" cy="274320"/>
-          </a:xfrm>
-          <a:prstGeom prst="rect">
-            <a:avLst/>
-          </a:prstGeom>
-          <a:noFill/>
-          <a:ln/>
-        </p:spPr>
-        <p:txBody>
-          <a:bodyPr wrap="square" lIns="0" tIns="0" rIns="0" bIns="0" rtlCol="0" anchor="ctr"/>
-          <a:lstStyle/>
-          <a:p>
-            <a:pPr indent="0" marL="0">
-              <a:buNone/>
-            </a:pPr>
-            <a:r>
-              <a:rPr lang="en-US" sz="1000" spc="300" kern="0" dirty="0">
-                <a:solidFill>
-                  <a:srgbClr val="777779"/>
-                </a:solidFill>
-                <a:latin typeface="Consolas" pitchFamily="34" charset="0"/>
-                <a:ea typeface="Consolas" pitchFamily="34" charset="-122"/>
-                <a:cs typeface="Consolas" pitchFamily="34" charset="-120"/>
-              </a:rPr>
-              <a:t>FBI IC3  ·  2025 ANNUAL REPORT</a:t>
-            </a:r>
-            <a:endParaRPr lang="en-US" sz="1000" dirty="0"/>
-          </a:p>
-        </p:txBody>
-      </p:sp>
-      <p:sp>
-        <p:nvSpPr>
-          <p:cNvPr id="8" name="Shape 6"/>
-          <p:cNvSpPr/>
-          <p:nvPr/>
-        </p:nvSpPr>
-        <p:spPr>
-          <a:xfrm>
-            <a:off x="6309360" y="3017520"/>
+          <p:cNvPr id="5" name="Shape 3"/>
+          <p:cNvSpPr/>
+          <p:nvPr/>
+        </p:nvSpPr>
+        <p:spPr>
+          <a:xfrm>
+            <a:off x="6336792" y="3017520"/>
             <a:ext cx="5394960" cy="0"/>
           </a:xfrm>
           <a:prstGeom prst="line">
@@ -2991,52 +2959,52 @@
       </p:sp>
       <p:sp>
         <p:nvSpPr>
-          <p:cNvPr id="9" name="Text 7"/>
-          <p:cNvSpPr txBox="1"/>
-          <p:nvPr/>
-        </p:nvSpPr>
-        <p:spPr>
-          <a:xfrm>
-            <a:off x="6309360" y="3108960"/>
-            <a:ext cx="5394960" cy="2103120"/>
-          </a:xfrm>
-          <a:prstGeom prst="rect">
-            <a:avLst/>
-          </a:prstGeom>
-          <a:noFill/>
-          <a:ln/>
-        </p:spPr>
-        <p:txBody>
-          <a:bodyPr wrap="square" lIns="0" tIns="0" rIns="0" bIns="0" rtlCol="0" anchor="ctr"/>
-          <a:lstStyle/>
-          <a:p>
-            <a:pPr indent="0" marL="0">
-              <a:buNone/>
-            </a:pPr>
-            <a:r>
-              <a:rPr lang="en-US" sz="20000" b="1" spc="-800" kern="0" dirty="0">
-                <a:solidFill>
-                  <a:srgbClr val="FAFAFA"/>
+          <p:cNvPr id="6" name="Text 4"/>
+          <p:cNvSpPr txBox="1"/>
+          <p:nvPr/>
+        </p:nvSpPr>
+        <p:spPr>
+          <a:xfrm>
+            <a:off x="457200" y="3108960"/>
+            <a:ext cx="5394960" cy="1920240"/>
+          </a:xfrm>
+          <a:prstGeom prst="rect">
+            <a:avLst/>
+          </a:prstGeom>
+          <a:noFill/>
+          <a:ln/>
+        </p:spPr>
+        <p:txBody>
+          <a:bodyPr wrap="square" lIns="0" tIns="0" rIns="0" bIns="0" rtlCol="0" anchor="t"/>
+          <a:lstStyle/>
+          <a:p>
+            <a:pPr indent="0" marL="0">
+              <a:buNone/>
+            </a:pPr>
+            <a:r>
+              <a:rPr lang="en-US" sz="14000" b="1" spc="-500" kern="0" dirty="0">
+                <a:solidFill>
+                  <a:srgbClr val="FF2D4A"/>
                 </a:solidFill>
                 <a:latin typeface="Cambria" pitchFamily="34" charset="0"/>
                 <a:ea typeface="Cambria" pitchFamily="34" charset="-122"/>
                 <a:cs typeface="Cambria" pitchFamily="34" charset="-120"/>
               </a:rPr>
-              <a:t>~53%</a:t>
-            </a:r>
-            <a:endParaRPr lang="en-US" sz="20000" dirty="0"/>
-          </a:p>
-        </p:txBody>
-      </p:sp>
-      <p:sp>
-        <p:nvSpPr>
-          <p:cNvPr id="10" name="Text 8"/>
-          <p:cNvSpPr txBox="1"/>
-          <p:nvPr/>
-        </p:nvSpPr>
-        <p:spPr>
-          <a:xfrm>
-            <a:off x="6309360" y="5212080"/>
+              <a:t>460</a:t>
+            </a:r>
+            <a:endParaRPr lang="en-US" sz="14000" dirty="0"/>
+          </a:p>
+        </p:txBody>
+      </p:sp>
+      <p:sp>
+        <p:nvSpPr>
+          <p:cNvPr id="7" name="Text 5"/>
+          <p:cNvSpPr txBox="1"/>
+          <p:nvPr/>
+        </p:nvSpPr>
+        <p:spPr>
+          <a:xfrm>
+            <a:off x="457200" y="5166360"/>
             <a:ext cx="5394960" cy="731520"/>
           </a:xfrm>
           <a:prstGeom prst="rect">
@@ -3053,7 +3021,7 @@
               <a:buNone/>
             </a:pPr>
             <a:r>
-              <a:rPr lang="en-US" sz="2000" i="1" dirty="0">
+              <a:rPr lang="en-US" sz="1800" i="1" dirty="0">
                 <a:solidFill>
                   <a:srgbClr val="FAFAFA"/>
                 </a:solidFill>
@@ -3061,13 +3029,13 @@
                 <a:ea typeface="Cambria" pitchFamily="34" charset="-122"/>
                 <a:cs typeface="Cambria" pitchFamily="34" charset="-120"/>
               </a:rPr>
-              <a:t>Of connected medical devices carry a </a:t>
-            </a:r>
-            <a:pPr indent="0" marL="0">
-              <a:buNone/>
-            </a:pPr>
-            <a:r>
-              <a:rPr lang="en-US" sz="2000" b="1" i="1" dirty="0">
+              <a:t>US healthcare cyberattacks in </a:t>
+            </a:r>
+            <a:pPr indent="0" marL="0">
+              <a:buNone/>
+            </a:pPr>
+            <a:r>
+              <a:rPr lang="en-US" sz="1800" b="1" i="1" dirty="0">
                 <a:solidFill>
                   <a:srgbClr val="FF2D4A"/>
                 </a:solidFill>
@@ -3075,13 +3043,13 @@
                 <a:ea typeface="Cambria" pitchFamily="34" charset="-122"/>
                 <a:cs typeface="Cambria" pitchFamily="34" charset="-120"/>
               </a:rPr>
-              <a:t>known</a:t>
-            </a:r>
-            <a:pPr indent="0" marL="0">
-              <a:buNone/>
-            </a:pPr>
-            <a:r>
-              <a:rPr lang="en-US" sz="2000" i="1" dirty="0">
+              <a:t>2025. </a:t>
+            </a:r>
+            <a:pPr indent="0" marL="0">
+              <a:buNone/>
+            </a:pPr>
+            <a:r>
+              <a:rPr lang="en-US" sz="1800" i="1" dirty="0">
                 <a:solidFill>
                   <a:srgbClr val="FAFAFA"/>
                 </a:solidFill>
@@ -3089,9 +3057,154 @@
                 <a:ea typeface="Cambria" pitchFamily="34" charset="-122"/>
                 <a:cs typeface="Cambria" pitchFamily="34" charset="-120"/>
               </a:rPr>
+              <a:t>Up from 249 in 2023.</a:t>
+            </a:r>
+            <a:endParaRPr lang="en-US" sz="1800" dirty="0"/>
+          </a:p>
+        </p:txBody>
+      </p:sp>
+      <p:sp>
+        <p:nvSpPr>
+          <p:cNvPr id="8" name="Text 6"/>
+          <p:cNvSpPr txBox="1"/>
+          <p:nvPr/>
+        </p:nvSpPr>
+        <p:spPr>
+          <a:xfrm>
+            <a:off x="457200" y="5943600"/>
+            <a:ext cx="5394960" cy="274320"/>
+          </a:xfrm>
+          <a:prstGeom prst="rect">
+            <a:avLst/>
+          </a:prstGeom>
+          <a:noFill/>
+          <a:ln/>
+        </p:spPr>
+        <p:txBody>
+          <a:bodyPr wrap="square" lIns="0" tIns="0" rIns="0" bIns="0" rtlCol="0" anchor="ctr"/>
+          <a:lstStyle/>
+          <a:p>
+            <a:pPr indent="0" marL="0">
+              <a:buNone/>
+            </a:pPr>
+            <a:r>
+              <a:rPr lang="en-US" sz="1000" spc="300" kern="0" dirty="0">
+                <a:solidFill>
+                  <a:srgbClr val="777779"/>
+                </a:solidFill>
+                <a:latin typeface="Consolas" pitchFamily="34" charset="0"/>
+                <a:ea typeface="Consolas" pitchFamily="34" charset="-122"/>
+                <a:cs typeface="Consolas" pitchFamily="34" charset="-120"/>
+              </a:rPr>
+              <a:t>FBI IC3  ·  2025 ANNUAL REPORT</a:t>
+            </a:r>
+            <a:endParaRPr lang="en-US" sz="1000" dirty="0"/>
+          </a:p>
+        </p:txBody>
+      </p:sp>
+      <p:sp>
+        <p:nvSpPr>
+          <p:cNvPr id="9" name="Text 7"/>
+          <p:cNvSpPr txBox="1"/>
+          <p:nvPr/>
+        </p:nvSpPr>
+        <p:spPr>
+          <a:xfrm>
+            <a:off x="6336792" y="3108960"/>
+            <a:ext cx="5394960" cy="1920240"/>
+          </a:xfrm>
+          <a:prstGeom prst="rect">
+            <a:avLst/>
+          </a:prstGeom>
+          <a:noFill/>
+          <a:ln/>
+        </p:spPr>
+        <p:txBody>
+          <a:bodyPr wrap="square" lIns="0" tIns="0" rIns="0" bIns="0" rtlCol="0" anchor="t"/>
+          <a:lstStyle/>
+          <a:p>
+            <a:pPr indent="0" marL="0">
+              <a:buNone/>
+            </a:pPr>
+            <a:r>
+              <a:rPr lang="en-US" sz="13500" b="1" spc="-500" kern="0" dirty="0">
+                <a:solidFill>
+                  <a:srgbClr val="FAFAFA"/>
+                </a:solidFill>
+                <a:latin typeface="Cambria" pitchFamily="34" charset="0"/>
+                <a:ea typeface="Cambria" pitchFamily="34" charset="-122"/>
+                <a:cs typeface="Cambria" pitchFamily="34" charset="-120"/>
+              </a:rPr>
+              <a:t>~53%</a:t>
+            </a:r>
+            <a:endParaRPr lang="en-US" sz="13500" dirty="0"/>
+          </a:p>
+        </p:txBody>
+      </p:sp>
+      <p:sp>
+        <p:nvSpPr>
+          <p:cNvPr id="10" name="Text 8"/>
+          <p:cNvSpPr txBox="1"/>
+          <p:nvPr/>
+        </p:nvSpPr>
+        <p:spPr>
+          <a:xfrm>
+            <a:off x="6336792" y="5166360"/>
+            <a:ext cx="5394960" cy="731520"/>
+          </a:xfrm>
+          <a:prstGeom prst="rect">
+            <a:avLst/>
+          </a:prstGeom>
+          <a:noFill/>
+          <a:ln/>
+        </p:spPr>
+        <p:txBody>
+          <a:bodyPr wrap="square" lIns="0" tIns="0" rIns="0" bIns="0" rtlCol="0" anchor="ctr"/>
+          <a:lstStyle/>
+          <a:p>
+            <a:pPr indent="0" marL="0">
+              <a:buNone/>
+            </a:pPr>
+            <a:r>
+              <a:rPr lang="en-US" sz="1800" i="1" dirty="0">
+                <a:solidFill>
+                  <a:srgbClr val="FAFAFA"/>
+                </a:solidFill>
+                <a:latin typeface="Cambria" pitchFamily="34" charset="0"/>
+                <a:ea typeface="Cambria" pitchFamily="34" charset="-122"/>
+                <a:cs typeface="Cambria" pitchFamily="34" charset="-120"/>
+              </a:rPr>
+              <a:t>Of connected medical devices carry a </a:t>
+            </a:r>
+            <a:pPr indent="0" marL="0">
+              <a:buNone/>
+            </a:pPr>
+            <a:r>
+              <a:rPr lang="en-US" sz="1800" b="1" i="1" dirty="0">
+                <a:solidFill>
+                  <a:srgbClr val="FF2D4A"/>
+                </a:solidFill>
+                <a:latin typeface="Cambria" pitchFamily="34" charset="0"/>
+                <a:ea typeface="Cambria" pitchFamily="34" charset="-122"/>
+                <a:cs typeface="Cambria" pitchFamily="34" charset="-120"/>
+              </a:rPr>
+              <a:t>known</a:t>
+            </a:r>
+            <a:pPr indent="0" marL="0">
+              <a:buNone/>
+            </a:pPr>
+            <a:r>
+              <a:rPr lang="en-US" sz="1800" i="1" dirty="0">
+                <a:solidFill>
+                  <a:srgbClr val="FAFAFA"/>
+                </a:solidFill>
+                <a:latin typeface="Cambria" pitchFamily="34" charset="0"/>
+                <a:ea typeface="Cambria" pitchFamily="34" charset="-122"/>
+                <a:cs typeface="Cambria" pitchFamily="34" charset="-120"/>
+              </a:rPr>
               <a:t> critical vulnerability. Nobody writes the patch.</a:t>
             </a:r>
-            <a:endParaRPr lang="en-US" sz="2000" dirty="0"/>
+            <a:endParaRPr lang="en-US" sz="1800" dirty="0"/>
           </a:p>
         </p:txBody>
       </p:sp>
@@ -3103,7 +3216,7 @@
         </p:nvSpPr>
         <p:spPr>
           <a:xfrm>
-            <a:off x="6309360" y="6035040"/>
+            <a:off x="6336792" y="5943600"/>
             <a:ext cx="5394960" cy="274320"/>
           </a:xfrm>
           <a:prstGeom prst="rect">
@@ -3168,7 +3281,7 @@
         <p:spPr>
           <a:xfrm>
             <a:off x="457200" y="365760"/>
-            <a:ext cx="11247120" cy="274320"/>
+            <a:ext cx="11274552" cy="274320"/>
           </a:xfrm>
           <a:prstGeom prst="rect">
             <a:avLst/>
@@ -3221,23 +3334,23 @@
         <p:spPr>
           <a:xfrm>
             <a:off x="457200" y="777240"/>
-            <a:ext cx="11247120" cy="1645920"/>
-          </a:xfrm>
-          <a:prstGeom prst="rect">
-            <a:avLst/>
-          </a:prstGeom>
-          <a:noFill/>
-          <a:ln/>
-        </p:spPr>
-        <p:txBody>
-          <a:bodyPr wrap="square" lIns="0" tIns="0" rIns="0" bIns="0" rtlCol="0" anchor="ctr"/>
-          <a:lstStyle/>
-          <a:p>
-            <a:pPr indent="0" marL="0">
-              <a:buNone/>
-            </a:pPr>
-            <a:r>
-              <a:rPr lang="en-US" sz="4200" b="1" spc="-100" kern="0" dirty="0">
+            <a:ext cx="11274552" cy="1463040"/>
+          </a:xfrm>
+          <a:prstGeom prst="rect">
+            <a:avLst/>
+          </a:prstGeom>
+          <a:noFill/>
+          <a:ln/>
+        </p:spPr>
+        <p:txBody>
+          <a:bodyPr wrap="square" lIns="0" tIns="0" rIns="0" bIns="0" rtlCol="0" anchor="ctr"/>
+          <a:lstStyle/>
+          <a:p>
+            <a:pPr indent="0" marL="0">
+              <a:buNone/>
+            </a:pPr>
+            <a:r>
+              <a:rPr lang="en-US" sz="3600" b="1" spc="-100" kern="0" dirty="0">
                 <a:solidFill>
                   <a:srgbClr val="FAFAFA"/>
                 </a:solidFill>
@@ -3252,7 +3365,7 @@
               <a:buNone/>
             </a:pPr>
             <a:r>
-              <a:rPr lang="en-US" sz="4200" b="1" spc="-100" kern="0" dirty="0">
+              <a:rPr lang="en-US" sz="3600" b="1" spc="-100" kern="0" dirty="0">
                 <a:solidFill>
                   <a:srgbClr val="FAFAFA"/>
                 </a:solidFill>
@@ -3266,7 +3379,7 @@
               <a:buNone/>
             </a:pPr>
             <a:r>
-              <a:rPr lang="en-US" sz="4200" b="1" i="1" spc="-100" kern="0" dirty="0">
+              <a:rPr lang="en-US" sz="3600" b="1" i="1" spc="-100" kern="0" dirty="0">
                 <a:solidFill>
                   <a:srgbClr val="FF2D4A"/>
                 </a:solidFill>
@@ -3276,7 +3389,7 @@
               </a:rPr>
               <a:t>end to end.</a:t>
             </a:r>
-            <a:endParaRPr lang="en-US" sz="4200" dirty="0"/>
+            <a:endParaRPr lang="en-US" sz="3600" dirty="0"/>
           </a:p>
         </p:txBody>
       </p:sp>
@@ -3288,8 +3401,8 @@
         </p:nvSpPr>
         <p:spPr>
           <a:xfrm>
-            <a:off x="457200" y="2816352"/>
-            <a:ext cx="11247120" cy="0"/>
+            <a:off x="457200" y="2642616"/>
+            <a:ext cx="11274552" cy="0"/>
           </a:xfrm>
           <a:prstGeom prst="line">
             <a:avLst/>
@@ -3311,24 +3424,24 @@
         </p:nvSpPr>
         <p:spPr>
           <a:xfrm>
-            <a:off x="594360" y="2926080"/>
-            <a:ext cx="914400" cy="320040"/>
-          </a:xfrm>
-          <a:prstGeom prst="rect">
-            <a:avLst/>
-          </a:prstGeom>
-          <a:noFill/>
-          <a:ln/>
-        </p:spPr>
-        <p:txBody>
-          <a:bodyPr wrap="square" lIns="0" tIns="0" rIns="0" bIns="0" rtlCol="0" anchor="ctr"/>
-          <a:lstStyle/>
-          <a:p>
-            <a:pPr indent="0" marL="0">
-              <a:buNone/>
-            </a:pPr>
-            <a:r>
-              <a:rPr lang="en-US" sz="1100" spc="200" kern="0" dirty="0">
+            <a:off x="594360" y="2724912"/>
+            <a:ext cx="914400" cy="310896"/>
+          </a:xfrm>
+          <a:prstGeom prst="rect">
+            <a:avLst/>
+          </a:prstGeom>
+          <a:noFill/>
+          <a:ln/>
+        </p:spPr>
+        <p:txBody>
+          <a:bodyPr wrap="square" lIns="0" tIns="0" rIns="0" bIns="0" rtlCol="0" anchor="ctr"/>
+          <a:lstStyle/>
+          <a:p>
+            <a:pPr indent="0" marL="0">
+              <a:buNone/>
+            </a:pPr>
+            <a:r>
+              <a:rPr lang="en-US" sz="1000" spc="200" kern="0" dirty="0">
                 <a:solidFill>
                   <a:srgbClr val="777779"/>
                 </a:solidFill>
@@ -3338,7 +3451,7 @@
               </a:rPr>
               <a:t>01</a:t>
             </a:r>
-            <a:endParaRPr lang="en-US" sz="1100" dirty="0"/>
+            <a:endParaRPr lang="en-US" sz="1000" dirty="0"/>
           </a:p>
         </p:txBody>
       </p:sp>
@@ -3350,7 +3463,7 @@
         </p:nvSpPr>
         <p:spPr>
           <a:xfrm>
-            <a:off x="1645920" y="2907792"/>
+            <a:off x="1645920" y="2706624"/>
             <a:ext cx="4937760" cy="365760"/>
           </a:xfrm>
           <a:prstGeom prst="rect">
@@ -3367,7 +3480,7 @@
               <a:buNone/>
             </a:pPr>
             <a:r>
-              <a:rPr lang="en-US" sz="2000" b="1" dirty="0">
+              <a:rPr lang="en-US" sz="1800" b="1" dirty="0">
                 <a:solidFill>
                   <a:srgbClr val="FAFAFA"/>
                 </a:solidFill>
@@ -3381,7 +3494,7 @@
               <a:buNone/>
             </a:pPr>
             <a:r>
-              <a:rPr lang="en-US" sz="1400" i="1" dirty="0">
+              <a:rPr lang="en-US" sz="1300" i="1" dirty="0">
                 <a:solidFill>
                   <a:srgbClr val="BABABB"/>
                 </a:solidFill>
@@ -3391,7 +3504,7 @@
               </a:rPr>
               <a:t>CVE-2019-6538</a:t>
             </a:r>
-            <a:endParaRPr lang="en-US" sz="2000" dirty="0"/>
+            <a:endParaRPr lang="en-US" sz="1800" dirty="0"/>
           </a:p>
         </p:txBody>
       </p:sp>
@@ -3403,24 +3516,24 @@
         </p:nvSpPr>
         <p:spPr>
           <a:xfrm>
-            <a:off x="6492240" y="2962656"/>
-            <a:ext cx="3931920" cy="320040"/>
-          </a:xfrm>
-          <a:prstGeom prst="rect">
-            <a:avLst/>
-          </a:prstGeom>
-          <a:noFill/>
-          <a:ln/>
-        </p:spPr>
-        <p:txBody>
-          <a:bodyPr wrap="square" lIns="0" tIns="0" rIns="0" bIns="0" rtlCol="0" anchor="ctr"/>
-          <a:lstStyle/>
-          <a:p>
-            <a:pPr indent="0" marL="0">
-              <a:buNone/>
-            </a:pPr>
-            <a:r>
-              <a:rPr lang="en-US" sz="1100" dirty="0">
+            <a:off x="6492240" y="2752344"/>
+            <a:ext cx="3657600" cy="320040"/>
+          </a:xfrm>
+          <a:prstGeom prst="rect">
+            <a:avLst/>
+          </a:prstGeom>
+          <a:noFill/>
+          <a:ln/>
+        </p:spPr>
+        <p:txBody>
+          <a:bodyPr wrap="square" lIns="0" tIns="0" rIns="0" bIns="0" rtlCol="0" anchor="ctr"/>
+          <a:lstStyle/>
+          <a:p>
+            <a:pPr indent="0" marL="0">
+              <a:buNone/>
+            </a:pPr>
+            <a:r>
+              <a:rPr lang="en-US" sz="1050" dirty="0">
                 <a:solidFill>
                   <a:srgbClr val="BABABB"/>
                 </a:solidFill>
@@ -3430,7 +3543,7 @@
               </a:rPr>
               <a:t>Cite the real CVE from NVD. Not fabricated.</a:t>
             </a:r>
-            <a:endParaRPr lang="en-US" sz="1100" dirty="0"/>
+            <a:endParaRPr lang="en-US" sz="1050" dirty="0"/>
           </a:p>
         </p:txBody>
       </p:sp>
@@ -3442,7 +3555,7 @@
         </p:nvSpPr>
         <p:spPr>
           <a:xfrm>
-            <a:off x="10332720" y="2962656"/>
+            <a:off x="10241280" y="2752344"/>
             <a:ext cx="1828800" cy="320040"/>
           </a:xfrm>
           <a:prstGeom prst="rect">
@@ -3459,7 +3572,7 @@
               <a:buNone/>
             </a:pPr>
             <a:r>
-              <a:rPr lang="en-US" sz="900" spc="200" kern="0" dirty="0">
+              <a:rPr lang="en-US" sz="850" spc="200" kern="0" dirty="0">
                 <a:solidFill>
                   <a:srgbClr val="777779"/>
                 </a:solidFill>
@@ -3469,7 +3582,7 @@
               </a:rPr>
               <a:t>NVD</a:t>
             </a:r>
-            <a:endParaRPr lang="en-US" sz="900" dirty="0"/>
+            <a:endParaRPr lang="en-US" sz="850" dirty="0"/>
           </a:p>
         </p:txBody>
       </p:sp>
@@ -3481,8 +3594,8 @@
         </p:nvSpPr>
         <p:spPr>
           <a:xfrm>
-            <a:off x="457200" y="3319272"/>
-            <a:ext cx="11247120" cy="0"/>
+            <a:off x="457200" y="3081528"/>
+            <a:ext cx="11274552" cy="0"/>
           </a:xfrm>
           <a:prstGeom prst="line">
             <a:avLst/>
@@ -3504,24 +3617,24 @@
         </p:nvSpPr>
         <p:spPr>
           <a:xfrm>
-            <a:off x="594360" y="3429000"/>
-            <a:ext cx="914400" cy="320040"/>
-          </a:xfrm>
-          <a:prstGeom prst="rect">
-            <a:avLst/>
-          </a:prstGeom>
-          <a:noFill/>
-          <a:ln/>
-        </p:spPr>
-        <p:txBody>
-          <a:bodyPr wrap="square" lIns="0" tIns="0" rIns="0" bIns="0" rtlCol="0" anchor="ctr"/>
-          <a:lstStyle/>
-          <a:p>
-            <a:pPr indent="0" marL="0">
-              <a:buNone/>
-            </a:pPr>
-            <a:r>
-              <a:rPr lang="en-US" sz="1100" spc="200" kern="0" dirty="0">
+            <a:off x="594360" y="3163824"/>
+            <a:ext cx="914400" cy="310896"/>
+          </a:xfrm>
+          <a:prstGeom prst="rect">
+            <a:avLst/>
+          </a:prstGeom>
+          <a:noFill/>
+          <a:ln/>
+        </p:spPr>
+        <p:txBody>
+          <a:bodyPr wrap="square" lIns="0" tIns="0" rIns="0" bIns="0" rtlCol="0" anchor="ctr"/>
+          <a:lstStyle/>
+          <a:p>
+            <a:pPr indent="0" marL="0">
+              <a:buNone/>
+            </a:pPr>
+            <a:r>
+              <a:rPr lang="en-US" sz="1000" spc="200" kern="0" dirty="0">
                 <a:solidFill>
                   <a:srgbClr val="777779"/>
                 </a:solidFill>
@@ -3531,7 +3644,7 @@
               </a:rPr>
               <a:t>02</a:t>
             </a:r>
-            <a:endParaRPr lang="en-US" sz="1100" dirty="0"/>
+            <a:endParaRPr lang="en-US" sz="1000" dirty="0"/>
           </a:p>
         </p:txBody>
       </p:sp>
@@ -3543,7 +3656,7 @@
         </p:nvSpPr>
         <p:spPr>
           <a:xfrm>
-            <a:off x="1645920" y="3410712"/>
+            <a:off x="1645920" y="3145536"/>
             <a:ext cx="4937760" cy="365760"/>
           </a:xfrm>
           <a:prstGeom prst="rect">
@@ -3560,7 +3673,7 @@
               <a:buNone/>
             </a:pPr>
             <a:r>
-              <a:rPr lang="en-US" sz="2000" b="1" dirty="0">
+              <a:rPr lang="en-US" sz="1800" b="1" dirty="0">
                 <a:solidFill>
                   <a:srgbClr val="FAFAFA"/>
                 </a:solidFill>
@@ -3574,7 +3687,7 @@
               <a:buNone/>
             </a:pPr>
             <a:r>
-              <a:rPr lang="en-US" sz="1400" i="1" dirty="0">
+              <a:rPr lang="en-US" sz="1300" i="1" dirty="0">
                 <a:solidFill>
                   <a:srgbClr val="BABABB"/>
                 </a:solidFill>
@@ -3584,7 +3697,7 @@
               </a:rPr>
               <a:t>app.py</a:t>
             </a:r>
-            <a:endParaRPr lang="en-US" sz="2000" dirty="0"/>
+            <a:endParaRPr lang="en-US" sz="1800" dirty="0"/>
           </a:p>
         </p:txBody>
       </p:sp>
@@ -3596,24 +3709,24 @@
         </p:nvSpPr>
         <p:spPr>
           <a:xfrm>
-            <a:off x="6492240" y="3465576"/>
-            <a:ext cx="3931920" cy="320040"/>
-          </a:xfrm>
-          <a:prstGeom prst="rect">
-            <a:avLst/>
-          </a:prstGeom>
-          <a:noFill/>
-          <a:ln/>
-        </p:spPr>
-        <p:txBody>
-          <a:bodyPr wrap="square" lIns="0" tIns="0" rIns="0" bIns="0" rtlCol="0" anchor="ctr"/>
-          <a:lstStyle/>
-          <a:p>
-            <a:pPr indent="0" marL="0">
-              <a:buNone/>
-            </a:pPr>
-            <a:r>
-              <a:rPr lang="en-US" sz="1100" dirty="0">
+            <a:off x="6492240" y="3191256"/>
+            <a:ext cx="3657600" cy="320040"/>
+          </a:xfrm>
+          <a:prstGeom prst="rect">
+            <a:avLst/>
+          </a:prstGeom>
+          <a:noFill/>
+          <a:ln/>
+        </p:spPr>
+        <p:txBody>
+          <a:bodyPr wrap="square" lIns="0" tIns="0" rIns="0" bIns="0" rtlCol="0" anchor="ctr"/>
+          <a:lstStyle/>
+          <a:p>
+            <a:pPr indent="0" marL="0">
+              <a:buNone/>
+            </a:pPr>
+            <a:r>
+              <a:rPr lang="en-US" sz="1050" dirty="0">
                 <a:solidFill>
                   <a:srgbClr val="BABABB"/>
                 </a:solidFill>
@@ -3623,7 +3736,7 @@
               </a:rPr>
               <a:t>SemGrep + Bandit run deterministic rules. Claude triages the real finding.</a:t>
             </a:r>
-            <a:endParaRPr lang="en-US" sz="1100" dirty="0"/>
+            <a:endParaRPr lang="en-US" sz="1050" dirty="0"/>
           </a:p>
         </p:txBody>
       </p:sp>
@@ -3635,7 +3748,7 @@
         </p:nvSpPr>
         <p:spPr>
           <a:xfrm>
-            <a:off x="10332720" y="3465576"/>
+            <a:off x="10241280" y="3191256"/>
             <a:ext cx="1828800" cy="320040"/>
           </a:xfrm>
           <a:prstGeom prst="rect">
@@ -3652,7 +3765,7 @@
               <a:buNone/>
             </a:pPr>
             <a:r>
-              <a:rPr lang="en-US" sz="900" spc="200" kern="0" dirty="0">
+              <a:rPr lang="en-US" sz="850" spc="200" kern="0" dirty="0">
                 <a:solidFill>
                   <a:srgbClr val="777779"/>
                 </a:solidFill>
@@ -3662,7 +3775,7 @@
               </a:rPr>
               <a:t>SEMGREP · BANDIT · CLAUDE</a:t>
             </a:r>
-            <a:endParaRPr lang="en-US" sz="900" dirty="0"/>
+            <a:endParaRPr lang="en-US" sz="850" dirty="0"/>
           </a:p>
         </p:txBody>
       </p:sp>
@@ -3674,8 +3787,8 @@
         </p:nvSpPr>
         <p:spPr>
           <a:xfrm>
-            <a:off x="457200" y="3822192"/>
-            <a:ext cx="11247120" cy="0"/>
+            <a:off x="457200" y="3520440"/>
+            <a:ext cx="11274552" cy="0"/>
           </a:xfrm>
           <a:prstGeom prst="line">
             <a:avLst/>
@@ -3697,24 +3810,24 @@
         </p:nvSpPr>
         <p:spPr>
           <a:xfrm>
-            <a:off x="594360" y="3931920"/>
-            <a:ext cx="914400" cy="320040"/>
-          </a:xfrm>
-          <a:prstGeom prst="rect">
-            <a:avLst/>
-          </a:prstGeom>
-          <a:noFill/>
-          <a:ln/>
-        </p:spPr>
-        <p:txBody>
-          <a:bodyPr wrap="square" lIns="0" tIns="0" rIns="0" bIns="0" rtlCol="0" anchor="ctr"/>
-          <a:lstStyle/>
-          <a:p>
-            <a:pPr indent="0" marL="0">
-              <a:buNone/>
-            </a:pPr>
-            <a:r>
-              <a:rPr lang="en-US" sz="1100" spc="200" kern="0" dirty="0">
+            <a:off x="594360" y="3602736"/>
+            <a:ext cx="914400" cy="310896"/>
+          </a:xfrm>
+          <a:prstGeom prst="rect">
+            <a:avLst/>
+          </a:prstGeom>
+          <a:noFill/>
+          <a:ln/>
+        </p:spPr>
+        <p:txBody>
+          <a:bodyPr wrap="square" lIns="0" tIns="0" rIns="0" bIns="0" rtlCol="0" anchor="ctr"/>
+          <a:lstStyle/>
+          <a:p>
+            <a:pPr indent="0" marL="0">
+              <a:buNone/>
+            </a:pPr>
+            <a:r>
+              <a:rPr lang="en-US" sz="1000" spc="200" kern="0" dirty="0">
                 <a:solidFill>
                   <a:srgbClr val="777779"/>
                 </a:solidFill>
@@ -3724,7 +3837,7 @@
               </a:rPr>
               <a:t>03</a:t>
             </a:r>
-            <a:endParaRPr lang="en-US" sz="1100" dirty="0"/>
+            <a:endParaRPr lang="en-US" sz="1000" dirty="0"/>
           </a:p>
         </p:txBody>
       </p:sp>
@@ -3736,7 +3849,7 @@
         </p:nvSpPr>
         <p:spPr>
           <a:xfrm>
-            <a:off x="1645920" y="3913632"/>
+            <a:off x="1645920" y="3584448"/>
             <a:ext cx="4937760" cy="365760"/>
           </a:xfrm>
           <a:prstGeom prst="rect">
@@ -3753,7 +3866,7 @@
               <a:buNone/>
             </a:pPr>
             <a:r>
-              <a:rPr lang="en-US" sz="2000" b="1" dirty="0">
+              <a:rPr lang="en-US" sz="1800" b="1" dirty="0">
                 <a:solidFill>
                   <a:srgbClr val="FAFAFA"/>
                 </a:solidFill>
@@ -3767,7 +3880,7 @@
               <a:buNone/>
             </a:pPr>
             <a:r>
-              <a:rPr lang="en-US" sz="1400" i="1" dirty="0">
+              <a:rPr lang="en-US" sz="1300" i="1" dirty="0">
                 <a:solidFill>
                   <a:srgbClr val="BABABB"/>
                 </a:solidFill>
@@ -3777,7 +3890,7 @@
               </a:rPr>
               <a:t>POST /device/command</a:t>
             </a:r>
-            <a:endParaRPr lang="en-US" sz="2000" dirty="0"/>
+            <a:endParaRPr lang="en-US" sz="1800" dirty="0"/>
           </a:p>
         </p:txBody>
       </p:sp>
@@ -3789,24 +3902,24 @@
         </p:nvSpPr>
         <p:spPr>
           <a:xfrm>
-            <a:off x="6492240" y="3968496"/>
-            <a:ext cx="3931920" cy="320040"/>
-          </a:xfrm>
-          <a:prstGeom prst="rect">
-            <a:avLst/>
-          </a:prstGeom>
-          <a:noFill/>
-          <a:ln/>
-        </p:spPr>
-        <p:txBody>
-          <a:bodyPr wrap="square" lIns="0" tIns="0" rIns="0" bIns="0" rtlCol="0" anchor="ctr"/>
-          <a:lstStyle/>
-          <a:p>
-            <a:pPr indent="0" marL="0">
-              <a:buNone/>
-            </a:pPr>
-            <a:r>
-              <a:rPr lang="en-US" sz="1100" dirty="0">
+            <a:off x="6492240" y="3630168"/>
+            <a:ext cx="3657600" cy="320040"/>
+          </a:xfrm>
+          <a:prstGeom prst="rect">
+            <a:avLst/>
+          </a:prstGeom>
+          <a:noFill/>
+          <a:ln/>
+        </p:spPr>
+        <p:txBody>
+          <a:bodyPr wrap="square" lIns="0" tIns="0" rIns="0" bIns="0" rtlCol="0" anchor="ctr"/>
+          <a:lstStyle/>
+          <a:p>
+            <a:pPr indent="0" marL="0">
+              <a:buNone/>
+            </a:pPr>
+            <a:r>
+              <a:rPr lang="en-US" sz="1050" dirty="0">
                 <a:solidFill>
                   <a:srgbClr val="BABABB"/>
                 </a:solidFill>
@@ -3814,9 +3927,9 @@
                 <a:ea typeface="Calibri" pitchFamily="34" charset="-122"/>
                 <a:cs typeface="Calibri" pitchFamily="34" charset="-120"/>
               </a:rPr>
-              <a:t>Open-weight model writes the PoC payload. Device obeys.</a:t>
-            </a:r>
-            <a:endParaRPr lang="en-US" sz="1100" dirty="0"/>
+              <a:t>Open-weight model writes the PoC payload. The device obeys.</a:t>
+            </a:r>
+            <a:endParaRPr lang="en-US" sz="1050" dirty="0"/>
           </a:p>
         </p:txBody>
       </p:sp>
@@ -3828,7 +3941,7 @@
         </p:nvSpPr>
         <p:spPr>
           <a:xfrm>
-            <a:off x="10332720" y="3968496"/>
+            <a:off x="10241280" y="3630168"/>
             <a:ext cx="1828800" cy="320040"/>
           </a:xfrm>
           <a:prstGeom prst="rect">
@@ -3845,7 +3958,7 @@
               <a:buNone/>
             </a:pPr>
             <a:r>
-              <a:rPr lang="en-US" sz="900" spc="200" kern="0" dirty="0">
+              <a:rPr lang="en-US" sz="850" spc="200" kern="0" dirty="0">
                 <a:solidFill>
                   <a:srgbClr val="777779"/>
                 </a:solidFill>
@@ -3855,7 +3968,7 @@
               </a:rPr>
               <a:t>PoC PAYLOAD</a:t>
             </a:r>
-            <a:endParaRPr lang="en-US" sz="900" dirty="0"/>
+            <a:endParaRPr lang="en-US" sz="850" dirty="0"/>
           </a:p>
         </p:txBody>
       </p:sp>
@@ -3867,8 +3980,8 @@
         </p:nvSpPr>
         <p:spPr>
           <a:xfrm>
-            <a:off x="457200" y="4325112"/>
-            <a:ext cx="11247120" cy="0"/>
+            <a:off x="457200" y="3959352"/>
+            <a:ext cx="11274552" cy="0"/>
           </a:xfrm>
           <a:prstGeom prst="line">
             <a:avLst/>
@@ -3890,24 +4003,24 @@
         </p:nvSpPr>
         <p:spPr>
           <a:xfrm>
-            <a:off x="594360" y="4434840"/>
-            <a:ext cx="914400" cy="320040"/>
-          </a:xfrm>
-          <a:prstGeom prst="rect">
-            <a:avLst/>
-          </a:prstGeom>
-          <a:noFill/>
-          <a:ln/>
-        </p:spPr>
-        <p:txBody>
-          <a:bodyPr wrap="square" lIns="0" tIns="0" rIns="0" bIns="0" rtlCol="0" anchor="ctr"/>
-          <a:lstStyle/>
-          <a:p>
-            <a:pPr indent="0" marL="0">
-              <a:buNone/>
-            </a:pPr>
-            <a:r>
-              <a:rPr lang="en-US" sz="1100" spc="200" kern="0" dirty="0">
+            <a:off x="594360" y="4041648"/>
+            <a:ext cx="914400" cy="310896"/>
+          </a:xfrm>
+          <a:prstGeom prst="rect">
+            <a:avLst/>
+          </a:prstGeom>
+          <a:noFill/>
+          <a:ln/>
+        </p:spPr>
+        <p:txBody>
+          <a:bodyPr wrap="square" lIns="0" tIns="0" rIns="0" bIns="0" rtlCol="0" anchor="ctr"/>
+          <a:lstStyle/>
+          <a:p>
+            <a:pPr indent="0" marL="0">
+              <a:buNone/>
+            </a:pPr>
+            <a:r>
+              <a:rPr lang="en-US" sz="1000" spc="200" kern="0" dirty="0">
                 <a:solidFill>
                   <a:srgbClr val="777779"/>
                 </a:solidFill>
@@ -3917,7 +4030,7 @@
               </a:rPr>
               <a:t>04</a:t>
             </a:r>
-            <a:endParaRPr lang="en-US" sz="1100" dirty="0"/>
+            <a:endParaRPr lang="en-US" sz="1000" dirty="0"/>
           </a:p>
         </p:txBody>
       </p:sp>
@@ -3929,7 +4042,7 @@
         </p:nvSpPr>
         <p:spPr>
           <a:xfrm>
-            <a:off x="1645920" y="4416552"/>
+            <a:off x="1645920" y="4023360"/>
             <a:ext cx="4937760" cy="365760"/>
           </a:xfrm>
           <a:prstGeom prst="rect">
@@ -3946,7 +4059,7 @@
               <a:buNone/>
             </a:pPr>
             <a:r>
-              <a:rPr lang="en-US" sz="2000" b="1" dirty="0">
+              <a:rPr lang="en-US" sz="1800" b="1" dirty="0">
                 <a:solidFill>
                   <a:srgbClr val="FAFAFA"/>
                 </a:solidFill>
@@ -3960,7 +4073,7 @@
               <a:buNone/>
             </a:pPr>
             <a:r>
-              <a:rPr lang="en-US" sz="1400" i="1" dirty="0">
+              <a:rPr lang="en-US" sz="1300" i="1" dirty="0">
                 <a:solidFill>
                   <a:srgbClr val="BABABB"/>
                 </a:solidFill>
@@ -3970,7 +4083,7 @@
               </a:rPr>
               <a:t>require X-Device-Token</a:t>
             </a:r>
-            <a:endParaRPr lang="en-US" sz="2000" dirty="0"/>
+            <a:endParaRPr lang="en-US" sz="1800" dirty="0"/>
           </a:p>
         </p:txBody>
       </p:sp>
@@ -3982,24 +4095,24 @@
         </p:nvSpPr>
         <p:spPr>
           <a:xfrm>
-            <a:off x="6492240" y="4471416"/>
-            <a:ext cx="3931920" cy="320040"/>
-          </a:xfrm>
-          <a:prstGeom prst="rect">
-            <a:avLst/>
-          </a:prstGeom>
-          <a:noFill/>
-          <a:ln/>
-        </p:spPr>
-        <p:txBody>
-          <a:bodyPr wrap="square" lIns="0" tIns="0" rIns="0" bIns="0" rtlCol="0" anchor="ctr"/>
-          <a:lstStyle/>
-          <a:p>
-            <a:pPr indent="0" marL="0">
-              <a:buNone/>
-            </a:pPr>
-            <a:r>
-              <a:rPr lang="en-US" sz="1100" dirty="0">
+            <a:off x="6492240" y="4069080"/>
+            <a:ext cx="3657600" cy="320040"/>
+          </a:xfrm>
+          <a:prstGeom prst="rect">
+            <a:avLst/>
+          </a:prstGeom>
+          <a:noFill/>
+          <a:ln/>
+        </p:spPr>
+        <p:txBody>
+          <a:bodyPr wrap="square" lIns="0" tIns="0" rIns="0" bIns="0" rtlCol="0" anchor="ctr"/>
+          <a:lstStyle/>
+          <a:p>
+            <a:pPr indent="0" marL="0">
+              <a:buNone/>
+            </a:pPr>
+            <a:r>
+              <a:rPr lang="en-US" sz="1050" dirty="0">
                 <a:solidFill>
                   <a:srgbClr val="BABABB"/>
                 </a:solidFill>
@@ -4009,7 +4122,7 @@
               </a:rPr>
               <a:t>Factory Droid writes a real git diff. 41/41 unit tests green.</a:t>
             </a:r>
-            <a:endParaRPr lang="en-US" sz="1100" dirty="0"/>
+            <a:endParaRPr lang="en-US" sz="1050" dirty="0"/>
           </a:p>
         </p:txBody>
       </p:sp>
@@ -4021,7 +4134,7 @@
         </p:nvSpPr>
         <p:spPr>
           <a:xfrm>
-            <a:off x="10332720" y="4471416"/>
+            <a:off x="10241280" y="4069080"/>
             <a:ext cx="1828800" cy="320040"/>
           </a:xfrm>
           <a:prstGeom prst="rect">
@@ -4038,7 +4151,7 @@
               <a:buNone/>
             </a:pPr>
             <a:r>
-              <a:rPr lang="en-US" sz="900" spc="200" kern="0" dirty="0">
+              <a:rPr lang="en-US" sz="850" spc="200" kern="0" dirty="0">
                 <a:solidFill>
                   <a:srgbClr val="777779"/>
                 </a:solidFill>
@@ -4048,7 +4161,7 @@
               </a:rPr>
               <a:t>FACTORY DROID</a:t>
             </a:r>
-            <a:endParaRPr lang="en-US" sz="900" dirty="0"/>
+            <a:endParaRPr lang="en-US" sz="850" dirty="0"/>
           </a:p>
         </p:txBody>
       </p:sp>
@@ -4060,8 +4173,8 @@
         </p:nvSpPr>
         <p:spPr>
           <a:xfrm>
-            <a:off x="457200" y="4818888"/>
-            <a:ext cx="11247120" cy="484632"/>
+            <a:off x="457200" y="4389120"/>
+            <a:ext cx="11274552" cy="420624"/>
           </a:xfrm>
           <a:prstGeom prst="rect">
             <a:avLst/>
@@ -4085,24 +4198,24 @@
         </p:nvSpPr>
         <p:spPr>
           <a:xfrm>
-            <a:off x="594360" y="4937760"/>
-            <a:ext cx="914400" cy="320040"/>
-          </a:xfrm>
-          <a:prstGeom prst="rect">
-            <a:avLst/>
-          </a:prstGeom>
-          <a:noFill/>
-          <a:ln/>
-        </p:spPr>
-        <p:txBody>
-          <a:bodyPr wrap="square" lIns="0" tIns="0" rIns="0" bIns="0" rtlCol="0" anchor="ctr"/>
-          <a:lstStyle/>
-          <a:p>
-            <a:pPr indent="0" marL="0">
-              <a:buNone/>
-            </a:pPr>
-            <a:r>
-              <a:rPr lang="en-US" sz="1100" spc="200" kern="0" dirty="0">
+            <a:off x="594360" y="4480560"/>
+            <a:ext cx="914400" cy="310896"/>
+          </a:xfrm>
+          <a:prstGeom prst="rect">
+            <a:avLst/>
+          </a:prstGeom>
+          <a:noFill/>
+          <a:ln/>
+        </p:spPr>
+        <p:txBody>
+          <a:bodyPr wrap="square" lIns="0" tIns="0" rIns="0" bIns="0" rtlCol="0" anchor="ctr"/>
+          <a:lstStyle/>
+          <a:p>
+            <a:pPr indent="0" marL="0">
+              <a:buNone/>
+            </a:pPr>
+            <a:r>
+              <a:rPr lang="en-US" sz="1000" spc="200" kern="0" dirty="0">
                 <a:solidFill>
                   <a:srgbClr val="FF2D4A"/>
                 </a:solidFill>
@@ -4112,7 +4225,7 @@
               </a:rPr>
               <a:t>05 · gate</a:t>
             </a:r>
-            <a:endParaRPr lang="en-US" sz="1100" dirty="0"/>
+            <a:endParaRPr lang="en-US" sz="1000" dirty="0"/>
           </a:p>
         </p:txBody>
       </p:sp>
@@ -4124,7 +4237,7 @@
         </p:nvSpPr>
         <p:spPr>
           <a:xfrm>
-            <a:off x="1645920" y="4919472"/>
+            <a:off x="1645920" y="4462272"/>
             <a:ext cx="4937760" cy="365760"/>
           </a:xfrm>
           <a:prstGeom prst="rect">
@@ -4141,7 +4254,7 @@
               <a:buNone/>
             </a:pPr>
             <a:r>
-              <a:rPr lang="en-US" sz="2000" b="1" dirty="0">
+              <a:rPr lang="en-US" sz="1800" b="1" dirty="0">
                 <a:solidFill>
                   <a:srgbClr val="FF2D4A"/>
                 </a:solidFill>
@@ -4155,7 +4268,7 @@
               <a:buNone/>
             </a:pPr>
             <a:r>
-              <a:rPr lang="en-US" sz="1400" i="1" dirty="0">
+              <a:rPr lang="en-US" sz="1300" i="1" dirty="0">
                 <a:solidFill>
                   <a:srgbClr val="BABABB"/>
                 </a:solidFill>
@@ -4165,7 +4278,7 @@
               </a:rPr>
               <a:t>approve &amp; deploy</a:t>
             </a:r>
-            <a:endParaRPr lang="en-US" sz="2000" dirty="0"/>
+            <a:endParaRPr lang="en-US" sz="1800" dirty="0"/>
           </a:p>
         </p:txBody>
       </p:sp>
@@ -4177,24 +4290,24 @@
         </p:nvSpPr>
         <p:spPr>
           <a:xfrm>
-            <a:off x="6492240" y="4974336"/>
-            <a:ext cx="3931920" cy="320040"/>
-          </a:xfrm>
-          <a:prstGeom prst="rect">
-            <a:avLst/>
-          </a:prstGeom>
-          <a:noFill/>
-          <a:ln/>
-        </p:spPr>
-        <p:txBody>
-          <a:bodyPr wrap="square" lIns="0" tIns="0" rIns="0" bIns="0" rtlCol="0" anchor="ctr"/>
-          <a:lstStyle/>
-          <a:p>
-            <a:pPr indent="0" marL="0">
-              <a:buNone/>
-            </a:pPr>
-            <a:r>
-              <a:rPr lang="en-US" sz="1100" dirty="0">
+            <a:off x="6492240" y="4507992"/>
+            <a:ext cx="3657600" cy="320040"/>
+          </a:xfrm>
+          <a:prstGeom prst="rect">
+            <a:avLst/>
+          </a:prstGeom>
+          <a:noFill/>
+          <a:ln/>
+        </p:spPr>
+        <p:txBody>
+          <a:bodyPr wrap="square" lIns="0" tIns="0" rIns="0" bIns="0" rtlCol="0" anchor="ctr"/>
+          <a:lstStyle/>
+          <a:p>
+            <a:pPr indent="0" marL="0">
+              <a:buNone/>
+            </a:pPr>
+            <a:r>
+              <a:rPr lang="en-US" sz="1050" dirty="0">
                 <a:solidFill>
                   <a:srgbClr val="BABABB"/>
                 </a:solidFill>
@@ -4202,9 +4315,9 @@
                 <a:ea typeface="Calibri" pitchFamily="34" charset="-122"/>
                 <a:cs typeface="Calibri" pitchFamily="34" charset="-120"/>
               </a:rPr>
-              <a:t>Mandatory sign-off. Tool-scoped, process-boundary, identity-check.</a:t>
-            </a:r>
-            <a:endParaRPr lang="en-US" sz="1100" dirty="0"/>
+              <a:t>Mandatory sign-off. Tool-scoped, process boundary, identity-check.</a:t>
+            </a:r>
+            <a:endParaRPr lang="en-US" sz="1050" dirty="0"/>
           </a:p>
         </p:txBody>
       </p:sp>
@@ -4216,7 +4329,7 @@
         </p:nvSpPr>
         <p:spPr>
           <a:xfrm>
-            <a:off x="10332720" y="4974336"/>
+            <a:off x="10241280" y="4507992"/>
             <a:ext cx="1828800" cy="320040"/>
           </a:xfrm>
           <a:prstGeom prst="rect">
@@ -4233,7 +4346,7 @@
               <a:buNone/>
             </a:pPr>
             <a:r>
-              <a:rPr lang="en-US" sz="900" spc="200" kern="0" dirty="0">
+              <a:rPr lang="en-US" sz="850" spc="200" kern="0" dirty="0">
                 <a:solidFill>
                   <a:srgbClr val="FF2D4A"/>
                 </a:solidFill>
@@ -4243,7 +4356,7 @@
               </a:rPr>
               <a:t>REQUIRED</a:t>
             </a:r>
-            <a:endParaRPr lang="en-US" sz="900" dirty="0"/>
+            <a:endParaRPr lang="en-US" sz="850" dirty="0"/>
           </a:p>
         </p:txBody>
       </p:sp>
@@ -4255,8 +4368,8 @@
         </p:nvSpPr>
         <p:spPr>
           <a:xfrm>
-            <a:off x="457200" y="5330952"/>
-            <a:ext cx="11247120" cy="0"/>
+            <a:off x="457200" y="4837176"/>
+            <a:ext cx="11274552" cy="0"/>
           </a:xfrm>
           <a:prstGeom prst="line">
             <a:avLst/>
@@ -4278,24 +4391,24 @@
         </p:nvSpPr>
         <p:spPr>
           <a:xfrm>
-            <a:off x="594360" y="5440680"/>
-            <a:ext cx="914400" cy="320040"/>
-          </a:xfrm>
-          <a:prstGeom prst="rect">
-            <a:avLst/>
-          </a:prstGeom>
-          <a:noFill/>
-          <a:ln/>
-        </p:spPr>
-        <p:txBody>
-          <a:bodyPr wrap="square" lIns="0" tIns="0" rIns="0" bIns="0" rtlCol="0" anchor="ctr"/>
-          <a:lstStyle/>
-          <a:p>
-            <a:pPr indent="0" marL="0">
-              <a:buNone/>
-            </a:pPr>
-            <a:r>
-              <a:rPr lang="en-US" sz="1100" spc="200" kern="0" dirty="0">
+            <a:off x="594360" y="4919472"/>
+            <a:ext cx="914400" cy="310896"/>
+          </a:xfrm>
+          <a:prstGeom prst="rect">
+            <a:avLst/>
+          </a:prstGeom>
+          <a:noFill/>
+          <a:ln/>
+        </p:spPr>
+        <p:txBody>
+          <a:bodyPr wrap="square" lIns="0" tIns="0" rIns="0" bIns="0" rtlCol="0" anchor="ctr"/>
+          <a:lstStyle/>
+          <a:p>
+            <a:pPr indent="0" marL="0">
+              <a:buNone/>
+            </a:pPr>
+            <a:r>
+              <a:rPr lang="en-US" sz="1000" spc="200" kern="0" dirty="0">
                 <a:solidFill>
                   <a:srgbClr val="777779"/>
                 </a:solidFill>
@@ -4305,7 +4418,7 @@
               </a:rPr>
               <a:t>06</a:t>
             </a:r>
-            <a:endParaRPr lang="en-US" sz="1100" dirty="0"/>
+            <a:endParaRPr lang="en-US" sz="1000" dirty="0"/>
           </a:p>
         </p:txBody>
       </p:sp>
@@ -4317,7 +4430,7 @@
         </p:nvSpPr>
         <p:spPr>
           <a:xfrm>
-            <a:off x="1645920" y="5422392"/>
+            <a:off x="1645920" y="4901184"/>
             <a:ext cx="4937760" cy="365760"/>
           </a:xfrm>
           <a:prstGeom prst="rect">
@@ -4334,7 +4447,7 @@
               <a:buNone/>
             </a:pPr>
             <a:r>
-              <a:rPr lang="en-US" sz="2000" b="1" dirty="0">
+              <a:rPr lang="en-US" sz="1800" b="1" dirty="0">
                 <a:solidFill>
                   <a:srgbClr val="FAFAFA"/>
                 </a:solidFill>
@@ -4348,7 +4461,7 @@
               <a:buNone/>
             </a:pPr>
             <a:r>
-              <a:rPr lang="en-US" sz="1400" i="1" dirty="0">
+              <a:rPr lang="en-US" sz="1300" i="1" dirty="0">
                 <a:solidFill>
                   <a:srgbClr val="BABABB"/>
                 </a:solidFill>
@@ -4358,7 +4471,7 @@
               </a:rPr>
               <a:t>re-run the same bytes</a:t>
             </a:r>
-            <a:endParaRPr lang="en-US" sz="2000" dirty="0"/>
+            <a:endParaRPr lang="en-US" sz="1800" dirty="0"/>
           </a:p>
         </p:txBody>
       </p:sp>
@@ -4370,24 +4483,24 @@
         </p:nvSpPr>
         <p:spPr>
           <a:xfrm>
-            <a:off x="6492240" y="5477256"/>
-            <a:ext cx="3931920" cy="320040"/>
-          </a:xfrm>
-          <a:prstGeom prst="rect">
-            <a:avLst/>
-          </a:prstGeom>
-          <a:noFill/>
-          <a:ln/>
-        </p:spPr>
-        <p:txBody>
-          <a:bodyPr wrap="square" lIns="0" tIns="0" rIns="0" bIns="0" rtlCol="0" anchor="ctr"/>
-          <a:lstStyle/>
-          <a:p>
-            <a:pPr indent="0" marL="0">
-              <a:buNone/>
-            </a:pPr>
-            <a:r>
-              <a:rPr lang="en-US" sz="1100" dirty="0">
+            <a:off x="6492240" y="4946904"/>
+            <a:ext cx="3657600" cy="320040"/>
+          </a:xfrm>
+          <a:prstGeom prst="rect">
+            <a:avLst/>
+          </a:prstGeom>
+          <a:noFill/>
+          <a:ln/>
+        </p:spPr>
+        <p:txBody>
+          <a:bodyPr wrap="square" lIns="0" tIns="0" rIns="0" bIns="0" rtlCol="0" anchor="ctr"/>
+          <a:lstStyle/>
+          <a:p>
+            <a:pPr indent="0" marL="0">
+              <a:buNone/>
+            </a:pPr>
+            <a:r>
+              <a:rPr lang="en-US" sz="1050" dirty="0">
                 <a:solidFill>
                   <a:srgbClr val="BABABB"/>
                 </a:solidFill>
@@ -4397,7 +4510,7 @@
               </a:rPr>
               <a:t>Replay the exact exploit. Hard-asserted status code — no LLM in the loop.</a:t>
             </a:r>
-            <a:endParaRPr lang="en-US" sz="1100" dirty="0"/>
+            <a:endParaRPr lang="en-US" sz="1050" dirty="0"/>
           </a:p>
         </p:txBody>
       </p:sp>
@@ -4409,7 +4522,7 @@
         </p:nvSpPr>
         <p:spPr>
           <a:xfrm>
-            <a:off x="10332720" y="5477256"/>
+            <a:off x="10241280" y="4946904"/>
             <a:ext cx="1828800" cy="320040"/>
           </a:xfrm>
           <a:prstGeom prst="rect">
@@ -4426,7 +4539,7 @@
               <a:buNone/>
             </a:pPr>
             <a:r>
-              <a:rPr lang="en-US" sz="900" spc="200" kern="0" dirty="0">
+              <a:rPr lang="en-US" sz="850" spc="200" kern="0" dirty="0">
                 <a:solidFill>
                   <a:srgbClr val="777779"/>
                 </a:solidFill>
@@ -4436,7 +4549,7 @@
               </a:rPr>
               <a:t>BYTE-FOR-BYTE REPLAY</a:t>
             </a:r>
-            <a:endParaRPr lang="en-US" sz="900" dirty="0"/>
+            <a:endParaRPr lang="en-US" sz="850" dirty="0"/>
           </a:p>
         </p:txBody>
       </p:sp>
@@ -4448,8 +4561,8 @@
         </p:nvSpPr>
         <p:spPr>
           <a:xfrm>
-            <a:off x="457200" y="5833872"/>
-            <a:ext cx="11247120" cy="0"/>
+            <a:off x="457200" y="5276088"/>
+            <a:ext cx="11274552" cy="0"/>
           </a:xfrm>
           <a:prstGeom prst="line">
             <a:avLst/>
@@ -4471,24 +4584,24 @@
         </p:nvSpPr>
         <p:spPr>
           <a:xfrm>
-            <a:off x="594360" y="5943600"/>
-            <a:ext cx="914400" cy="320040"/>
-          </a:xfrm>
-          <a:prstGeom prst="rect">
-            <a:avLst/>
-          </a:prstGeom>
-          <a:noFill/>
-          <a:ln/>
-        </p:spPr>
-        <p:txBody>
-          <a:bodyPr wrap="square" lIns="0" tIns="0" rIns="0" bIns="0" rtlCol="0" anchor="ctr"/>
-          <a:lstStyle/>
-          <a:p>
-            <a:pPr indent="0" marL="0">
-              <a:buNone/>
-            </a:pPr>
-            <a:r>
-              <a:rPr lang="en-US" sz="1100" spc="200" kern="0" dirty="0">
+            <a:off x="594360" y="5358384"/>
+            <a:ext cx="914400" cy="310896"/>
+          </a:xfrm>
+          <a:prstGeom prst="rect">
+            <a:avLst/>
+          </a:prstGeom>
+          <a:noFill/>
+          <a:ln/>
+        </p:spPr>
+        <p:txBody>
+          <a:bodyPr wrap="square" lIns="0" tIns="0" rIns="0" bIns="0" rtlCol="0" anchor="ctr"/>
+          <a:lstStyle/>
+          <a:p>
+            <a:pPr indent="0" marL="0">
+              <a:buNone/>
+            </a:pPr>
+            <a:r>
+              <a:rPr lang="en-US" sz="1000" spc="200" kern="0" dirty="0">
                 <a:solidFill>
                   <a:srgbClr val="777779"/>
                 </a:solidFill>
@@ -4498,7 +4611,7 @@
               </a:rPr>
               <a:t>07</a:t>
             </a:r>
-            <a:endParaRPr lang="en-US" sz="1100" dirty="0"/>
+            <a:endParaRPr lang="en-US" sz="1000" dirty="0"/>
           </a:p>
         </p:txBody>
       </p:sp>
@@ -4510,7 +4623,7 @@
         </p:nvSpPr>
         <p:spPr>
           <a:xfrm>
-            <a:off x="1645920" y="5925312"/>
+            <a:off x="1645920" y="5340096"/>
             <a:ext cx="4937760" cy="365760"/>
           </a:xfrm>
           <a:prstGeom prst="rect">
@@ -4527,7 +4640,7 @@
               <a:buNone/>
             </a:pPr>
             <a:r>
-              <a:rPr lang="en-US" sz="2000" b="1" dirty="0">
+              <a:rPr lang="en-US" sz="1800" b="1" dirty="0">
                 <a:solidFill>
                   <a:srgbClr val="FAFAFA"/>
                 </a:solidFill>
@@ -4541,7 +4654,7 @@
               <a:buNone/>
             </a:pPr>
             <a:r>
-              <a:rPr lang="en-US" sz="1400" i="1" dirty="0">
+              <a:rPr lang="en-US" sz="1300" i="1" dirty="0">
                 <a:solidFill>
                   <a:srgbClr val="BABABB"/>
                 </a:solidFill>
@@ -4551,7 +4664,7 @@
               </a:rPr>
               <a:t>healthy baseline</a:t>
             </a:r>
-            <a:endParaRPr lang="en-US" sz="2000" dirty="0"/>
+            <a:endParaRPr lang="en-US" sz="1800" dirty="0"/>
           </a:p>
         </p:txBody>
       </p:sp>
@@ -4563,24 +4676,24 @@
         </p:nvSpPr>
         <p:spPr>
           <a:xfrm>
-            <a:off x="6492240" y="5980176"/>
-            <a:ext cx="3931920" cy="320040"/>
-          </a:xfrm>
-          <a:prstGeom prst="rect">
-            <a:avLst/>
-          </a:prstGeom>
-          <a:noFill/>
-          <a:ln/>
-        </p:spPr>
-        <p:txBody>
-          <a:bodyPr wrap="square" lIns="0" tIns="0" rIns="0" bIns="0" rtlCol="0" anchor="ctr"/>
-          <a:lstStyle/>
-          <a:p>
-            <a:pPr indent="0" marL="0">
-              <a:buNone/>
-            </a:pPr>
-            <a:r>
-              <a:rPr lang="en-US" sz="1100" dirty="0">
+            <a:off x="6492240" y="5385816"/>
+            <a:ext cx="3657600" cy="320040"/>
+          </a:xfrm>
+          <a:prstGeom prst="rect">
+            <a:avLst/>
+          </a:prstGeom>
+          <a:noFill/>
+          <a:ln/>
+        </p:spPr>
+        <p:txBody>
+          <a:bodyPr wrap="square" lIns="0" tIns="0" rIns="0" bIns="0" rtlCol="0" anchor="ctr"/>
+          <a:lstStyle/>
+          <a:p>
+            <a:pPr indent="0" marL="0">
+              <a:buNone/>
+            </a:pPr>
+            <a:r>
+              <a:rPr lang="en-US" sz="1050" dirty="0">
                 <a:solidFill>
                   <a:srgbClr val="BABABB"/>
                 </a:solidFill>
@@ -4590,7 +4703,7 @@
               </a:rPr>
               <a:t>Device back online. Receipt signed. Audit queue notified.</a:t>
             </a:r>
-            <a:endParaRPr lang="en-US" sz="1100" dirty="0"/>
+            <a:endParaRPr lang="en-US" sz="1050" dirty="0"/>
           </a:p>
         </p:txBody>
       </p:sp>
@@ -4602,7 +4715,7 @@
         </p:nvSpPr>
         <p:spPr>
           <a:xfrm>
-            <a:off x="10332720" y="5980176"/>
+            <a:off x="10241280" y="5385816"/>
             <a:ext cx="1828800" cy="320040"/>
           </a:xfrm>
           <a:prstGeom prst="rect">
@@ -4619,7 +4732,7 @@
               <a:buNone/>
             </a:pPr>
             <a:r>
-              <a:rPr lang="en-US" sz="900" spc="200" kern="0" dirty="0">
+              <a:rPr lang="en-US" sz="850" spc="200" kern="0" dirty="0">
                 <a:solidFill>
                   <a:srgbClr val="777779"/>
                 </a:solidFill>
@@ -4629,7 +4742,7 @@
               </a:rPr>
               <a:t>SIGNED</a:t>
             </a:r>
-            <a:endParaRPr lang="en-US" sz="900" dirty="0"/>
+            <a:endParaRPr lang="en-US" sz="850" dirty="0"/>
           </a:p>
         </p:txBody>
       </p:sp>
@@ -4641,24 +4754,24 @@
         </p:nvSpPr>
         <p:spPr>
           <a:xfrm>
-            <a:off x="457200" y="6309360"/>
-            <a:ext cx="11247120" cy="274320"/>
-          </a:xfrm>
-          <a:prstGeom prst="rect">
-            <a:avLst/>
-          </a:prstGeom>
-          <a:noFill/>
-          <a:ln/>
-        </p:spPr>
-        <p:txBody>
-          <a:bodyPr wrap="square" lIns="0" tIns="0" rIns="0" bIns="0" rtlCol="0" anchor="ctr"/>
-          <a:lstStyle/>
-          <a:p>
-            <a:pPr algn="l" indent="0" marL="0">
-              <a:buNone/>
-            </a:pPr>
-            <a:r>
-              <a:rPr lang="en-US" sz="1800" i="1" dirty="0">
+            <a:off x="457200" y="5989320"/>
+            <a:ext cx="11274552" cy="320040"/>
+          </a:xfrm>
+          <a:prstGeom prst="rect">
+            <a:avLst/>
+          </a:prstGeom>
+          <a:noFill/>
+          <a:ln/>
+        </p:spPr>
+        <p:txBody>
+          <a:bodyPr wrap="square" lIns="0" tIns="0" rIns="0" bIns="0" rtlCol="0" anchor="ctr"/>
+          <a:lstStyle/>
+          <a:p>
+            <a:pPr indent="0" marL="0">
+              <a:buNone/>
+            </a:pPr>
+            <a:r>
+              <a:rPr lang="en-US" sz="1600" i="1" dirty="0">
                 <a:solidFill>
                   <a:srgbClr val="BABABB"/>
                 </a:solidFill>
@@ -4668,11 +4781,11 @@
               </a:rPr>
               <a:t>Find the hole.  </a:t>
             </a:r>
-            <a:pPr algn="l" indent="0" marL="0">
-              <a:buNone/>
-            </a:pPr>
-            <a:r>
-              <a:rPr lang="en-US" sz="1800" b="1" i="1" dirty="0">
+            <a:pPr indent="0" marL="0">
+              <a:buNone/>
+            </a:pPr>
+            <a:r>
+              <a:rPr lang="en-US" sz="1600" b="1" i="1" dirty="0">
                 <a:solidFill>
                   <a:srgbClr val="FF2D4A"/>
                 </a:solidFill>
@@ -4682,11 +4795,11 @@
               </a:rPr>
               <a:t>Prove the kill.  </a:t>
             </a:r>
-            <a:pPr algn="l" indent="0" marL="0">
-              <a:buNone/>
-            </a:pPr>
-            <a:r>
-              <a:rPr lang="en-US" sz="1800" i="1" dirty="0">
+            <a:pPr indent="0" marL="0">
+              <a:buNone/>
+            </a:pPr>
+            <a:r>
+              <a:rPr lang="en-US" sz="1600" i="1" dirty="0">
                 <a:solidFill>
                   <a:srgbClr val="BABABB"/>
                 </a:solidFill>
@@ -4696,7 +4809,7 @@
               </a:rPr>
               <a:t>Close it.  Show the receipt.</a:t>
             </a:r>
-            <a:endParaRPr lang="en-US" sz="1800" dirty="0"/>
+            <a:endParaRPr lang="en-US" sz="1600" dirty="0"/>
           </a:p>
         </p:txBody>
       </p:sp>
@@ -4734,7 +4847,7 @@
         <p:spPr>
           <a:xfrm>
             <a:off x="457200" y="365760"/>
-            <a:ext cx="11247120" cy="274320"/>
+            <a:ext cx="11274552" cy="274320"/>
           </a:xfrm>
           <a:prstGeom prst="rect">
             <a:avLst/>
@@ -4787,23 +4900,23 @@
         <p:spPr>
           <a:xfrm>
             <a:off x="457200" y="777240"/>
-            <a:ext cx="11247120" cy="1463040"/>
-          </a:xfrm>
-          <a:prstGeom prst="rect">
-            <a:avLst/>
-          </a:prstGeom>
-          <a:noFill/>
-          <a:ln/>
-        </p:spPr>
-        <p:txBody>
-          <a:bodyPr wrap="square" lIns="0" tIns="0" rIns="0" bIns="0" rtlCol="0" anchor="ctr"/>
-          <a:lstStyle/>
-          <a:p>
-            <a:pPr indent="0" marL="0">
-              <a:buNone/>
-            </a:pPr>
-            <a:r>
-              <a:rPr lang="en-US" sz="3800" b="1" spc="-100" kern="0" dirty="0">
+            <a:ext cx="11274552" cy="1463040"/>
+          </a:xfrm>
+          <a:prstGeom prst="rect">
+            <a:avLst/>
+          </a:prstGeom>
+          <a:noFill/>
+          <a:ln/>
+        </p:spPr>
+        <p:txBody>
+          <a:bodyPr wrap="square" lIns="0" tIns="0" rIns="0" bIns="0" rtlCol="0" anchor="ctr"/>
+          <a:lstStyle/>
+          <a:p>
+            <a:pPr indent="0" marL="0">
+              <a:buNone/>
+            </a:pPr>
+            <a:r>
+              <a:rPr lang="en-US" sz="3400" b="1" spc="-100" kern="0" dirty="0">
                 <a:solidFill>
                   <a:srgbClr val="FAFAFA"/>
                 </a:solidFill>
@@ -4818,7 +4931,7 @@
               <a:buNone/>
             </a:pPr>
             <a:r>
-              <a:rPr lang="en-US" sz="3800" b="1" spc="-100" kern="0" dirty="0">
+              <a:rPr lang="en-US" sz="3400" b="1" spc="-100" kern="0" dirty="0">
                 <a:solidFill>
                   <a:srgbClr val="FAFAFA"/>
                 </a:solidFill>
@@ -4832,7 +4945,7 @@
               <a:buNone/>
             </a:pPr>
             <a:r>
-              <a:rPr lang="en-US" sz="3800" b="1" i="1" spc="-100" kern="0" dirty="0">
+              <a:rPr lang="en-US" sz="3400" b="1" i="1" spc="-100" kern="0" dirty="0">
                 <a:solidFill>
                   <a:srgbClr val="FF2D4A"/>
                 </a:solidFill>
@@ -4842,7 +4955,7 @@
               </a:rPr>
               <a:t>catches itself.</a:t>
             </a:r>
-            <a:endParaRPr lang="en-US" sz="3800" dirty="0"/>
+            <a:endParaRPr lang="en-US" sz="3400" dirty="0"/>
           </a:p>
         </p:txBody>
       </p:sp>
@@ -4854,8 +4967,8 @@
         </p:nvSpPr>
         <p:spPr>
           <a:xfrm>
-            <a:off x="365760" y="2560320"/>
-            <a:ext cx="6035040" cy="3840480"/>
+            <a:off x="411480" y="2468880"/>
+            <a:ext cx="3182112" cy="3749040"/>
           </a:xfrm>
           <a:prstGeom prst="rect">
             <a:avLst/>
@@ -4881,13 +4994,14 @@
         </p:nvPicPr>
         <p:blipFill>
           <a:blip r:embed="rId1"/>
-          <a:srcRect l="0" r="0" t="0" b="0"/>
-          <a:stretch/>
+          <a:stretch>
+            <a:fillRect/>
+          </a:stretch>
         </p:blipFill>
         <p:spPr>
           <a:xfrm>
-            <a:off x="457200" y="2651760"/>
-            <a:ext cx="5852160" cy="3657600"/>
+            <a:off x="457200" y="2514600"/>
+            <a:ext cx="3090672" cy="3657600"/>
           </a:xfrm>
           <a:prstGeom prst="rect">
             <a:avLst/>
@@ -4902,8 +5016,8 @@
         </p:nvSpPr>
         <p:spPr>
           <a:xfrm>
-            <a:off x="365760" y="2606040"/>
-            <a:ext cx="6035040" cy="228600"/>
+            <a:off x="457200" y="2194560"/>
+            <a:ext cx="3090672" cy="228600"/>
           </a:xfrm>
           <a:prstGeom prst="rect">
             <a:avLst/>
@@ -4941,8 +5055,8 @@
         </p:nvSpPr>
         <p:spPr>
           <a:xfrm>
-            <a:off x="6583680" y="2514600"/>
-            <a:ext cx="5212080" cy="0"/>
+            <a:off x="3931920" y="2514600"/>
+            <a:ext cx="7772400" cy="0"/>
           </a:xfrm>
           <a:prstGeom prst="line">
             <a:avLst/>
@@ -4964,24 +5078,24 @@
         </p:nvSpPr>
         <p:spPr>
           <a:xfrm>
-            <a:off x="6675120" y="2606040"/>
-            <a:ext cx="457200" cy="365760"/>
-          </a:xfrm>
-          <a:prstGeom prst="rect">
-            <a:avLst/>
-          </a:prstGeom>
-          <a:noFill/>
-          <a:ln/>
-        </p:spPr>
-        <p:txBody>
-          <a:bodyPr wrap="square" lIns="0" tIns="0" rIns="0" bIns="0" rtlCol="0" anchor="ctr"/>
-          <a:lstStyle/>
-          <a:p>
-            <a:pPr indent="0" marL="0">
-              <a:buNone/>
-            </a:pPr>
-            <a:r>
-              <a:rPr lang="en-US" sz="2200" i="1" dirty="0">
+            <a:off x="3931920" y="2606040"/>
+            <a:ext cx="457200" cy="457200"/>
+          </a:xfrm>
+          <a:prstGeom prst="rect">
+            <a:avLst/>
+          </a:prstGeom>
+          <a:noFill/>
+          <a:ln/>
+        </p:spPr>
+        <p:txBody>
+          <a:bodyPr wrap="square" lIns="0" tIns="0" rIns="0" bIns="0" rtlCol="0" anchor="ctr"/>
+          <a:lstStyle/>
+          <a:p>
+            <a:pPr indent="0" marL="0">
+              <a:buNone/>
+            </a:pPr>
+            <a:r>
+              <a:rPr lang="en-US" sz="2400" i="1" dirty="0">
                 <a:solidFill>
                   <a:srgbClr val="FF2D4A"/>
                 </a:solidFill>
@@ -4991,7 +5105,7 @@
               </a:rPr>
               <a:t>01</a:t>
             </a:r>
-            <a:endParaRPr lang="en-US" sz="2200" dirty="0"/>
+            <a:endParaRPr lang="en-US" sz="2400" dirty="0"/>
           </a:p>
         </p:txBody>
       </p:sp>
@@ -5003,8 +5117,8 @@
         </p:nvSpPr>
         <p:spPr>
           <a:xfrm>
-            <a:off x="7269480" y="2679192"/>
-            <a:ext cx="4389120" cy="274320"/>
+            <a:off x="4480560" y="2679192"/>
+            <a:ext cx="7223760" cy="228600"/>
           </a:xfrm>
           <a:prstGeom prst="rect">
             <a:avLst/>
@@ -5042,24 +5156,24 @@
         </p:nvSpPr>
         <p:spPr>
           <a:xfrm>
-            <a:off x="7269480" y="2944368"/>
-            <a:ext cx="4389120" cy="502920"/>
-          </a:xfrm>
-          <a:prstGeom prst="rect">
-            <a:avLst/>
-          </a:prstGeom>
-          <a:noFill/>
-          <a:ln/>
-        </p:spPr>
-        <p:txBody>
-          <a:bodyPr wrap="square" lIns="0" tIns="0" rIns="0" bIns="0" rtlCol="0" anchor="ctr"/>
-          <a:lstStyle/>
-          <a:p>
-            <a:pPr indent="0" marL="0">
-              <a:buNone/>
-            </a:pPr>
-            <a:r>
-              <a:rPr lang="en-US" sz="1250" dirty="0">
+            <a:off x="4480560" y="2926080"/>
+            <a:ext cx="7223760" cy="457200"/>
+          </a:xfrm>
+          <a:prstGeom prst="rect">
+            <a:avLst/>
+          </a:prstGeom>
+          <a:noFill/>
+          <a:ln/>
+        </p:spPr>
+        <p:txBody>
+          <a:bodyPr wrap="square" lIns="0" tIns="0" rIns="0" bIns="0" rtlCol="0" anchor="ctr"/>
+          <a:lstStyle/>
+          <a:p>
+            <a:pPr indent="0" marL="0">
+              <a:buNone/>
+            </a:pPr>
+            <a:r>
+              <a:rPr lang="en-US" sz="1200" dirty="0">
                 <a:solidFill>
                   <a:srgbClr val="FAFAFA"/>
                 </a:solidFill>
@@ -5069,7 +5183,7 @@
               </a:rPr>
               <a:t>Scan agent reads app.py line-by-line, visibly cross-checks the auth decorator.</a:t>
             </a:r>
-            <a:endParaRPr lang="en-US" sz="1250" dirty="0"/>
+            <a:endParaRPr lang="en-US" sz="1200" dirty="0"/>
           </a:p>
         </p:txBody>
       </p:sp>
@@ -5081,8 +5195,8 @@
         </p:nvSpPr>
         <p:spPr>
           <a:xfrm>
-            <a:off x="6583680" y="3502152"/>
-            <a:ext cx="5212080" cy="0"/>
+            <a:off x="3931920" y="3429000"/>
+            <a:ext cx="7772400" cy="0"/>
           </a:xfrm>
           <a:prstGeom prst="line">
             <a:avLst/>
@@ -5104,24 +5218,24 @@
         </p:nvSpPr>
         <p:spPr>
           <a:xfrm>
-            <a:off x="6675120" y="3593592"/>
-            <a:ext cx="457200" cy="365760"/>
-          </a:xfrm>
-          <a:prstGeom prst="rect">
-            <a:avLst/>
-          </a:prstGeom>
-          <a:noFill/>
-          <a:ln/>
-        </p:spPr>
-        <p:txBody>
-          <a:bodyPr wrap="square" lIns="0" tIns="0" rIns="0" bIns="0" rtlCol="0" anchor="ctr"/>
-          <a:lstStyle/>
-          <a:p>
-            <a:pPr indent="0" marL="0">
-              <a:buNone/>
-            </a:pPr>
-            <a:r>
-              <a:rPr lang="en-US" sz="2200" i="1" dirty="0">
+            <a:off x="3931920" y="3520440"/>
+            <a:ext cx="457200" cy="457200"/>
+          </a:xfrm>
+          <a:prstGeom prst="rect">
+            <a:avLst/>
+          </a:prstGeom>
+          <a:noFill/>
+          <a:ln/>
+        </p:spPr>
+        <p:txBody>
+          <a:bodyPr wrap="square" lIns="0" tIns="0" rIns="0" bIns="0" rtlCol="0" anchor="ctr"/>
+          <a:lstStyle/>
+          <a:p>
+            <a:pPr indent="0" marL="0">
+              <a:buNone/>
+            </a:pPr>
+            <a:r>
+              <a:rPr lang="en-US" sz="2400" i="1" dirty="0">
                 <a:solidFill>
                   <a:srgbClr val="FF2D4A"/>
                 </a:solidFill>
@@ -5131,7 +5245,7 @@
               </a:rPr>
               <a:t>02</a:t>
             </a:r>
-            <a:endParaRPr lang="en-US" sz="2200" dirty="0"/>
+            <a:endParaRPr lang="en-US" sz="2400" dirty="0"/>
           </a:p>
         </p:txBody>
       </p:sp>
@@ -5143,8 +5257,8 @@
         </p:nvSpPr>
         <p:spPr>
           <a:xfrm>
-            <a:off x="7269480" y="3666744"/>
-            <a:ext cx="4389120" cy="274320"/>
+            <a:off x="4480560" y="3593592"/>
+            <a:ext cx="7223760" cy="228600"/>
           </a:xfrm>
           <a:prstGeom prst="rect">
             <a:avLst/>
@@ -5182,24 +5296,24 @@
         </p:nvSpPr>
         <p:spPr>
           <a:xfrm>
-            <a:off x="7269480" y="3931920"/>
-            <a:ext cx="4389120" cy="502920"/>
-          </a:xfrm>
-          <a:prstGeom prst="rect">
-            <a:avLst/>
-          </a:prstGeom>
-          <a:noFill/>
-          <a:ln/>
-        </p:spPr>
-        <p:txBody>
-          <a:bodyPr wrap="square" lIns="0" tIns="0" rIns="0" bIns="0" rtlCol="0" anchor="ctr"/>
-          <a:lstStyle/>
-          <a:p>
-            <a:pPr indent="0" marL="0">
-              <a:buNone/>
-            </a:pPr>
-            <a:r>
-              <a:rPr lang="en-US" sz="1250" dirty="0">
+            <a:off x="4480560" y="3840480"/>
+            <a:ext cx="7223760" cy="457200"/>
+          </a:xfrm>
+          <a:prstGeom prst="rect">
+            <a:avLst/>
+          </a:prstGeom>
+          <a:noFill/>
+          <a:ln/>
+        </p:spPr>
+        <p:txBody>
+          <a:bodyPr wrap="square" lIns="0" tIns="0" rIns="0" bIns="0" rtlCol="0" anchor="ctr"/>
+          <a:lstStyle/>
+          <a:p>
+            <a:pPr indent="0" marL="0">
+              <a:buNone/>
+            </a:pPr>
+            <a:r>
+              <a:rPr lang="en-US" sz="1200" dirty="0">
                 <a:solidFill>
                   <a:srgbClr val="FAFAFA"/>
                 </a:solidFill>
@@ -5207,9 +5321,9 @@
                 <a:ea typeface="Calibri" pitchFamily="34" charset="-122"/>
                 <a:cs typeface="Calibri" pitchFamily="34" charset="-120"/>
               </a:rPr>
-              <a:t>72% on the real finding, 58% after it rejects its own first patch.</a:t>
-            </a:r>
-            <a:endParaRPr lang="en-US" sz="1250" dirty="0"/>
+              <a:t>72% on the real finding. 58% after it rejects its own first patch.</a:t>
+            </a:r>
+            <a:endParaRPr lang="en-US" sz="1200" dirty="0"/>
           </a:p>
         </p:txBody>
       </p:sp>
@@ -5221,8 +5335,8 @@
         </p:nvSpPr>
         <p:spPr>
           <a:xfrm>
-            <a:off x="6583680" y="4489704"/>
-            <a:ext cx="5212080" cy="0"/>
+            <a:off x="3931920" y="4343400"/>
+            <a:ext cx="7772400" cy="0"/>
           </a:xfrm>
           <a:prstGeom prst="line">
             <a:avLst/>
@@ -5244,24 +5358,24 @@
         </p:nvSpPr>
         <p:spPr>
           <a:xfrm>
-            <a:off x="6675120" y="4581144"/>
-            <a:ext cx="457200" cy="365760"/>
-          </a:xfrm>
-          <a:prstGeom prst="rect">
-            <a:avLst/>
-          </a:prstGeom>
-          <a:noFill/>
-          <a:ln/>
-        </p:spPr>
-        <p:txBody>
-          <a:bodyPr wrap="square" lIns="0" tIns="0" rIns="0" bIns="0" rtlCol="0" anchor="ctr"/>
-          <a:lstStyle/>
-          <a:p>
-            <a:pPr indent="0" marL="0">
-              <a:buNone/>
-            </a:pPr>
-            <a:r>
-              <a:rPr lang="en-US" sz="2200" i="1" dirty="0">
+            <a:off x="3931920" y="4434840"/>
+            <a:ext cx="457200" cy="457200"/>
+          </a:xfrm>
+          <a:prstGeom prst="rect">
+            <a:avLst/>
+          </a:prstGeom>
+          <a:noFill/>
+          <a:ln/>
+        </p:spPr>
+        <p:txBody>
+          <a:bodyPr wrap="square" lIns="0" tIns="0" rIns="0" bIns="0" rtlCol="0" anchor="ctr"/>
+          <a:lstStyle/>
+          <a:p>
+            <a:pPr indent="0" marL="0">
+              <a:buNone/>
+            </a:pPr>
+            <a:r>
+              <a:rPr lang="en-US" sz="2400" i="1" dirty="0">
                 <a:solidFill>
                   <a:srgbClr val="FF2D4A"/>
                 </a:solidFill>
@@ -5271,7 +5385,7 @@
               </a:rPr>
               <a:t>03</a:t>
             </a:r>
-            <a:endParaRPr lang="en-US" sz="2200" dirty="0"/>
+            <a:endParaRPr lang="en-US" sz="2400" dirty="0"/>
           </a:p>
         </p:txBody>
       </p:sp>
@@ -5283,8 +5397,8 @@
         </p:nvSpPr>
         <p:spPr>
           <a:xfrm>
-            <a:off x="7269480" y="4654296"/>
-            <a:ext cx="4389120" cy="274320"/>
+            <a:off x="4480560" y="4507992"/>
+            <a:ext cx="7223760" cy="228600"/>
           </a:xfrm>
           <a:prstGeom prst="rect">
             <a:avLst/>
@@ -5322,24 +5436,24 @@
         </p:nvSpPr>
         <p:spPr>
           <a:xfrm>
-            <a:off x="7269480" y="4919472"/>
-            <a:ext cx="4389120" cy="502920"/>
-          </a:xfrm>
-          <a:prstGeom prst="rect">
-            <a:avLst/>
-          </a:prstGeom>
-          <a:noFill/>
-          <a:ln/>
-        </p:spPr>
-        <p:txBody>
-          <a:bodyPr wrap="square" lIns="0" tIns="0" rIns="0" bIns="0" rtlCol="0" anchor="ctr"/>
-          <a:lstStyle/>
-          <a:p>
-            <a:pPr indent="0" marL="0">
-              <a:buNone/>
-            </a:pPr>
-            <a:r>
-              <a:rPr lang="en-US" sz="1250" dirty="0">
+            <a:off x="4480560" y="4754880"/>
+            <a:ext cx="7223760" cy="457200"/>
+          </a:xfrm>
+          <a:prstGeom prst="rect">
+            <a:avLst/>
+          </a:prstGeom>
+          <a:noFill/>
+          <a:ln/>
+        </p:spPr>
+        <p:txBody>
+          <a:bodyPr wrap="square" lIns="0" tIns="0" rIns="0" bIns="0" rtlCol="0" anchor="ctr"/>
+          <a:lstStyle/>
+          <a:p>
+            <a:pPr indent="0" marL="0">
+              <a:buNone/>
+            </a:pPr>
+            <a:r>
+              <a:rPr lang="en-US" sz="1200" dirty="0">
                 <a:solidFill>
                   <a:srgbClr val="FAFAFA"/>
                 </a:solidFill>
@@ -5349,7 +5463,7 @@
               </a:rPr>
               <a:t>"REJECTED my own patch — v1 broke the emergency override path."</a:t>
             </a:r>
-            <a:endParaRPr lang="en-US" sz="1250" dirty="0"/>
+            <a:endParaRPr lang="en-US" sz="1200" dirty="0"/>
           </a:p>
         </p:txBody>
       </p:sp>
@@ -5361,8 +5475,8 @@
         </p:nvSpPr>
         <p:spPr>
           <a:xfrm>
-            <a:off x="6583680" y="5477256"/>
-            <a:ext cx="5212080" cy="0"/>
+            <a:off x="3931920" y="5257800"/>
+            <a:ext cx="7772400" cy="0"/>
           </a:xfrm>
           <a:prstGeom prst="line">
             <a:avLst/>
@@ -5384,24 +5498,24 @@
         </p:nvSpPr>
         <p:spPr>
           <a:xfrm>
-            <a:off x="6675120" y="5568696"/>
-            <a:ext cx="457200" cy="365760"/>
-          </a:xfrm>
-          <a:prstGeom prst="rect">
-            <a:avLst/>
-          </a:prstGeom>
-          <a:noFill/>
-          <a:ln/>
-        </p:spPr>
-        <p:txBody>
-          <a:bodyPr wrap="square" lIns="0" tIns="0" rIns="0" bIns="0" rtlCol="0" anchor="ctr"/>
-          <a:lstStyle/>
-          <a:p>
-            <a:pPr indent="0" marL="0">
-              <a:buNone/>
-            </a:pPr>
-            <a:r>
-              <a:rPr lang="en-US" sz="2200" i="1" dirty="0">
+            <a:off x="3931920" y="5349240"/>
+            <a:ext cx="457200" cy="457200"/>
+          </a:xfrm>
+          <a:prstGeom prst="rect">
+            <a:avLst/>
+          </a:prstGeom>
+          <a:noFill/>
+          <a:ln/>
+        </p:spPr>
+        <p:txBody>
+          <a:bodyPr wrap="square" lIns="0" tIns="0" rIns="0" bIns="0" rtlCol="0" anchor="ctr"/>
+          <a:lstStyle/>
+          <a:p>
+            <a:pPr indent="0" marL="0">
+              <a:buNone/>
+            </a:pPr>
+            <a:r>
+              <a:rPr lang="en-US" sz="2400" i="1" dirty="0">
                 <a:solidFill>
                   <a:srgbClr val="FF2D4A"/>
                 </a:solidFill>
@@ -5411,7 +5525,7 @@
               </a:rPr>
               <a:t>04</a:t>
             </a:r>
-            <a:endParaRPr lang="en-US" sz="2200" dirty="0"/>
+            <a:endParaRPr lang="en-US" sz="2400" dirty="0"/>
           </a:p>
         </p:txBody>
       </p:sp>
@@ -5423,8 +5537,8 @@
         </p:nvSpPr>
         <p:spPr>
           <a:xfrm>
-            <a:off x="7269480" y="5641848"/>
-            <a:ext cx="4389120" cy="274320"/>
+            <a:off x="4480560" y="5422392"/>
+            <a:ext cx="7223760" cy="228600"/>
           </a:xfrm>
           <a:prstGeom prst="rect">
             <a:avLst/>
@@ -5462,24 +5576,24 @@
         </p:nvSpPr>
         <p:spPr>
           <a:xfrm>
-            <a:off x="7269480" y="5907024"/>
-            <a:ext cx="4389120" cy="502920"/>
-          </a:xfrm>
-          <a:prstGeom prst="rect">
-            <a:avLst/>
-          </a:prstGeom>
-          <a:noFill/>
-          <a:ln/>
-        </p:spPr>
-        <p:txBody>
-          <a:bodyPr wrap="square" lIns="0" tIns="0" rIns="0" bIns="0" rtlCol="0" anchor="ctr"/>
-          <a:lstStyle/>
-          <a:p>
-            <a:pPr indent="0" marL="0">
-              <a:buNone/>
-            </a:pPr>
-            <a:r>
-              <a:rPr lang="en-US" sz="1250" dirty="0">
+            <a:off x="4480560" y="5669280"/>
+            <a:ext cx="7223760" cy="457200"/>
+          </a:xfrm>
+          <a:prstGeom prst="rect">
+            <a:avLst/>
+          </a:prstGeom>
+          <a:noFill/>
+          <a:ln/>
+        </p:spPr>
+        <p:txBody>
+          <a:bodyPr wrap="square" lIns="0" tIns="0" rIns="0" bIns="0" rtlCol="0" anchor="ctr"/>
+          <a:lstStyle/>
+          <a:p>
+            <a:pPr indent="0" marL="0">
+              <a:buNone/>
+            </a:pPr>
+            <a:r>
+              <a:rPr lang="en-US" sz="1200" dirty="0">
                 <a:solidFill>
                   <a:srgbClr val="FAFAFA"/>
                 </a:solidFill>
@@ -5489,7 +5603,7 @@
               </a:rPr>
               <a:t>Factory Droid produces a real git diff. 41 / 41 unit tests green.</a:t>
             </a:r>
-            <a:endParaRPr lang="en-US" sz="1250" dirty="0"/>
+            <a:endParaRPr lang="en-US" sz="1200" dirty="0"/>
           </a:p>
         </p:txBody>
       </p:sp>
@@ -5527,7 +5641,7 @@
         <p:spPr>
           <a:xfrm>
             <a:off x="457200" y="365760"/>
-            <a:ext cx="11247120" cy="274320"/>
+            <a:ext cx="11274552" cy="274320"/>
           </a:xfrm>
           <a:prstGeom prst="rect">
             <a:avLst/>
@@ -5580,23 +5694,23 @@
         <p:spPr>
           <a:xfrm>
             <a:off x="457200" y="777240"/>
-            <a:ext cx="11247120" cy="1645920"/>
-          </a:xfrm>
-          <a:prstGeom prst="rect">
-            <a:avLst/>
-          </a:prstGeom>
-          <a:noFill/>
-          <a:ln/>
-        </p:spPr>
-        <p:txBody>
-          <a:bodyPr wrap="square" lIns="0" tIns="0" rIns="0" bIns="0" rtlCol="0" anchor="ctr"/>
-          <a:lstStyle/>
-          <a:p>
-            <a:pPr indent="0" marL="0">
-              <a:buNone/>
-            </a:pPr>
-            <a:r>
-              <a:rPr lang="en-US" sz="4000" b="1" spc="-100" kern="0" dirty="0">
+            <a:ext cx="11274552" cy="1463040"/>
+          </a:xfrm>
+          <a:prstGeom prst="rect">
+            <a:avLst/>
+          </a:prstGeom>
+          <a:noFill/>
+          <a:ln/>
+        </p:spPr>
+        <p:txBody>
+          <a:bodyPr wrap="square" lIns="0" tIns="0" rIns="0" bIns="0" rtlCol="0" anchor="ctr"/>
+          <a:lstStyle/>
+          <a:p>
+            <a:pPr indent="0" marL="0">
+              <a:buNone/>
+            </a:pPr>
+            <a:r>
+              <a:rPr lang="en-US" sz="3400" b="1" spc="-100" kern="0" dirty="0">
                 <a:solidFill>
                   <a:srgbClr val="FAFAFA"/>
                 </a:solidFill>
@@ -5611,7 +5725,7 @@
               <a:buNone/>
             </a:pPr>
             <a:r>
-              <a:rPr lang="en-US" sz="4000" b="1" spc="-100" kern="0" dirty="0">
+              <a:rPr lang="en-US" sz="3400" b="1" spc="-100" kern="0" dirty="0">
                 <a:solidFill>
                   <a:srgbClr val="FAFAFA"/>
                 </a:solidFill>
@@ -5625,7 +5739,7 @@
               <a:buNone/>
             </a:pPr>
             <a:r>
-              <a:rPr lang="en-US" sz="4000" b="1" i="1" spc="-100" kern="0" dirty="0">
+              <a:rPr lang="en-US" sz="3400" b="1" i="1" spc="-100" kern="0" dirty="0">
                 <a:solidFill>
                   <a:srgbClr val="22E07A"/>
                 </a:solidFill>
@@ -5635,7 +5749,7 @@
               </a:rPr>
               <a:t>fail.</a:t>
             </a:r>
-            <a:endParaRPr lang="en-US" sz="4000" dirty="0"/>
+            <a:endParaRPr lang="en-US" sz="3400" dirty="0"/>
           </a:p>
         </p:txBody>
       </p:sp>
@@ -5647,8 +5761,8 @@
         </p:nvSpPr>
         <p:spPr>
           <a:xfrm>
-            <a:off x="548640" y="2834640"/>
-            <a:ext cx="3291840" cy="2834640"/>
+            <a:off x="457200" y="2651760"/>
+            <a:ext cx="3200400" cy="274320"/>
           </a:xfrm>
           <a:prstGeom prst="rect">
             <a:avLst/>
@@ -5664,7 +5778,85 @@
               <a:buNone/>
             </a:pPr>
             <a:r>
-              <a:rPr lang="en-US" sz="26000" b="1" spc="-800" kern="0" dirty="0">
+              <a:rPr lang="en-US" sz="1000" spc="300" kern="0" dirty="0">
+                <a:solidFill>
+                  <a:srgbClr val="777779"/>
+                </a:solidFill>
+                <a:latin typeface="Consolas" pitchFamily="34" charset="0"/>
+                <a:ea typeface="Consolas" pitchFamily="34" charset="-122"/>
+                <a:cs typeface="Consolas" pitchFamily="34" charset="-120"/>
+              </a:rPr>
+              <a:t>BEFORE PATCH</a:t>
+            </a:r>
+            <a:endParaRPr lang="en-US" sz="1000" dirty="0"/>
+          </a:p>
+        </p:txBody>
+      </p:sp>
+      <p:sp>
+        <p:nvSpPr>
+          <p:cNvPr id="5" name="Text 3"/>
+          <p:cNvSpPr txBox="1"/>
+          <p:nvPr/>
+        </p:nvSpPr>
+        <p:spPr>
+          <a:xfrm>
+            <a:off x="5029200" y="2651760"/>
+            <a:ext cx="3200400" cy="274320"/>
+          </a:xfrm>
+          <a:prstGeom prst="rect">
+            <a:avLst/>
+          </a:prstGeom>
+          <a:noFill/>
+          <a:ln/>
+        </p:spPr>
+        <p:txBody>
+          <a:bodyPr wrap="square" lIns="0" tIns="0" rIns="0" bIns="0" rtlCol="0" anchor="ctr"/>
+          <a:lstStyle/>
+          <a:p>
+            <a:pPr algn="ctr" indent="0" marL="0">
+              <a:buNone/>
+            </a:pPr>
+            <a:r>
+              <a:rPr lang="en-US" sz="1000" spc="300" kern="0" dirty="0">
+                <a:solidFill>
+                  <a:srgbClr val="777779"/>
+                </a:solidFill>
+                <a:latin typeface="Consolas" pitchFamily="34" charset="0"/>
+                <a:ea typeface="Consolas" pitchFamily="34" charset="-122"/>
+                <a:cs typeface="Consolas" pitchFamily="34" charset="-120"/>
+              </a:rPr>
+              <a:t>AFTER PATCH</a:t>
+            </a:r>
+            <a:endParaRPr lang="en-US" sz="1000" dirty="0"/>
+          </a:p>
+        </p:txBody>
+      </p:sp>
+      <p:sp>
+        <p:nvSpPr>
+          <p:cNvPr id="6" name="Text 4"/>
+          <p:cNvSpPr txBox="1"/>
+          <p:nvPr/>
+        </p:nvSpPr>
+        <p:spPr>
+          <a:xfrm>
+            <a:off x="457200" y="2971800"/>
+            <a:ext cx="3200400" cy="2286000"/>
+          </a:xfrm>
+          <a:prstGeom prst="rect">
+            <a:avLst/>
+          </a:prstGeom>
+          <a:noFill/>
+          <a:ln/>
+        </p:spPr>
+        <p:txBody>
+          <a:bodyPr wrap="square" lIns="0" tIns="0" rIns="0" bIns="0" rtlCol="0" anchor="ctr"/>
+          <a:lstStyle/>
+          <a:p>
+            <a:pPr algn="ctr" indent="0" marL="0">
+              <a:buNone/>
+            </a:pPr>
+            <a:r>
+              <a:rPr lang="en-US" sz="17000" b="1" spc="-500" kern="0" dirty="0">
                 <a:solidFill>
                   <a:srgbClr val="FF2D4A"/>
                 </a:solidFill>
@@ -5674,20 +5866,20 @@
               </a:rPr>
               <a:t>200</a:t>
             </a:r>
-            <a:endParaRPr lang="en-US" sz="26000" dirty="0"/>
-          </a:p>
-        </p:txBody>
-      </p:sp>
-      <p:sp>
-        <p:nvSpPr>
-          <p:cNvPr id="5" name="Text 3"/>
-          <p:cNvSpPr txBox="1"/>
-          <p:nvPr/>
-        </p:nvSpPr>
-        <p:spPr>
-          <a:xfrm>
-            <a:off x="4114800" y="3108960"/>
-            <a:ext cx="1280160" cy="2286000"/>
+            <a:endParaRPr lang="en-US" sz="17000" dirty="0"/>
+          </a:p>
+        </p:txBody>
+      </p:sp>
+      <p:sp>
+        <p:nvSpPr>
+          <p:cNvPr id="7" name="Text 5"/>
+          <p:cNvSpPr txBox="1"/>
+          <p:nvPr/>
+        </p:nvSpPr>
+        <p:spPr>
+          <a:xfrm>
+            <a:off x="3749040" y="3291840"/>
+            <a:ext cx="1188720" cy="1645920"/>
           </a:xfrm>
           <a:prstGeom prst="rect">
             <a:avLst/>
@@ -5703,7 +5895,7 @@
               <a:buNone/>
             </a:pPr>
             <a:r>
-              <a:rPr lang="en-US" sz="14000" dirty="0">
+              <a:rPr lang="en-US" sz="10000" dirty="0">
                 <a:solidFill>
                   <a:srgbClr val="777779"/>
                 </a:solidFill>
@@ -5713,20 +5905,20 @@
               </a:rPr>
               <a:t>→</a:t>
             </a:r>
-            <a:endParaRPr lang="en-US" sz="14000" dirty="0"/>
-          </a:p>
-        </p:txBody>
-      </p:sp>
-      <p:sp>
-        <p:nvSpPr>
-          <p:cNvPr id="6" name="Text 4"/>
-          <p:cNvSpPr txBox="1"/>
-          <p:nvPr/>
-        </p:nvSpPr>
-        <p:spPr>
-          <a:xfrm>
-            <a:off x="5486400" y="2834640"/>
-            <a:ext cx="3291840" cy="2834640"/>
+            <a:endParaRPr lang="en-US" sz="10000" dirty="0"/>
+          </a:p>
+        </p:txBody>
+      </p:sp>
+      <p:sp>
+        <p:nvSpPr>
+          <p:cNvPr id="8" name="Text 6"/>
+          <p:cNvSpPr txBox="1"/>
+          <p:nvPr/>
+        </p:nvSpPr>
+        <p:spPr>
+          <a:xfrm>
+            <a:off x="5029200" y="2971800"/>
+            <a:ext cx="3200400" cy="2286000"/>
           </a:xfrm>
           <a:prstGeom prst="rect">
             <a:avLst/>
@@ -5742,7 +5934,7 @@
               <a:buNone/>
             </a:pPr>
             <a:r>
-              <a:rPr lang="en-US" sz="26000" b="1" spc="-800" kern="0" dirty="0">
+              <a:rPr lang="en-US" sz="17000" b="1" spc="-500" kern="0" dirty="0">
                 <a:solidFill>
                   <a:srgbClr val="22E07A"/>
                 </a:solidFill>
@@ -5752,85 +5944,7 @@
               </a:rPr>
               <a:t>401</a:t>
             </a:r>
-            <a:endParaRPr lang="en-US" sz="26000" dirty="0"/>
-          </a:p>
-        </p:txBody>
-      </p:sp>
-      <p:sp>
-        <p:nvSpPr>
-          <p:cNvPr id="7" name="Text 5"/>
-          <p:cNvSpPr txBox="1"/>
-          <p:nvPr/>
-        </p:nvSpPr>
-        <p:spPr>
-          <a:xfrm>
-            <a:off x="548640" y="2514600"/>
-            <a:ext cx="3291840" cy="274320"/>
-          </a:xfrm>
-          <a:prstGeom prst="rect">
-            <a:avLst/>
-          </a:prstGeom>
-          <a:noFill/>
-          <a:ln/>
-        </p:spPr>
-        <p:txBody>
-          <a:bodyPr wrap="square" lIns="0" tIns="0" rIns="0" bIns="0" rtlCol="0" anchor="ctr"/>
-          <a:lstStyle/>
-          <a:p>
-            <a:pPr algn="ctr" indent="0" marL="0">
-              <a:buNone/>
-            </a:pPr>
-            <a:r>
-              <a:rPr lang="en-US" sz="1000" spc="300" kern="0" dirty="0">
-                <a:solidFill>
-                  <a:srgbClr val="777779"/>
-                </a:solidFill>
-                <a:latin typeface="Consolas" pitchFamily="34" charset="0"/>
-                <a:ea typeface="Consolas" pitchFamily="34" charset="-122"/>
-                <a:cs typeface="Consolas" pitchFamily="34" charset="-120"/>
-              </a:rPr>
-              <a:t>BEFORE PATCH</a:t>
-            </a:r>
-            <a:endParaRPr lang="en-US" sz="1000" dirty="0"/>
-          </a:p>
-        </p:txBody>
-      </p:sp>
-      <p:sp>
-        <p:nvSpPr>
-          <p:cNvPr id="8" name="Text 6"/>
-          <p:cNvSpPr txBox="1"/>
-          <p:nvPr/>
-        </p:nvSpPr>
-        <p:spPr>
-          <a:xfrm>
-            <a:off x="5486400" y="2514600"/>
-            <a:ext cx="3291840" cy="274320"/>
-          </a:xfrm>
-          <a:prstGeom prst="rect">
-            <a:avLst/>
-          </a:prstGeom>
-          <a:noFill/>
-          <a:ln/>
-        </p:spPr>
-        <p:txBody>
-          <a:bodyPr wrap="square" lIns="0" tIns="0" rIns="0" bIns="0" rtlCol="0" anchor="ctr"/>
-          <a:lstStyle/>
-          <a:p>
-            <a:pPr algn="ctr" indent="0" marL="0">
-              <a:buNone/>
-            </a:pPr>
-            <a:r>
-              <a:rPr lang="en-US" sz="1000" spc="300" kern="0" dirty="0">
-                <a:solidFill>
-                  <a:srgbClr val="777779"/>
-                </a:solidFill>
-                <a:latin typeface="Consolas" pitchFamily="34" charset="0"/>
-                <a:ea typeface="Consolas" pitchFamily="34" charset="-122"/>
-                <a:cs typeface="Consolas" pitchFamily="34" charset="-120"/>
-              </a:rPr>
-              <a:t>AFTER PATCH</a:t>
-            </a:r>
-            <a:endParaRPr lang="en-US" sz="1000" dirty="0"/>
+            <a:endParaRPr lang="en-US" sz="17000" dirty="0"/>
           </a:p>
         </p:txBody>
       </p:sp>
@@ -5842,8 +5956,8 @@
         </p:nvSpPr>
         <p:spPr>
           <a:xfrm>
-            <a:off x="9006840" y="2743200"/>
-            <a:ext cx="2834640" cy="3017520"/>
+            <a:off x="8686800" y="2743200"/>
+            <a:ext cx="3017520" cy="3108960"/>
           </a:xfrm>
           <a:prstGeom prst="rect">
             <a:avLst/>
@@ -5867,8 +5981,8 @@
         </p:nvSpPr>
         <p:spPr>
           <a:xfrm>
-            <a:off x="9189720" y="2907792"/>
-            <a:ext cx="2560320" cy="274320"/>
+            <a:off x="8869680" y="2926080"/>
+            <a:ext cx="2651760" cy="274320"/>
           </a:xfrm>
           <a:prstGeom prst="rect">
             <a:avLst/>
@@ -5906,7 +6020,7 @@
         </p:nvSpPr>
         <p:spPr>
           <a:xfrm>
-            <a:off x="9189720" y="3246120"/>
+            <a:off x="8869680" y="3273552"/>
             <a:ext cx="822960" cy="274320"/>
           </a:xfrm>
           <a:prstGeom prst="rect">
@@ -5945,8 +6059,8 @@
         </p:nvSpPr>
         <p:spPr>
           <a:xfrm>
-            <a:off x="10012680" y="3246120"/>
-            <a:ext cx="1737360" cy="502920"/>
+            <a:off x="9601200" y="3273552"/>
+            <a:ext cx="2011680" cy="274320"/>
           </a:xfrm>
           <a:prstGeom prst="rect">
             <a:avLst/>
@@ -5964,13 +6078,13 @@
             <a:r>
               <a:rPr lang="en-US" sz="900" dirty="0">
                 <a:solidFill>
-                  <a:srgbClr val="FF2D4A"/>
+                  <a:srgbClr val="BABABB"/>
                 </a:solidFill>
                 <a:latin typeface="Consolas" pitchFamily="34" charset="0"/>
                 <a:ea typeface="Consolas" pitchFamily="34" charset="-122"/>
                 <a:cs typeface="Consolas" pitchFamily="34" charset="-120"/>
               </a:rPr>
-              <a:t>POST /device/command → 200 OK</a:t>
+              <a:t>POST /device/command</a:t>
             </a:r>
             <a:endParaRPr lang="en-US" sz="900" dirty="0"/>
           </a:p>
@@ -5984,8 +6098,8 @@
         </p:nvSpPr>
         <p:spPr>
           <a:xfrm>
-            <a:off x="10012680" y="3749040"/>
-            <a:ext cx="1737360" cy="502920"/>
+            <a:off x="9601200" y="3584448"/>
+            <a:ext cx="2011680" cy="274320"/>
           </a:xfrm>
           <a:prstGeom prst="rect">
             <a:avLst/>
@@ -6003,13 +6117,13 @@
             <a:r>
               <a:rPr lang="en-US" sz="900" dirty="0">
                 <a:solidFill>
-                  <a:srgbClr val="777779"/>
+                  <a:srgbClr val="FF2D4A"/>
                 </a:solidFill>
                 <a:latin typeface="Consolas" pitchFamily="34" charset="0"/>
                 <a:ea typeface="Consolas" pitchFamily="34" charset="-122"/>
                 <a:cs typeface="Consolas" pitchFamily="34" charset="-120"/>
               </a:rPr>
-              <a:t>fan stops · alarm silent · patient crashing</a:t>
+              <a:t>→ 200 OK</a:t>
             </a:r>
             <a:endParaRPr lang="en-US" sz="900" dirty="0"/>
           </a:p>
@@ -6023,24 +6137,24 @@
         </p:nvSpPr>
         <p:spPr>
           <a:xfrm>
-            <a:off x="9189720" y="4251960"/>
-            <a:ext cx="822960" cy="274320"/>
-          </a:xfrm>
-          <a:prstGeom prst="rect">
-            <a:avLst/>
-          </a:prstGeom>
-          <a:noFill/>
-          <a:ln/>
-        </p:spPr>
-        <p:txBody>
-          <a:bodyPr wrap="square" lIns="0" tIns="0" rIns="0" bIns="0" rtlCol="0" anchor="ctr"/>
-          <a:lstStyle/>
-          <a:p>
-            <a:pPr indent="0" marL="0">
-              <a:buNone/>
-            </a:pPr>
-            <a:r>
-              <a:rPr lang="en-US" sz="900" spc="200" kern="0" dirty="0">
+            <a:off x="9601200" y="3895344"/>
+            <a:ext cx="2011680" cy="274320"/>
+          </a:xfrm>
+          <a:prstGeom prst="rect">
+            <a:avLst/>
+          </a:prstGeom>
+          <a:noFill/>
+          <a:ln/>
+        </p:spPr>
+        <p:txBody>
+          <a:bodyPr wrap="square" lIns="0" tIns="0" rIns="0" bIns="0" rtlCol="0" anchor="ctr"/>
+          <a:lstStyle/>
+          <a:p>
+            <a:pPr indent="0" marL="0">
+              <a:buNone/>
+            </a:pPr>
+            <a:r>
+              <a:rPr lang="en-US" sz="900" dirty="0">
                 <a:solidFill>
                   <a:srgbClr val="777779"/>
                 </a:solidFill>
@@ -6048,7 +6162,7 @@
                 <a:ea typeface="Consolas" pitchFamily="34" charset="-122"/>
                 <a:cs typeface="Consolas" pitchFamily="34" charset="-120"/>
               </a:rPr>
-              <a:t>After</a:t>
+              <a:t>fan stops · alarm silent · patient crashing</a:t>
             </a:r>
             <a:endParaRPr lang="en-US" sz="900" dirty="0"/>
           </a:p>
@@ -6062,32 +6176,32 @@
         </p:nvSpPr>
         <p:spPr>
           <a:xfrm>
-            <a:off x="10012680" y="4251960"/>
-            <a:ext cx="1737360" cy="502920"/>
-          </a:xfrm>
-          <a:prstGeom prst="rect">
-            <a:avLst/>
-          </a:prstGeom>
-          <a:noFill/>
-          <a:ln/>
-        </p:spPr>
-        <p:txBody>
-          <a:bodyPr wrap="square" lIns="0" tIns="0" rIns="0" bIns="0" rtlCol="0" anchor="ctr"/>
-          <a:lstStyle/>
-          <a:p>
-            <a:pPr indent="0" marL="0">
-              <a:buNone/>
-            </a:pPr>
-            <a:r>
-              <a:rPr lang="en-US" sz="900" dirty="0">
-                <a:solidFill>
-                  <a:srgbClr val="22E07A"/>
+            <a:off x="8869680" y="4206240"/>
+            <a:ext cx="822960" cy="274320"/>
+          </a:xfrm>
+          <a:prstGeom prst="rect">
+            <a:avLst/>
+          </a:prstGeom>
+          <a:noFill/>
+          <a:ln/>
+        </p:spPr>
+        <p:txBody>
+          <a:bodyPr wrap="square" lIns="0" tIns="0" rIns="0" bIns="0" rtlCol="0" anchor="ctr"/>
+          <a:lstStyle/>
+          <a:p>
+            <a:pPr indent="0" marL="0">
+              <a:buNone/>
+            </a:pPr>
+            <a:r>
+              <a:rPr lang="en-US" sz="900" spc="200" kern="0" dirty="0">
+                <a:solidFill>
+                  <a:srgbClr val="777779"/>
                 </a:solidFill>
                 <a:latin typeface="Consolas" pitchFamily="34" charset="0"/>
                 <a:ea typeface="Consolas" pitchFamily="34" charset="-122"/>
                 <a:cs typeface="Consolas" pitchFamily="34" charset="-120"/>
               </a:rPr>
-              <a:t>POST /device/command → 401</a:t>
+              <a:t>After</a:t>
             </a:r>
             <a:endParaRPr lang="en-US" sz="900" dirty="0"/>
           </a:p>
@@ -6101,8 +6215,8 @@
         </p:nvSpPr>
         <p:spPr>
           <a:xfrm>
-            <a:off x="10012680" y="4754880"/>
-            <a:ext cx="1737360" cy="502920"/>
+            <a:off x="9601200" y="4206240"/>
+            <a:ext cx="2011680" cy="274320"/>
           </a:xfrm>
           <a:prstGeom prst="rect">
             <a:avLst/>
@@ -6120,13 +6234,13 @@
             <a:r>
               <a:rPr lang="en-US" sz="900" dirty="0">
                 <a:solidFill>
-                  <a:srgbClr val="777779"/>
+                  <a:srgbClr val="BABABB"/>
                 </a:solidFill>
                 <a:latin typeface="Consolas" pitchFamily="34" charset="0"/>
                 <a:ea typeface="Consolas" pitchFamily="34" charset="-122"/>
                 <a:cs typeface="Consolas" pitchFamily="34" charset="-120"/>
               </a:rPr>
-              <a:t>fan running · alarm armed · patient breathing</a:t>
+              <a:t>POST /device/command</a:t>
             </a:r>
             <a:endParaRPr lang="en-US" sz="900" dirty="0"/>
           </a:p>
@@ -6140,32 +6254,32 @@
         </p:nvSpPr>
         <p:spPr>
           <a:xfrm>
-            <a:off x="9189720" y="5257800"/>
-            <a:ext cx="822960" cy="274320"/>
-          </a:xfrm>
-          <a:prstGeom prst="rect">
-            <a:avLst/>
-          </a:prstGeom>
-          <a:noFill/>
-          <a:ln/>
-        </p:spPr>
-        <p:txBody>
-          <a:bodyPr wrap="square" lIns="0" tIns="0" rIns="0" bIns="0" rtlCol="0" anchor="ctr"/>
-          <a:lstStyle/>
-          <a:p>
-            <a:pPr indent="0" marL="0">
-              <a:buNone/>
-            </a:pPr>
-            <a:r>
-              <a:rPr lang="en-US" sz="900" spc="200" kern="0" dirty="0">
-                <a:solidFill>
-                  <a:srgbClr val="777779"/>
+            <a:off x="9601200" y="4517136"/>
+            <a:ext cx="2011680" cy="274320"/>
+          </a:xfrm>
+          <a:prstGeom prst="rect">
+            <a:avLst/>
+          </a:prstGeom>
+          <a:noFill/>
+          <a:ln/>
+        </p:spPr>
+        <p:txBody>
+          <a:bodyPr wrap="square" lIns="0" tIns="0" rIns="0" bIns="0" rtlCol="0" anchor="ctr"/>
+          <a:lstStyle/>
+          <a:p>
+            <a:pPr indent="0" marL="0">
+              <a:buNone/>
+            </a:pPr>
+            <a:r>
+              <a:rPr lang="en-US" sz="900" dirty="0">
+                <a:solidFill>
+                  <a:srgbClr val="22E07A"/>
                 </a:solidFill>
                 <a:latin typeface="Consolas" pitchFamily="34" charset="0"/>
                 <a:ea typeface="Consolas" pitchFamily="34" charset="-122"/>
                 <a:cs typeface="Consolas" pitchFamily="34" charset="-120"/>
               </a:rPr>
-              <a:t>Judged by</a:t>
+              <a:t>→ 401 Unauthorized</a:t>
             </a:r>
             <a:endParaRPr lang="en-US" sz="900" dirty="0"/>
           </a:p>
@@ -6179,8 +6293,8 @@
         </p:nvSpPr>
         <p:spPr>
           <a:xfrm>
-            <a:off x="10012680" y="5257800"/>
-            <a:ext cx="1737360" cy="502920"/>
+            <a:off x="9601200" y="4828032"/>
+            <a:ext cx="2011680" cy="274320"/>
           </a:xfrm>
           <a:prstGeom prst="rect">
             <a:avLst/>
@@ -6198,13 +6312,13 @@
             <a:r>
               <a:rPr lang="en-US" sz="900" dirty="0">
                 <a:solidFill>
-                  <a:srgbClr val="BABABB"/>
+                  <a:srgbClr val="777779"/>
                 </a:solidFill>
                 <a:latin typeface="Consolas" pitchFamily="34" charset="0"/>
                 <a:ea typeface="Consolas" pitchFamily="34" charset="-122"/>
                 <a:cs typeface="Consolas" pitchFamily="34" charset="-120"/>
               </a:rPr>
-              <a:t>hard-asserted status code · no LLM in the loop</a:t>
+              <a:t>fan running · alarm armed · patient breathing</a:t>
             </a:r>
             <a:endParaRPr lang="en-US" sz="900" dirty="0"/>
           </a:p>
@@ -6218,24 +6332,141 @@
         </p:nvSpPr>
         <p:spPr>
           <a:xfrm>
-            <a:off x="457200" y="6217920"/>
-            <a:ext cx="11247120" cy="274320"/>
-          </a:xfrm>
-          <a:prstGeom prst="rect">
-            <a:avLst/>
-          </a:prstGeom>
-          <a:noFill/>
-          <a:ln/>
-        </p:spPr>
-        <p:txBody>
-          <a:bodyPr wrap="square" lIns="0" tIns="0" rIns="0" bIns="0" rtlCol="0" anchor="ctr"/>
-          <a:lstStyle/>
-          <a:p>
-            <a:pPr algn="l" indent="0" marL="0">
-              <a:buNone/>
-            </a:pPr>
-            <a:r>
-              <a:rPr lang="en-US" sz="1800" i="1" dirty="0">
+            <a:off x="8869680" y="5138928"/>
+            <a:ext cx="822960" cy="274320"/>
+          </a:xfrm>
+          <a:prstGeom prst="rect">
+            <a:avLst/>
+          </a:prstGeom>
+          <a:noFill/>
+          <a:ln/>
+        </p:spPr>
+        <p:txBody>
+          <a:bodyPr wrap="square" lIns="0" tIns="0" rIns="0" bIns="0" rtlCol="0" anchor="ctr"/>
+          <a:lstStyle/>
+          <a:p>
+            <a:pPr indent="0" marL="0">
+              <a:buNone/>
+            </a:pPr>
+            <a:r>
+              <a:rPr lang="en-US" sz="900" spc="200" kern="0" dirty="0">
+                <a:solidFill>
+                  <a:srgbClr val="777779"/>
+                </a:solidFill>
+                <a:latin typeface="Consolas" pitchFamily="34" charset="0"/>
+                <a:ea typeface="Consolas" pitchFamily="34" charset="-122"/>
+                <a:cs typeface="Consolas" pitchFamily="34" charset="-120"/>
+              </a:rPr>
+              <a:t>Judged by</a:t>
+            </a:r>
+            <a:endParaRPr lang="en-US" sz="900" dirty="0"/>
+          </a:p>
+        </p:txBody>
+      </p:sp>
+      <p:sp>
+        <p:nvSpPr>
+          <p:cNvPr id="20" name="Text 18"/>
+          <p:cNvSpPr txBox="1"/>
+          <p:nvPr/>
+        </p:nvSpPr>
+        <p:spPr>
+          <a:xfrm>
+            <a:off x="9601200" y="5138928"/>
+            <a:ext cx="2011680" cy="274320"/>
+          </a:xfrm>
+          <a:prstGeom prst="rect">
+            <a:avLst/>
+          </a:prstGeom>
+          <a:noFill/>
+          <a:ln/>
+        </p:spPr>
+        <p:txBody>
+          <a:bodyPr wrap="square" lIns="0" tIns="0" rIns="0" bIns="0" rtlCol="0" anchor="ctr"/>
+          <a:lstStyle/>
+          <a:p>
+            <a:pPr indent="0" marL="0">
+              <a:buNone/>
+            </a:pPr>
+            <a:r>
+              <a:rPr lang="en-US" sz="900" dirty="0">
+                <a:solidFill>
+                  <a:srgbClr val="BABABB"/>
+                </a:solidFill>
+                <a:latin typeface="Consolas" pitchFamily="34" charset="0"/>
+                <a:ea typeface="Consolas" pitchFamily="34" charset="-122"/>
+                <a:cs typeface="Consolas" pitchFamily="34" charset="-120"/>
+              </a:rPr>
+              <a:t>hard-asserted status code</a:t>
+            </a:r>
+            <a:endParaRPr lang="en-US" sz="900" dirty="0"/>
+          </a:p>
+        </p:txBody>
+      </p:sp>
+      <p:sp>
+        <p:nvSpPr>
+          <p:cNvPr id="21" name="Text 19"/>
+          <p:cNvSpPr txBox="1"/>
+          <p:nvPr/>
+        </p:nvSpPr>
+        <p:spPr>
+          <a:xfrm>
+            <a:off x="9601200" y="5449824"/>
+            <a:ext cx="2011680" cy="274320"/>
+          </a:xfrm>
+          <a:prstGeom prst="rect">
+            <a:avLst/>
+          </a:prstGeom>
+          <a:noFill/>
+          <a:ln/>
+        </p:spPr>
+        <p:txBody>
+          <a:bodyPr wrap="square" lIns="0" tIns="0" rIns="0" bIns="0" rtlCol="0" anchor="ctr"/>
+          <a:lstStyle/>
+          <a:p>
+            <a:pPr indent="0" marL="0">
+              <a:buNone/>
+            </a:pPr>
+            <a:r>
+              <a:rPr lang="en-US" sz="900" dirty="0">
+                <a:solidFill>
+                  <a:srgbClr val="777779"/>
+                </a:solidFill>
+                <a:latin typeface="Consolas" pitchFamily="34" charset="0"/>
+                <a:ea typeface="Consolas" pitchFamily="34" charset="-122"/>
+                <a:cs typeface="Consolas" pitchFamily="34" charset="-120"/>
+              </a:rPr>
+              <a:t>no LLM in the loop</a:t>
+            </a:r>
+            <a:endParaRPr lang="en-US" sz="900" dirty="0"/>
+          </a:p>
+        </p:txBody>
+      </p:sp>
+      <p:sp>
+        <p:nvSpPr>
+          <p:cNvPr id="22" name="Text 20"/>
+          <p:cNvSpPr txBox="1"/>
+          <p:nvPr/>
+        </p:nvSpPr>
+        <p:spPr>
+          <a:xfrm>
+            <a:off x="457200" y="6035040"/>
+            <a:ext cx="11274552" cy="274320"/>
+          </a:xfrm>
+          <a:prstGeom prst="rect">
+            <a:avLst/>
+          </a:prstGeom>
+          <a:noFill/>
+          <a:ln/>
+        </p:spPr>
+        <p:txBody>
+          <a:bodyPr wrap="square" lIns="0" tIns="0" rIns="0" bIns="0" rtlCol="0" anchor="ctr"/>
+          <a:lstStyle/>
+          <a:p>
+            <a:pPr indent="0" marL="0">
+              <a:buNone/>
+            </a:pPr>
+            <a:r>
+              <a:rPr lang="en-US" sz="1600" i="1" dirty="0">
                 <a:solidFill>
                   <a:srgbClr val="BABABB"/>
                 </a:solidFill>
@@ -6245,11 +6476,11 @@
               </a:rPr>
               <a:t>Pass or fail. </a:t>
             </a:r>
-            <a:pPr algn="l" indent="0" marL="0">
-              <a:buNone/>
-            </a:pPr>
-            <a:r>
-              <a:rPr lang="en-US" sz="1800" b="1" i="1" dirty="0">
+            <a:pPr indent="0" marL="0">
+              <a:buNone/>
+            </a:pPr>
+            <a:r>
+              <a:rPr lang="en-US" sz="1600" b="1" i="1" dirty="0">
                 <a:solidFill>
                   <a:srgbClr val="22E07A"/>
                 </a:solidFill>
@@ -6259,7 +6490,7 @@
               </a:rPr>
               <a:t>No middle ground.</a:t>
             </a:r>
-            <a:endParaRPr lang="en-US" sz="1800" dirty="0"/>
+            <a:endParaRPr lang="en-US" sz="1600" dirty="0"/>
           </a:p>
         </p:txBody>
       </p:sp>
@@ -6297,7 +6528,7 @@
         <p:spPr>
           <a:xfrm>
             <a:off x="457200" y="365760"/>
-            <a:ext cx="11247120" cy="274320"/>
+            <a:ext cx="11274552" cy="274320"/>
           </a:xfrm>
           <a:prstGeom prst="rect">
             <a:avLst/>
@@ -6350,23 +6581,23 @@
         <p:spPr>
           <a:xfrm>
             <a:off x="457200" y="777240"/>
-            <a:ext cx="11247120" cy="1645920"/>
-          </a:xfrm>
-          <a:prstGeom prst="rect">
-            <a:avLst/>
-          </a:prstGeom>
-          <a:noFill/>
-          <a:ln/>
-        </p:spPr>
-        <p:txBody>
-          <a:bodyPr wrap="square" lIns="0" tIns="0" rIns="0" bIns="0" rtlCol="0" anchor="ctr"/>
-          <a:lstStyle/>
-          <a:p>
-            <a:pPr indent="0" marL="0">
-              <a:buNone/>
-            </a:pPr>
-            <a:r>
-              <a:rPr lang="en-US" sz="4200" b="1" spc="-100" kern="0" dirty="0">
+            <a:ext cx="11274552" cy="1645920"/>
+          </a:xfrm>
+          <a:prstGeom prst="rect">
+            <a:avLst/>
+          </a:prstGeom>
+          <a:noFill/>
+          <a:ln/>
+        </p:spPr>
+        <p:txBody>
+          <a:bodyPr wrap="square" lIns="0" tIns="0" rIns="0" bIns="0" rtlCol="0" anchor="ctr"/>
+          <a:lstStyle/>
+          <a:p>
+            <a:pPr indent="0" marL="0">
+              <a:buNone/>
+            </a:pPr>
+            <a:r>
+              <a:rPr lang="en-US" sz="3800" b="1" spc="-100" kern="0" dirty="0">
                 <a:solidFill>
                   <a:srgbClr val="FAFAFA"/>
                 </a:solidFill>
@@ -6381,7 +6612,7 @@
               <a:buNone/>
             </a:pPr>
             <a:r>
-              <a:rPr lang="en-US" sz="4200" b="1" i="1" spc="-100" kern="0" dirty="0">
+              <a:rPr lang="en-US" sz="3800" b="1" i="1" spc="-100" kern="0" dirty="0">
                 <a:solidFill>
                   <a:srgbClr val="FF2D4A"/>
                 </a:solidFill>
@@ -6391,7 +6622,7 @@
               </a:rPr>
               <a:t>already asks for.</a:t>
             </a:r>
-            <a:endParaRPr lang="en-US" sz="4200" dirty="0"/>
+            <a:endParaRPr lang="en-US" sz="3800" dirty="0"/>
           </a:p>
         </p:txBody>
       </p:sp>
@@ -6403,8 +6634,8 @@
         </p:nvSpPr>
         <p:spPr>
           <a:xfrm>
-            <a:off x="2286000" y="2743200"/>
-            <a:ext cx="7589520" cy="3566160"/>
+            <a:off x="2103120" y="2697480"/>
+            <a:ext cx="7982712" cy="3429000"/>
           </a:xfrm>
           <a:prstGeom prst="rect">
             <a:avLst/>
@@ -6428,8 +6659,8 @@
         </p:nvSpPr>
         <p:spPr>
           <a:xfrm>
-            <a:off x="2651760" y="2971800"/>
-            <a:ext cx="6858000" cy="274320"/>
+            <a:off x="2468880" y="2926080"/>
+            <a:ext cx="7251192" cy="274320"/>
           </a:xfrm>
           <a:prstGeom prst="rect">
             <a:avLst/>
@@ -6467,24 +6698,24 @@
         </p:nvSpPr>
         <p:spPr>
           <a:xfrm>
-            <a:off x="2651760" y="3291840"/>
-            <a:ext cx="6858000" cy="457200"/>
-          </a:xfrm>
-          <a:prstGeom prst="rect">
-            <a:avLst/>
-          </a:prstGeom>
-          <a:noFill/>
-          <a:ln/>
-        </p:spPr>
-        <p:txBody>
-          <a:bodyPr wrap="square" lIns="0" tIns="0" rIns="0" bIns="0" rtlCol="0" anchor="ctr"/>
-          <a:lstStyle/>
-          <a:p>
-            <a:pPr indent="0" marL="0">
-              <a:buNone/>
-            </a:pPr>
-            <a:r>
-              <a:rPr lang="en-US" sz="2400" b="1" dirty="0">
+            <a:off x="2468880" y="3246120"/>
+            <a:ext cx="7251192" cy="457200"/>
+          </a:xfrm>
+          <a:prstGeom prst="rect">
+            <a:avLst/>
+          </a:prstGeom>
+          <a:noFill/>
+          <a:ln/>
+        </p:spPr>
+        <p:txBody>
+          <a:bodyPr wrap="square" lIns="0" tIns="0" rIns="0" bIns="0" rtlCol="0" anchor="ctr"/>
+          <a:lstStyle/>
+          <a:p>
+            <a:pPr indent="0" marL="0">
+              <a:buNone/>
+            </a:pPr>
+            <a:r>
+              <a:rPr lang="en-US" sz="2200" b="1" dirty="0">
                 <a:solidFill>
                   <a:srgbClr val="FAFAFA"/>
                 </a:solidFill>
@@ -6498,7 +6729,7 @@
               <a:buNone/>
             </a:pPr>
             <a:r>
-              <a:rPr lang="en-US" sz="2400" b="1" i="1" dirty="0">
+              <a:rPr lang="en-US" sz="2200" b="1" i="1" dirty="0">
                 <a:solidFill>
                   <a:srgbClr val="FF2D4A"/>
                 </a:solidFill>
@@ -6508,7 +6739,7 @@
               </a:rPr>
               <a:t>#0001</a:t>
             </a:r>
-            <a:endParaRPr lang="en-US" sz="2400" dirty="0"/>
+            <a:endParaRPr lang="en-US" sz="2200" dirty="0"/>
           </a:p>
         </p:txBody>
       </p:sp>
@@ -6520,24 +6751,24 @@
         </p:nvSpPr>
         <p:spPr>
           <a:xfrm>
-            <a:off x="2651760" y="3977640"/>
-            <a:ext cx="1828800" cy="274320"/>
-          </a:xfrm>
-          <a:prstGeom prst="rect">
-            <a:avLst/>
-          </a:prstGeom>
-          <a:noFill/>
-          <a:ln/>
-        </p:spPr>
-        <p:txBody>
-          <a:bodyPr wrap="square" lIns="0" tIns="0" rIns="0" bIns="0" rtlCol="0" anchor="ctr"/>
-          <a:lstStyle/>
-          <a:p>
-            <a:pPr indent="0" marL="0">
-              <a:buNone/>
-            </a:pPr>
-            <a:r>
-              <a:rPr lang="en-US" sz="1200" dirty="0">
+            <a:off x="2468880" y="3886200"/>
+            <a:ext cx="1645920" cy="274320"/>
+          </a:xfrm>
+          <a:prstGeom prst="rect">
+            <a:avLst/>
+          </a:prstGeom>
+          <a:noFill/>
+          <a:ln/>
+        </p:spPr>
+        <p:txBody>
+          <a:bodyPr wrap="square" lIns="0" tIns="0" rIns="0" bIns="0" rtlCol="0" anchor="ctr"/>
+          <a:lstStyle/>
+          <a:p>
+            <a:pPr indent="0" marL="0">
+              <a:buNone/>
+            </a:pPr>
+            <a:r>
+              <a:rPr lang="en-US" sz="1100" dirty="0">
                 <a:solidFill>
                   <a:srgbClr val="777779"/>
                 </a:solidFill>
@@ -6547,7 +6778,7 @@
               </a:rPr>
               <a:t>Finding</a:t>
             </a:r>
-            <a:endParaRPr lang="en-US" sz="1200" dirty="0"/>
+            <a:endParaRPr lang="en-US" sz="1100" dirty="0"/>
           </a:p>
         </p:txBody>
       </p:sp>
@@ -6559,24 +6790,24 @@
         </p:nvSpPr>
         <p:spPr>
           <a:xfrm>
-            <a:off x="4572000" y="3977640"/>
-            <a:ext cx="4937760" cy="274320"/>
-          </a:xfrm>
-          <a:prstGeom prst="rect">
-            <a:avLst/>
-          </a:prstGeom>
-          <a:noFill/>
-          <a:ln/>
-        </p:spPr>
-        <p:txBody>
-          <a:bodyPr wrap="square" lIns="0" tIns="0" rIns="0" bIns="0" rtlCol="0" anchor="ctr"/>
-          <a:lstStyle/>
-          <a:p>
-            <a:pPr indent="0" marL="0">
-              <a:buNone/>
-            </a:pPr>
-            <a:r>
-              <a:rPr lang="en-US" sz="1200" dirty="0">
+            <a:off x="4206240" y="3886200"/>
+            <a:ext cx="5513832" cy="274320"/>
+          </a:xfrm>
+          <a:prstGeom prst="rect">
+            <a:avLst/>
+          </a:prstGeom>
+          <a:noFill/>
+          <a:ln/>
+        </p:spPr>
+        <p:txBody>
+          <a:bodyPr wrap="square" lIns="0" tIns="0" rIns="0" bIns="0" rtlCol="0" anchor="ctr"/>
+          <a:lstStyle/>
+          <a:p>
+            <a:pPr indent="0" marL="0">
+              <a:buNone/>
+            </a:pPr>
+            <a:r>
+              <a:rPr lang="en-US" sz="1100" dirty="0">
                 <a:solidFill>
                   <a:srgbClr val="FAFAFA"/>
                 </a:solidFill>
@@ -6586,7 +6817,7 @@
               </a:rPr>
               <a:t>CWE-306 · CVE-2019-6538</a:t>
             </a:r>
-            <a:endParaRPr lang="en-US" sz="1200" dirty="0"/>
+            <a:endParaRPr lang="en-US" sz="1100" dirty="0"/>
           </a:p>
         </p:txBody>
       </p:sp>
@@ -6598,24 +6829,24 @@
         </p:nvSpPr>
         <p:spPr>
           <a:xfrm>
-            <a:off x="2651760" y="4251960"/>
-            <a:ext cx="1828800" cy="274320"/>
-          </a:xfrm>
-          <a:prstGeom prst="rect">
-            <a:avLst/>
-          </a:prstGeom>
-          <a:noFill/>
-          <a:ln/>
-        </p:spPr>
-        <p:txBody>
-          <a:bodyPr wrap="square" lIns="0" tIns="0" rIns="0" bIns="0" rtlCol="0" anchor="ctr"/>
-          <a:lstStyle/>
-          <a:p>
-            <a:pPr indent="0" marL="0">
-              <a:buNone/>
-            </a:pPr>
-            <a:r>
-              <a:rPr lang="en-US" sz="1200" dirty="0">
+            <a:off x="2468880" y="4160520"/>
+            <a:ext cx="1645920" cy="274320"/>
+          </a:xfrm>
+          <a:prstGeom prst="rect">
+            <a:avLst/>
+          </a:prstGeom>
+          <a:noFill/>
+          <a:ln/>
+        </p:spPr>
+        <p:txBody>
+          <a:bodyPr wrap="square" lIns="0" tIns="0" rIns="0" bIns="0" rtlCol="0" anchor="ctr"/>
+          <a:lstStyle/>
+          <a:p>
+            <a:pPr indent="0" marL="0">
+              <a:buNone/>
+            </a:pPr>
+            <a:r>
+              <a:rPr lang="en-US" sz="1100" dirty="0">
                 <a:solidFill>
                   <a:srgbClr val="777779"/>
                 </a:solidFill>
@@ -6625,7 +6856,7 @@
               </a:rPr>
               <a:t>Scanner</a:t>
             </a:r>
-            <a:endParaRPr lang="en-US" sz="1200" dirty="0"/>
+            <a:endParaRPr lang="en-US" sz="1100" dirty="0"/>
           </a:p>
         </p:txBody>
       </p:sp>
@@ -6637,24 +6868,24 @@
         </p:nvSpPr>
         <p:spPr>
           <a:xfrm>
-            <a:off x="4572000" y="4251960"/>
-            <a:ext cx="4937760" cy="274320"/>
-          </a:xfrm>
-          <a:prstGeom prst="rect">
-            <a:avLst/>
-          </a:prstGeom>
-          <a:noFill/>
-          <a:ln/>
-        </p:spPr>
-        <p:txBody>
-          <a:bodyPr wrap="square" lIns="0" tIns="0" rIns="0" bIns="0" rtlCol="0" anchor="ctr"/>
-          <a:lstStyle/>
-          <a:p>
-            <a:pPr indent="0" marL="0">
-              <a:buNone/>
-            </a:pPr>
-            <a:r>
-              <a:rPr lang="en-US" sz="1200" dirty="0">
+            <a:off x="4206240" y="4160520"/>
+            <a:ext cx="5513832" cy="274320"/>
+          </a:xfrm>
+          <a:prstGeom prst="rect">
+            <a:avLst/>
+          </a:prstGeom>
+          <a:noFill/>
+          <a:ln/>
+        </p:spPr>
+        <p:txBody>
+          <a:bodyPr wrap="square" lIns="0" tIns="0" rIns="0" bIns="0" rtlCol="0" anchor="ctr"/>
+          <a:lstStyle/>
+          <a:p>
+            <a:pPr indent="0" marL="0">
+              <a:buNone/>
+            </a:pPr>
+            <a:r>
+              <a:rPr lang="en-US" sz="1100" dirty="0">
                 <a:solidFill>
                   <a:srgbClr val="FAFAFA"/>
                 </a:solidFill>
@@ -6664,7 +6895,7 @@
               </a:rPr>
               <a:t>SemGrep 1.182.1 · Bandit 1.9.4</a:t>
             </a:r>
-            <a:endParaRPr lang="en-US" sz="1200" dirty="0"/>
+            <a:endParaRPr lang="en-US" sz="1100" dirty="0"/>
           </a:p>
         </p:txBody>
       </p:sp>
@@ -6676,24 +6907,24 @@
         </p:nvSpPr>
         <p:spPr>
           <a:xfrm>
-            <a:off x="2651760" y="4526280"/>
-            <a:ext cx="1828800" cy="274320"/>
-          </a:xfrm>
-          <a:prstGeom prst="rect">
-            <a:avLst/>
-          </a:prstGeom>
-          <a:noFill/>
-          <a:ln/>
-        </p:spPr>
-        <p:txBody>
-          <a:bodyPr wrap="square" lIns="0" tIns="0" rIns="0" bIns="0" rtlCol="0" anchor="ctr"/>
-          <a:lstStyle/>
-          <a:p>
-            <a:pPr indent="0" marL="0">
-              <a:buNone/>
-            </a:pPr>
-            <a:r>
-              <a:rPr lang="en-US" sz="1200" dirty="0">
+            <a:off x="2468880" y="4434840"/>
+            <a:ext cx="1645920" cy="274320"/>
+          </a:xfrm>
+          <a:prstGeom prst="rect">
+            <a:avLst/>
+          </a:prstGeom>
+          <a:noFill/>
+          <a:ln/>
+        </p:spPr>
+        <p:txBody>
+          <a:bodyPr wrap="square" lIns="0" tIns="0" rIns="0" bIns="0" rtlCol="0" anchor="ctr"/>
+          <a:lstStyle/>
+          <a:p>
+            <a:pPr indent="0" marL="0">
+              <a:buNone/>
+            </a:pPr>
+            <a:r>
+              <a:rPr lang="en-US" sz="1100" dirty="0">
                 <a:solidFill>
                   <a:srgbClr val="777779"/>
                 </a:solidFill>
@@ -6703,7 +6934,7 @@
               </a:rPr>
               <a:t>Patch author</a:t>
             </a:r>
-            <a:endParaRPr lang="en-US" sz="1200" dirty="0"/>
+            <a:endParaRPr lang="en-US" sz="1100" dirty="0"/>
           </a:p>
         </p:txBody>
       </p:sp>
@@ -6715,24 +6946,24 @@
         </p:nvSpPr>
         <p:spPr>
           <a:xfrm>
-            <a:off x="4572000" y="4526280"/>
-            <a:ext cx="4937760" cy="274320"/>
-          </a:xfrm>
-          <a:prstGeom prst="rect">
-            <a:avLst/>
-          </a:prstGeom>
-          <a:noFill/>
-          <a:ln/>
-        </p:spPr>
-        <p:txBody>
-          <a:bodyPr wrap="square" lIns="0" tIns="0" rIns="0" bIns="0" rtlCol="0" anchor="ctr"/>
-          <a:lstStyle/>
-          <a:p>
-            <a:pPr indent="0" marL="0">
-              <a:buNone/>
-            </a:pPr>
-            <a:r>
-              <a:rPr lang="en-US" sz="1200" dirty="0">
+            <a:off x="4206240" y="4434840"/>
+            <a:ext cx="5513832" cy="274320"/>
+          </a:xfrm>
+          <a:prstGeom prst="rect">
+            <a:avLst/>
+          </a:prstGeom>
+          <a:noFill/>
+          <a:ln/>
+        </p:spPr>
+        <p:txBody>
+          <a:bodyPr wrap="square" lIns="0" tIns="0" rIns="0" bIns="0" rtlCol="0" anchor="ctr"/>
+          <a:lstStyle/>
+          <a:p>
+            <a:pPr indent="0" marL="0">
+              <a:buNone/>
+            </a:pPr>
+            <a:r>
+              <a:rPr lang="en-US" sz="1100" dirty="0">
                 <a:solidFill>
                   <a:srgbClr val="FAFAFA"/>
                 </a:solidFill>
@@ -6742,7 +6973,7 @@
               </a:rPr>
               <a:t>Factory Droid · scoped CLI</a:t>
             </a:r>
-            <a:endParaRPr lang="en-US" sz="1200" dirty="0"/>
+            <a:endParaRPr lang="en-US" sz="1100" dirty="0"/>
           </a:p>
         </p:txBody>
       </p:sp>
@@ -6754,24 +6985,24 @@
         </p:nvSpPr>
         <p:spPr>
           <a:xfrm>
-            <a:off x="2651760" y="4800600"/>
-            <a:ext cx="1828800" cy="274320"/>
-          </a:xfrm>
-          <a:prstGeom prst="rect">
-            <a:avLst/>
-          </a:prstGeom>
-          <a:noFill/>
-          <a:ln/>
-        </p:spPr>
-        <p:txBody>
-          <a:bodyPr wrap="square" lIns="0" tIns="0" rIns="0" bIns="0" rtlCol="0" anchor="ctr"/>
-          <a:lstStyle/>
-          <a:p>
-            <a:pPr indent="0" marL="0">
-              <a:buNone/>
-            </a:pPr>
-            <a:r>
-              <a:rPr lang="en-US" sz="1200" dirty="0">
+            <a:off x="2468880" y="4709160"/>
+            <a:ext cx="1645920" cy="274320"/>
+          </a:xfrm>
+          <a:prstGeom prst="rect">
+            <a:avLst/>
+          </a:prstGeom>
+          <a:noFill/>
+          <a:ln/>
+        </p:spPr>
+        <p:txBody>
+          <a:bodyPr wrap="square" lIns="0" tIns="0" rIns="0" bIns="0" rtlCol="0" anchor="ctr"/>
+          <a:lstStyle/>
+          <a:p>
+            <a:pPr indent="0" marL="0">
+              <a:buNone/>
+            </a:pPr>
+            <a:r>
+              <a:rPr lang="en-US" sz="1100" dirty="0">
                 <a:solidFill>
                   <a:srgbClr val="777779"/>
                 </a:solidFill>
@@ -6781,7 +7012,7 @@
               </a:rPr>
               <a:t>Approved by</a:t>
             </a:r>
-            <a:endParaRPr lang="en-US" sz="1200" dirty="0"/>
+            <a:endParaRPr lang="en-US" sz="1100" dirty="0"/>
           </a:p>
         </p:txBody>
       </p:sp>
@@ -6793,24 +7024,24 @@
         </p:nvSpPr>
         <p:spPr>
           <a:xfrm>
-            <a:off x="4572000" y="4800600"/>
-            <a:ext cx="4937760" cy="274320"/>
-          </a:xfrm>
-          <a:prstGeom prst="rect">
-            <a:avLst/>
-          </a:prstGeom>
-          <a:noFill/>
-          <a:ln/>
-        </p:spPr>
-        <p:txBody>
-          <a:bodyPr wrap="square" lIns="0" tIns="0" rIns="0" bIns="0" rtlCol="0" anchor="ctr"/>
-          <a:lstStyle/>
-          <a:p>
-            <a:pPr indent="0" marL="0">
-              <a:buNone/>
-            </a:pPr>
-            <a:r>
-              <a:rPr lang="en-US" sz="1200" dirty="0">
+            <a:off x="4206240" y="4709160"/>
+            <a:ext cx="5513832" cy="274320"/>
+          </a:xfrm>
+          <a:prstGeom prst="rect">
+            <a:avLst/>
+          </a:prstGeom>
+          <a:noFill/>
+          <a:ln/>
+        </p:spPr>
+        <p:txBody>
+          <a:bodyPr wrap="square" lIns="0" tIns="0" rIns="0" bIns="0" rtlCol="0" anchor="ctr"/>
+          <a:lstStyle/>
+          <a:p>
+            <a:pPr indent="0" marL="0">
+              <a:buNone/>
+            </a:pPr>
+            <a:r>
+              <a:rPr lang="en-US" sz="1100" dirty="0">
                 <a:solidFill>
                   <a:srgbClr val="FAFAFA"/>
                 </a:solidFill>
@@ -6820,7 +7051,7 @@
               </a:rPr>
               <a:t>human@ops · identity-signed</a:t>
             </a:r>
-            <a:endParaRPr lang="en-US" sz="1200" dirty="0"/>
+            <a:endParaRPr lang="en-US" sz="1100" dirty="0"/>
           </a:p>
         </p:txBody>
       </p:sp>
@@ -6832,24 +7063,24 @@
         </p:nvSpPr>
         <p:spPr>
           <a:xfrm>
-            <a:off x="2651760" y="5074920"/>
-            <a:ext cx="1828800" cy="274320"/>
-          </a:xfrm>
-          <a:prstGeom prst="rect">
-            <a:avLst/>
-          </a:prstGeom>
-          <a:noFill/>
-          <a:ln/>
-        </p:spPr>
-        <p:txBody>
-          <a:bodyPr wrap="square" lIns="0" tIns="0" rIns="0" bIns="0" rtlCol="0" anchor="ctr"/>
-          <a:lstStyle/>
-          <a:p>
-            <a:pPr indent="0" marL="0">
-              <a:buNone/>
-            </a:pPr>
-            <a:r>
-              <a:rPr lang="en-US" sz="1200" dirty="0">
+            <a:off x="2468880" y="4983480"/>
+            <a:ext cx="1645920" cy="274320"/>
+          </a:xfrm>
+          <a:prstGeom prst="rect">
+            <a:avLst/>
+          </a:prstGeom>
+          <a:noFill/>
+          <a:ln/>
+        </p:spPr>
+        <p:txBody>
+          <a:bodyPr wrap="square" lIns="0" tIns="0" rIns="0" bIns="0" rtlCol="0" anchor="ctr"/>
+          <a:lstStyle/>
+          <a:p>
+            <a:pPr indent="0" marL="0">
+              <a:buNone/>
+            </a:pPr>
+            <a:r>
+              <a:rPr lang="en-US" sz="1100" dirty="0">
                 <a:solidFill>
                   <a:srgbClr val="777779"/>
                 </a:solidFill>
@@ -6859,7 +7090,7 @@
               </a:rPr>
               <a:t>Verify</a:t>
             </a:r>
-            <a:endParaRPr lang="en-US" sz="1200" dirty="0"/>
+            <a:endParaRPr lang="en-US" sz="1100" dirty="0"/>
           </a:p>
         </p:txBody>
       </p:sp>
@@ -6871,24 +7102,24 @@
         </p:nvSpPr>
         <p:spPr>
           <a:xfrm>
-            <a:off x="4572000" y="5074920"/>
-            <a:ext cx="4937760" cy="274320"/>
-          </a:xfrm>
-          <a:prstGeom prst="rect">
-            <a:avLst/>
-          </a:prstGeom>
-          <a:noFill/>
-          <a:ln/>
-        </p:spPr>
-        <p:txBody>
-          <a:bodyPr wrap="square" lIns="0" tIns="0" rIns="0" bIns="0" rtlCol="0" anchor="ctr"/>
-          <a:lstStyle/>
-          <a:p>
-            <a:pPr indent="0" marL="0">
-              <a:buNone/>
-            </a:pPr>
-            <a:r>
-              <a:rPr lang="en-US" sz="1200" dirty="0">
+            <a:off x="4206240" y="4983480"/>
+            <a:ext cx="5513832" cy="274320"/>
+          </a:xfrm>
+          <a:prstGeom prst="rect">
+            <a:avLst/>
+          </a:prstGeom>
+          <a:noFill/>
+          <a:ln/>
+        </p:spPr>
+        <p:txBody>
+          <a:bodyPr wrap="square" lIns="0" tIns="0" rIns="0" bIns="0" rtlCol="0" anchor="ctr"/>
+          <a:lstStyle/>
+          <a:p>
+            <a:pPr indent="0" marL="0">
+              <a:buNone/>
+            </a:pPr>
+            <a:r>
+              <a:rPr lang="en-US" sz="1100" dirty="0">
                 <a:solidFill>
                   <a:srgbClr val="FAFAFA"/>
                 </a:solidFill>
@@ -6898,7 +7129,7 @@
               </a:rPr>
               <a:t>same exploit → 401 after fix</a:t>
             </a:r>
-            <a:endParaRPr lang="en-US" sz="1200" dirty="0"/>
+            <a:endParaRPr lang="en-US" sz="1100" dirty="0"/>
           </a:p>
         </p:txBody>
       </p:sp>
@@ -6910,24 +7141,24 @@
         </p:nvSpPr>
         <p:spPr>
           <a:xfrm>
-            <a:off x="2651760" y="5349240"/>
-            <a:ext cx="1828800" cy="274320"/>
-          </a:xfrm>
-          <a:prstGeom prst="rect">
-            <a:avLst/>
-          </a:prstGeom>
-          <a:noFill/>
-          <a:ln/>
-        </p:spPr>
-        <p:txBody>
-          <a:bodyPr wrap="square" lIns="0" tIns="0" rIns="0" bIns="0" rtlCol="0" anchor="ctr"/>
-          <a:lstStyle/>
-          <a:p>
-            <a:pPr indent="0" marL="0">
-              <a:buNone/>
-            </a:pPr>
-            <a:r>
-              <a:rPr lang="en-US" sz="1200" dirty="0">
+            <a:off x="2468880" y="5257800"/>
+            <a:ext cx="1645920" cy="274320"/>
+          </a:xfrm>
+          <a:prstGeom prst="rect">
+            <a:avLst/>
+          </a:prstGeom>
+          <a:noFill/>
+          <a:ln/>
+        </p:spPr>
+        <p:txBody>
+          <a:bodyPr wrap="square" lIns="0" tIns="0" rIns="0" bIns="0" rtlCol="0" anchor="ctr"/>
+          <a:lstStyle/>
+          <a:p>
+            <a:pPr indent="0" marL="0">
+              <a:buNone/>
+            </a:pPr>
+            <a:r>
+              <a:rPr lang="en-US" sz="1100" dirty="0">
                 <a:solidFill>
                   <a:srgbClr val="777779"/>
                 </a:solidFill>
@@ -6937,7 +7168,7 @@
               </a:rPr>
               <a:t>SBOM</a:t>
             </a:r>
-            <a:endParaRPr lang="en-US" sz="1200" dirty="0"/>
+            <a:endParaRPr lang="en-US" sz="1100" dirty="0"/>
           </a:p>
         </p:txBody>
       </p:sp>
@@ -6949,24 +7180,24 @@
         </p:nvSpPr>
         <p:spPr>
           <a:xfrm>
-            <a:off x="4572000" y="5349240"/>
-            <a:ext cx="4937760" cy="274320"/>
-          </a:xfrm>
-          <a:prstGeom prst="rect">
-            <a:avLst/>
-          </a:prstGeom>
-          <a:noFill/>
-          <a:ln/>
-        </p:spPr>
-        <p:txBody>
-          <a:bodyPr wrap="square" lIns="0" tIns="0" rIns="0" bIns="0" rtlCol="0" anchor="ctr"/>
-          <a:lstStyle/>
-          <a:p>
-            <a:pPr indent="0" marL="0">
-              <a:buNone/>
-            </a:pPr>
-            <a:r>
-              <a:rPr lang="en-US" sz="1200" dirty="0">
+            <a:off x="4206240" y="5257800"/>
+            <a:ext cx="5513832" cy="274320"/>
+          </a:xfrm>
+          <a:prstGeom prst="rect">
+            <a:avLst/>
+          </a:prstGeom>
+          <a:noFill/>
+          <a:ln/>
+        </p:spPr>
+        <p:txBody>
+          <a:bodyPr wrap="square" lIns="0" tIns="0" rIns="0" bIns="0" rtlCol="0" anchor="ctr"/>
+          <a:lstStyle/>
+          <a:p>
+            <a:pPr indent="0" marL="0">
+              <a:buNone/>
+            </a:pPr>
+            <a:r>
+              <a:rPr lang="en-US" sz="1100" dirty="0">
                 <a:solidFill>
                   <a:srgbClr val="FAFAFA"/>
                 </a:solidFill>
@@ -6976,7 +7207,7 @@
               </a:rPr>
               <a:t>attached · 73 packages</a:t>
             </a:r>
-            <a:endParaRPr lang="en-US" sz="1200" dirty="0"/>
+            <a:endParaRPr lang="en-US" sz="1100" dirty="0"/>
           </a:p>
         </p:txBody>
       </p:sp>
@@ -6988,24 +7219,24 @@
         </p:nvSpPr>
         <p:spPr>
           <a:xfrm>
-            <a:off x="2651760" y="5623560"/>
-            <a:ext cx="1828800" cy="274320"/>
-          </a:xfrm>
-          <a:prstGeom prst="rect">
-            <a:avLst/>
-          </a:prstGeom>
-          <a:noFill/>
-          <a:ln/>
-        </p:spPr>
-        <p:txBody>
-          <a:bodyPr wrap="square" lIns="0" tIns="0" rIns="0" bIns="0" rtlCol="0" anchor="ctr"/>
-          <a:lstStyle/>
-          <a:p>
-            <a:pPr indent="0" marL="0">
-              <a:buNone/>
-            </a:pPr>
-            <a:r>
-              <a:rPr lang="en-US" sz="1200" dirty="0">
+            <a:off x="2468880" y="5532120"/>
+            <a:ext cx="1645920" cy="274320"/>
+          </a:xfrm>
+          <a:prstGeom prst="rect">
+            <a:avLst/>
+          </a:prstGeom>
+          <a:noFill/>
+          <a:ln/>
+        </p:spPr>
+        <p:txBody>
+          <a:bodyPr wrap="square" lIns="0" tIns="0" rIns="0" bIns="0" rtlCol="0" anchor="ctr"/>
+          <a:lstStyle/>
+          <a:p>
+            <a:pPr indent="0" marL="0">
+              <a:buNone/>
+            </a:pPr>
+            <a:r>
+              <a:rPr lang="en-US" sz="1100" dirty="0">
                 <a:solidFill>
                   <a:srgbClr val="777779"/>
                 </a:solidFill>
@@ -7015,7 +7246,7 @@
               </a:rPr>
               <a:t>Reproduce</a:t>
             </a:r>
-            <a:endParaRPr lang="en-US" sz="1200" dirty="0"/>
+            <a:endParaRPr lang="en-US" sz="1100" dirty="0"/>
           </a:p>
         </p:txBody>
       </p:sp>
@@ -7027,24 +7258,24 @@
         </p:nvSpPr>
         <p:spPr>
           <a:xfrm>
-            <a:off x="4572000" y="5623560"/>
-            <a:ext cx="4937760" cy="274320"/>
-          </a:xfrm>
-          <a:prstGeom prst="rect">
-            <a:avLst/>
-          </a:prstGeom>
-          <a:noFill/>
-          <a:ln/>
-        </p:spPr>
-        <p:txBody>
-          <a:bodyPr wrap="square" lIns="0" tIns="0" rIns="0" bIns="0" rtlCol="0" anchor="ctr"/>
-          <a:lstStyle/>
-          <a:p>
-            <a:pPr indent="0" marL="0">
-              <a:buNone/>
-            </a:pPr>
-            <a:r>
-              <a:rPr lang="en-US" sz="1200" dirty="0">
+            <a:off x="4206240" y="5532120"/>
+            <a:ext cx="5513832" cy="274320"/>
+          </a:xfrm>
+          <a:prstGeom prst="rect">
+            <a:avLst/>
+          </a:prstGeom>
+          <a:noFill/>
+          <a:ln/>
+        </p:spPr>
+        <p:txBody>
+          <a:bodyPr wrap="square" lIns="0" tIns="0" rIns="0" bIns="0" rtlCol="0" anchor="ctr"/>
+          <a:lstStyle/>
+          <a:p>
+            <a:pPr indent="0" marL="0">
+              <a:buNone/>
+            </a:pPr>
+            <a:r>
+              <a:rPr lang="en-US" sz="1100" dirty="0">
                 <a:solidFill>
                   <a:srgbClr val="FAFAFA"/>
                 </a:solidFill>
@@ -7054,7 +7285,7 @@
               </a:rPr>
               <a:t>git · diff + exploit payload sealed to this record</a:t>
             </a:r>
-            <a:endParaRPr lang="en-US" sz="1200" dirty="0"/>
+            <a:endParaRPr lang="en-US" sz="1100" dirty="0"/>
           </a:p>
         </p:txBody>
       </p:sp>
@@ -7066,8 +7297,8 @@
         </p:nvSpPr>
         <p:spPr>
           <a:xfrm>
-            <a:off x="457200" y="6309360"/>
-            <a:ext cx="11247120" cy="274320"/>
+            <a:off x="457200" y="6263640"/>
+            <a:ext cx="11274552" cy="274320"/>
           </a:xfrm>
           <a:prstGeom prst="rect">
             <a:avLst/>
@@ -7097,7 +7328,7 @@
               <a:buNone/>
             </a:pPr>
             <a:r>
-              <a:rPr lang="en-US" sz="1100" dirty="0">
+              <a:rPr lang="en-US" sz="1000" dirty="0">
                 <a:solidFill>
                   <a:srgbClr val="777779"/>
                 </a:solidFill>
@@ -7145,7 +7376,7 @@
         <p:spPr>
           <a:xfrm>
             <a:off x="457200" y="365760"/>
-            <a:ext cx="11247120" cy="274320"/>
+            <a:ext cx="11274552" cy="274320"/>
           </a:xfrm>
           <a:prstGeom prst="rect">
             <a:avLst/>
@@ -7198,23 +7429,23 @@
         <p:spPr>
           <a:xfrm>
             <a:off x="457200" y="777240"/>
-            <a:ext cx="11247120" cy="1645920"/>
-          </a:xfrm>
-          <a:prstGeom prst="rect">
-            <a:avLst/>
-          </a:prstGeom>
-          <a:noFill/>
-          <a:ln/>
-        </p:spPr>
-        <p:txBody>
-          <a:bodyPr wrap="square" lIns="0" tIns="0" rIns="0" bIns="0" rtlCol="0" anchor="ctr"/>
-          <a:lstStyle/>
-          <a:p>
-            <a:pPr indent="0" marL="0">
-              <a:buNone/>
-            </a:pPr>
-            <a:r>
-              <a:rPr lang="en-US" sz="4200" b="1" spc="-100" kern="0" dirty="0">
+            <a:ext cx="11274552" cy="1463040"/>
+          </a:xfrm>
+          <a:prstGeom prst="rect">
+            <a:avLst/>
+          </a:prstGeom>
+          <a:noFill/>
+          <a:ln/>
+        </p:spPr>
+        <p:txBody>
+          <a:bodyPr wrap="square" lIns="0" tIns="0" rIns="0" bIns="0" rtlCol="0" anchor="ctr"/>
+          <a:lstStyle/>
+          <a:p>
+            <a:pPr indent="0" marL="0">
+              <a:buNone/>
+            </a:pPr>
+            <a:r>
+              <a:rPr lang="en-US" sz="3600" b="1" spc="-100" kern="0" dirty="0">
                 <a:solidFill>
                   <a:srgbClr val="FAFAFA"/>
                 </a:solidFill>
@@ -7229,7 +7460,7 @@
               <a:buNone/>
             </a:pPr>
             <a:r>
-              <a:rPr lang="en-US" sz="4200" b="1" spc="-100" kern="0" dirty="0">
+              <a:rPr lang="en-US" sz="3600" b="1" spc="-100" kern="0" dirty="0">
                 <a:solidFill>
                   <a:srgbClr val="FAFAFA"/>
                 </a:solidFill>
@@ -7243,7 +7474,7 @@
               <a:buNone/>
             </a:pPr>
             <a:r>
-              <a:rPr lang="en-US" sz="4200" b="1" i="1" spc="-100" kern="0" dirty="0">
+              <a:rPr lang="en-US" sz="3600" b="1" i="1" spc="-100" kern="0" dirty="0">
                 <a:solidFill>
                   <a:srgbClr val="22E07A"/>
                 </a:solidFill>
@@ -7257,7 +7488,7 @@
               <a:buNone/>
             </a:pPr>
             <a:r>
-              <a:rPr lang="en-US" sz="4200" b="1" spc="-100" kern="0" dirty="0">
+              <a:rPr lang="en-US" sz="3600" b="1" spc="-100" kern="0" dirty="0">
                 <a:solidFill>
                   <a:srgbClr val="FAFAFA"/>
                 </a:solidFill>
@@ -7267,7 +7498,7 @@
               </a:rPr>
               <a:t> rolls across the ward.</a:t>
             </a:r>
-            <a:endParaRPr lang="en-US" sz="4200" dirty="0"/>
+            <a:endParaRPr lang="en-US" sz="3600" dirty="0"/>
           </a:p>
         </p:txBody>
       </p:sp>
@@ -7279,24 +7510,24 @@
         </p:nvSpPr>
         <p:spPr>
           <a:xfrm>
-            <a:off x="457200" y="2926080"/>
-            <a:ext cx="5486400" cy="914400"/>
-          </a:xfrm>
-          <a:prstGeom prst="rect">
-            <a:avLst/>
-          </a:prstGeom>
-          <a:noFill/>
-          <a:ln/>
-        </p:spPr>
-        <p:txBody>
-          <a:bodyPr wrap="square" lIns="0" tIns="0" rIns="0" bIns="0" rtlCol="0" anchor="ctr"/>
-          <a:lstStyle/>
-          <a:p>
-            <a:pPr indent="0" marL="0">
-              <a:buNone/>
-            </a:pPr>
-            <a:r>
-              <a:rPr lang="en-US" sz="5600" i="1" dirty="0">
+            <a:off x="457200" y="2697480"/>
+            <a:ext cx="5486400" cy="685800"/>
+          </a:xfrm>
+          <a:prstGeom prst="rect">
+            <a:avLst/>
+          </a:prstGeom>
+          <a:noFill/>
+          <a:ln/>
+        </p:spPr>
+        <p:txBody>
+          <a:bodyPr wrap="square" lIns="0" tIns="0" rIns="0" bIns="0" rtlCol="0" anchor="ctr"/>
+          <a:lstStyle/>
+          <a:p>
+            <a:pPr indent="0" marL="0">
+              <a:buNone/>
+            </a:pPr>
+            <a:r>
+              <a:rPr lang="en-US" sz="4200" i="1" dirty="0">
                 <a:solidFill>
                   <a:srgbClr val="BABABB"/>
                 </a:solidFill>
@@ -7306,7 +7537,7 @@
               </a:rPr>
               <a:t>1 of</a:t>
             </a:r>
-            <a:endParaRPr lang="en-US" sz="5600" dirty="0"/>
+            <a:endParaRPr lang="en-US" sz="4200" dirty="0"/>
           </a:p>
         </p:txBody>
       </p:sp>
@@ -7318,24 +7549,24 @@
         </p:nvSpPr>
         <p:spPr>
           <a:xfrm>
-            <a:off x="457200" y="3566160"/>
-            <a:ext cx="5486400" cy="2194560"/>
-          </a:xfrm>
-          <a:prstGeom prst="rect">
-            <a:avLst/>
-          </a:prstGeom>
-          <a:noFill/>
-          <a:ln/>
-        </p:spPr>
-        <p:txBody>
-          <a:bodyPr wrap="square" lIns="0" tIns="0" rIns="0" bIns="0" rtlCol="0" anchor="ctr"/>
-          <a:lstStyle/>
-          <a:p>
-            <a:pPr indent="0" marL="0">
-              <a:buNone/>
-            </a:pPr>
-            <a:r>
-              <a:rPr lang="en-US" sz="22000" b="1" spc="-800" kern="0" dirty="0">
+            <a:off x="457200" y="3291840"/>
+            <a:ext cx="5486400" cy="2103120"/>
+          </a:xfrm>
+          <a:prstGeom prst="rect">
+            <a:avLst/>
+          </a:prstGeom>
+          <a:noFill/>
+          <a:ln/>
+        </p:spPr>
+        <p:txBody>
+          <a:bodyPr wrap="square" lIns="0" tIns="0" rIns="0" bIns="0" rtlCol="0" anchor="t"/>
+          <a:lstStyle/>
+          <a:p>
+            <a:pPr indent="0" marL="0">
+              <a:buNone/>
+            </a:pPr>
+            <a:r>
+              <a:rPr lang="en-US" sz="14000" b="1" spc="-500" kern="0" dirty="0">
                 <a:solidFill>
                   <a:srgbClr val="FF2D4A"/>
                 </a:solidFill>
@@ -7345,7 +7576,7 @@
               </a:rPr>
               <a:t>3,412</a:t>
             </a:r>
-            <a:endParaRPr lang="en-US" sz="22000" dirty="0"/>
+            <a:endParaRPr lang="en-US" sz="14000" dirty="0"/>
           </a:p>
         </p:txBody>
       </p:sp>
@@ -7357,24 +7588,24 @@
         </p:nvSpPr>
         <p:spPr>
           <a:xfrm>
-            <a:off x="457200" y="5760720"/>
-            <a:ext cx="5486400" cy="365760"/>
-          </a:xfrm>
-          <a:prstGeom prst="rect">
-            <a:avLst/>
-          </a:prstGeom>
-          <a:noFill/>
-          <a:ln/>
-        </p:spPr>
-        <p:txBody>
-          <a:bodyPr wrap="square" lIns="0" tIns="0" rIns="0" bIns="0" rtlCol="0" anchor="ctr"/>
-          <a:lstStyle/>
-          <a:p>
-            <a:pPr indent="0" marL="0">
-              <a:buNone/>
-            </a:pPr>
-            <a:r>
-              <a:rPr lang="en-US" sz="1300" i="1" dirty="0">
+            <a:off x="457200" y="5440680"/>
+            <a:ext cx="5486400" cy="274320"/>
+          </a:xfrm>
+          <a:prstGeom prst="rect">
+            <a:avLst/>
+          </a:prstGeom>
+          <a:noFill/>
+          <a:ln/>
+        </p:spPr>
+        <p:txBody>
+          <a:bodyPr wrap="square" lIns="0" tIns="0" rIns="0" bIns="0" rtlCol="0" anchor="ctr"/>
+          <a:lstStyle/>
+          <a:p>
+            <a:pPr indent="0" marL="0">
+              <a:buNone/>
+            </a:pPr>
+            <a:r>
+              <a:rPr lang="en-US" sz="1400" i="1" dirty="0">
                 <a:solidFill>
                   <a:srgbClr val="BABABB"/>
                 </a:solidFill>
@@ -7382,31 +7613,50 @@
                 <a:ea typeface="Calibri" pitchFamily="34" charset="-122"/>
                 <a:cs typeface="Calibri" pitchFamily="34" charset="-120"/>
               </a:rPr>
-              <a:t>devices in a single hospital system  ·  every one a parallel find→fix→verify job</a:t>
-            </a:r>
-            <a:endParaRPr lang="en-US" sz="1300" dirty="0"/>
-          </a:p>
-        </p:txBody>
-      </p:sp>
-      <p:sp>
-        <p:nvSpPr>
-          <p:cNvPr id="7" name="Shape 5"/>
-          <p:cNvSpPr/>
-          <p:nvPr/>
-        </p:nvSpPr>
-        <p:spPr>
-          <a:xfrm>
-            <a:off x="6572250" y="2871216"/>
-            <a:ext cx="109728" cy="109728"/>
-          </a:xfrm>
-          <a:prstGeom prst="ellipse">
-            <a:avLst/>
-          </a:prstGeom>
-          <a:solidFill>
-            <a:srgbClr val="22E07A"/>
-          </a:solidFill>
-          <a:ln/>
-        </p:spPr>
+              <a:t>devices in a single hospital system</a:t>
+            </a:r>
+            <a:endParaRPr lang="en-US" sz="1400" dirty="0"/>
+          </a:p>
+        </p:txBody>
+      </p:sp>
+      <p:sp>
+        <p:nvSpPr>
+          <p:cNvPr id="7" name="Text 5"/>
+          <p:cNvSpPr txBox="1"/>
+          <p:nvPr/>
+        </p:nvSpPr>
+        <p:spPr>
+          <a:xfrm>
+            <a:off x="457200" y="5715000"/>
+            <a:ext cx="5486400" cy="274320"/>
+          </a:xfrm>
+          <a:prstGeom prst="rect">
+            <a:avLst/>
+          </a:prstGeom>
+          <a:noFill/>
+          <a:ln/>
+        </p:spPr>
+        <p:txBody>
+          <a:bodyPr wrap="square" lIns="0" tIns="0" rIns="0" bIns="0" rtlCol="0" anchor="ctr"/>
+          <a:lstStyle/>
+          <a:p>
+            <a:pPr indent="0" marL="0">
+              <a:buNone/>
+            </a:pPr>
+            <a:r>
+              <a:rPr lang="en-US" sz="1200" i="1" dirty="0">
+                <a:solidFill>
+                  <a:srgbClr val="777779"/>
+                </a:solidFill>
+                <a:latin typeface="Calibri" pitchFamily="34" charset="0"/>
+                <a:ea typeface="Calibri" pitchFamily="34" charset="-122"/>
+                <a:cs typeface="Calibri" pitchFamily="34" charset="-120"/>
+              </a:rPr>
+              <a:t>every one a parallel find → fix → verify job</a:t>
+            </a:r>
+            <a:endParaRPr lang="en-US" sz="1200" dirty="0"/>
+          </a:p>
+        </p:txBody>
       </p:sp>
       <p:sp>
         <p:nvSpPr>
@@ -7416,8 +7666,8 @@
         </p:nvSpPr>
         <p:spPr>
           <a:xfrm>
-            <a:off x="6841998" y="2871216"/>
-            <a:ext cx="109728" cy="109728"/>
+            <a:off x="6487668" y="2820924"/>
+            <a:ext cx="91440" cy="91440"/>
           </a:xfrm>
           <a:prstGeom prst="ellipse">
             <a:avLst/>
@@ -7436,8 +7686,8 @@
         </p:nvSpPr>
         <p:spPr>
           <a:xfrm>
-            <a:off x="7111746" y="2871216"/>
-            <a:ext cx="109728" cy="109728"/>
+            <a:off x="6752844" y="2820924"/>
+            <a:ext cx="91440" cy="91440"/>
           </a:xfrm>
           <a:prstGeom prst="ellipse">
             <a:avLst/>
@@ -7456,8 +7706,8 @@
         </p:nvSpPr>
         <p:spPr>
           <a:xfrm>
-            <a:off x="7381494" y="2871216"/>
-            <a:ext cx="109728" cy="109728"/>
+            <a:off x="7018020" y="2820924"/>
+            <a:ext cx="91440" cy="91440"/>
           </a:xfrm>
           <a:prstGeom prst="ellipse">
             <a:avLst/>
@@ -7476,8 +7726,8 @@
         </p:nvSpPr>
         <p:spPr>
           <a:xfrm>
-            <a:off x="7651242" y="2871216"/>
-            <a:ext cx="109728" cy="109728"/>
+            <a:off x="7283196" y="2820924"/>
+            <a:ext cx="91440" cy="91440"/>
           </a:xfrm>
           <a:prstGeom prst="ellipse">
             <a:avLst/>
@@ -7496,8 +7746,8 @@
         </p:nvSpPr>
         <p:spPr>
           <a:xfrm>
-            <a:off x="7920990" y="2871216"/>
-            <a:ext cx="109728" cy="109728"/>
+            <a:off x="7548372" y="2820924"/>
+            <a:ext cx="91440" cy="91440"/>
           </a:xfrm>
           <a:prstGeom prst="ellipse">
             <a:avLst/>
@@ -7516,8 +7766,8 @@
         </p:nvSpPr>
         <p:spPr>
           <a:xfrm>
-            <a:off x="8190738" y="2871216"/>
-            <a:ext cx="109728" cy="109728"/>
+            <a:off x="7813548" y="2820924"/>
+            <a:ext cx="91440" cy="91440"/>
           </a:xfrm>
           <a:prstGeom prst="ellipse">
             <a:avLst/>
@@ -7536,8 +7786,8 @@
         </p:nvSpPr>
         <p:spPr>
           <a:xfrm>
-            <a:off x="8460486" y="2871216"/>
-            <a:ext cx="109728" cy="109728"/>
+            <a:off x="8078724" y="2820924"/>
+            <a:ext cx="91440" cy="91440"/>
           </a:xfrm>
           <a:prstGeom prst="ellipse">
             <a:avLst/>
@@ -7556,8 +7806,8 @@
         </p:nvSpPr>
         <p:spPr>
           <a:xfrm>
-            <a:off x="8730234" y="2871216"/>
-            <a:ext cx="109728" cy="109728"/>
+            <a:off x="8343900" y="2820924"/>
+            <a:ext cx="91440" cy="91440"/>
           </a:xfrm>
           <a:prstGeom prst="ellipse">
             <a:avLst/>
@@ -7576,8 +7826,8 @@
         </p:nvSpPr>
         <p:spPr>
           <a:xfrm>
-            <a:off x="8999982" y="2871216"/>
-            <a:ext cx="109728" cy="109728"/>
+            <a:off x="8609076" y="2820924"/>
+            <a:ext cx="91440" cy="91440"/>
           </a:xfrm>
           <a:prstGeom prst="ellipse">
             <a:avLst/>
@@ -7596,8 +7846,8 @@
         </p:nvSpPr>
         <p:spPr>
           <a:xfrm>
-            <a:off x="9269730" y="2871216"/>
-            <a:ext cx="109728" cy="109728"/>
+            <a:off x="8874252" y="2820924"/>
+            <a:ext cx="91440" cy="91440"/>
           </a:xfrm>
           <a:prstGeom prst="ellipse">
             <a:avLst/>
@@ -7616,8 +7866,8 @@
         </p:nvSpPr>
         <p:spPr>
           <a:xfrm>
-            <a:off x="9539478" y="2871216"/>
-            <a:ext cx="109728" cy="109728"/>
+            <a:off x="9139428" y="2820924"/>
+            <a:ext cx="91440" cy="91440"/>
           </a:xfrm>
           <a:prstGeom prst="ellipse">
             <a:avLst/>
@@ -7636,8 +7886,8 @@
         </p:nvSpPr>
         <p:spPr>
           <a:xfrm>
-            <a:off x="9809226" y="2871216"/>
-            <a:ext cx="109728" cy="109728"/>
+            <a:off x="9404604" y="2820924"/>
+            <a:ext cx="91440" cy="91440"/>
           </a:xfrm>
           <a:prstGeom prst="ellipse">
             <a:avLst/>
@@ -7656,8 +7906,8 @@
         </p:nvSpPr>
         <p:spPr>
           <a:xfrm>
-            <a:off x="10078974" y="2871216"/>
-            <a:ext cx="109728" cy="109728"/>
+            <a:off x="9669780" y="2820924"/>
+            <a:ext cx="91440" cy="91440"/>
           </a:xfrm>
           <a:prstGeom prst="ellipse">
             <a:avLst/>
@@ -7676,8 +7926,8 @@
         </p:nvSpPr>
         <p:spPr>
           <a:xfrm>
-            <a:off x="10348722" y="2871216"/>
-            <a:ext cx="109728" cy="109728"/>
+            <a:off x="9934956" y="2820924"/>
+            <a:ext cx="91440" cy="91440"/>
           </a:xfrm>
           <a:prstGeom prst="ellipse">
             <a:avLst/>
@@ -7696,8 +7946,8 @@
         </p:nvSpPr>
         <p:spPr>
           <a:xfrm>
-            <a:off x="10618470" y="2871216"/>
-            <a:ext cx="109728" cy="109728"/>
+            <a:off x="10200132" y="2820924"/>
+            <a:ext cx="91440" cy="91440"/>
           </a:xfrm>
           <a:prstGeom prst="ellipse">
             <a:avLst/>
@@ -7716,8 +7966,8 @@
         </p:nvSpPr>
         <p:spPr>
           <a:xfrm>
-            <a:off x="10888218" y="2871216"/>
-            <a:ext cx="109728" cy="109728"/>
+            <a:off x="10465308" y="2820924"/>
+            <a:ext cx="91440" cy="91440"/>
           </a:xfrm>
           <a:prstGeom prst="ellipse">
             <a:avLst/>
@@ -7736,8 +7986,8 @@
         </p:nvSpPr>
         <p:spPr>
           <a:xfrm>
-            <a:off x="11157966" y="2871216"/>
-            <a:ext cx="109728" cy="109728"/>
+            <a:off x="10730484" y="2820924"/>
+            <a:ext cx="91440" cy="91440"/>
           </a:xfrm>
           <a:prstGeom prst="ellipse">
             <a:avLst/>
@@ -7756,8 +8006,8 @@
         </p:nvSpPr>
         <p:spPr>
           <a:xfrm>
-            <a:off x="11427714" y="2871216"/>
-            <a:ext cx="109728" cy="109728"/>
+            <a:off x="10995660" y="2820924"/>
+            <a:ext cx="91440" cy="91440"/>
           </a:xfrm>
           <a:prstGeom prst="ellipse">
             <a:avLst/>
@@ -7776,8 +8026,8 @@
         </p:nvSpPr>
         <p:spPr>
           <a:xfrm>
-            <a:off x="11697462" y="2871216"/>
-            <a:ext cx="109728" cy="109728"/>
+            <a:off x="11260836" y="2820924"/>
+            <a:ext cx="91440" cy="91440"/>
           </a:xfrm>
           <a:prstGeom prst="ellipse">
             <a:avLst/>
@@ -7796,8 +8046,8 @@
         </p:nvSpPr>
         <p:spPr>
           <a:xfrm>
-            <a:off x="6572250" y="3236976"/>
-            <a:ext cx="109728" cy="109728"/>
+            <a:off x="11526012" y="2820924"/>
+            <a:ext cx="91440" cy="91440"/>
           </a:xfrm>
           <a:prstGeom prst="ellipse">
             <a:avLst/>
@@ -7816,8 +8066,8 @@
         </p:nvSpPr>
         <p:spPr>
           <a:xfrm>
-            <a:off x="6841998" y="3236976"/>
-            <a:ext cx="109728" cy="109728"/>
+            <a:off x="6487668" y="3159252"/>
+            <a:ext cx="91440" cy="91440"/>
           </a:xfrm>
           <a:prstGeom prst="ellipse">
             <a:avLst/>
@@ -7836,8 +8086,8 @@
         </p:nvSpPr>
         <p:spPr>
           <a:xfrm>
-            <a:off x="7111746" y="3236976"/>
-            <a:ext cx="109728" cy="109728"/>
+            <a:off x="6752844" y="3159252"/>
+            <a:ext cx="91440" cy="91440"/>
           </a:xfrm>
           <a:prstGeom prst="ellipse">
             <a:avLst/>
@@ -7856,8 +8106,8 @@
         </p:nvSpPr>
         <p:spPr>
           <a:xfrm>
-            <a:off x="7381494" y="3236976"/>
-            <a:ext cx="109728" cy="109728"/>
+            <a:off x="7018020" y="3159252"/>
+            <a:ext cx="91440" cy="91440"/>
           </a:xfrm>
           <a:prstGeom prst="ellipse">
             <a:avLst/>
@@ -7876,8 +8126,8 @@
         </p:nvSpPr>
         <p:spPr>
           <a:xfrm>
-            <a:off x="7651242" y="3236976"/>
-            <a:ext cx="109728" cy="109728"/>
+            <a:off x="7283196" y="3159252"/>
+            <a:ext cx="91440" cy="91440"/>
           </a:xfrm>
           <a:prstGeom prst="ellipse">
             <a:avLst/>
@@ -7896,8 +8146,8 @@
         </p:nvSpPr>
         <p:spPr>
           <a:xfrm>
-            <a:off x="7920990" y="3236976"/>
-            <a:ext cx="109728" cy="109728"/>
+            <a:off x="7548372" y="3159252"/>
+            <a:ext cx="91440" cy="91440"/>
           </a:xfrm>
           <a:prstGeom prst="ellipse">
             <a:avLst/>
@@ -7916,8 +8166,8 @@
         </p:nvSpPr>
         <p:spPr>
           <a:xfrm>
-            <a:off x="8190738" y="3236976"/>
-            <a:ext cx="109728" cy="109728"/>
+            <a:off x="7813548" y="3159252"/>
+            <a:ext cx="91440" cy="91440"/>
           </a:xfrm>
           <a:prstGeom prst="ellipse">
             <a:avLst/>
@@ -7936,8 +8186,8 @@
         </p:nvSpPr>
         <p:spPr>
           <a:xfrm>
-            <a:off x="8460486" y="3236976"/>
-            <a:ext cx="109728" cy="109728"/>
+            <a:off x="8078724" y="3159252"/>
+            <a:ext cx="91440" cy="91440"/>
           </a:xfrm>
           <a:prstGeom prst="ellipse">
             <a:avLst/>
@@ -7956,8 +8206,8 @@
         </p:nvSpPr>
         <p:spPr>
           <a:xfrm>
-            <a:off x="8730234" y="3236976"/>
-            <a:ext cx="109728" cy="109728"/>
+            <a:off x="8343900" y="3159252"/>
+            <a:ext cx="91440" cy="91440"/>
           </a:xfrm>
           <a:prstGeom prst="ellipse">
             <a:avLst/>
@@ -7976,8 +8226,8 @@
         </p:nvSpPr>
         <p:spPr>
           <a:xfrm>
-            <a:off x="8999982" y="3236976"/>
-            <a:ext cx="109728" cy="109728"/>
+            <a:off x="8609076" y="3159252"/>
+            <a:ext cx="91440" cy="91440"/>
           </a:xfrm>
           <a:prstGeom prst="ellipse">
             <a:avLst/>
@@ -7996,8 +8246,8 @@
         </p:nvSpPr>
         <p:spPr>
           <a:xfrm>
-            <a:off x="9269730" y="3236976"/>
-            <a:ext cx="109728" cy="109728"/>
+            <a:off x="8874252" y="3159252"/>
+            <a:ext cx="91440" cy="91440"/>
           </a:xfrm>
           <a:prstGeom prst="ellipse">
             <a:avLst/>
@@ -8016,8 +8266,8 @@
         </p:nvSpPr>
         <p:spPr>
           <a:xfrm>
-            <a:off x="9539478" y="3236976"/>
-            <a:ext cx="109728" cy="109728"/>
+            <a:off x="9139428" y="3159252"/>
+            <a:ext cx="91440" cy="91440"/>
           </a:xfrm>
           <a:prstGeom prst="ellipse">
             <a:avLst/>
@@ -8036,8 +8286,8 @@
         </p:nvSpPr>
         <p:spPr>
           <a:xfrm>
-            <a:off x="9809226" y="3236976"/>
-            <a:ext cx="109728" cy="109728"/>
+            <a:off x="9404604" y="3159252"/>
+            <a:ext cx="91440" cy="91440"/>
           </a:xfrm>
           <a:prstGeom prst="ellipse">
             <a:avLst/>
@@ -8056,8 +8306,8 @@
         </p:nvSpPr>
         <p:spPr>
           <a:xfrm>
-            <a:off x="10078974" y="3236976"/>
-            <a:ext cx="109728" cy="109728"/>
+            <a:off x="9669780" y="3159252"/>
+            <a:ext cx="91440" cy="91440"/>
           </a:xfrm>
           <a:prstGeom prst="ellipse">
             <a:avLst/>
@@ -8076,8 +8326,8 @@
         </p:nvSpPr>
         <p:spPr>
           <a:xfrm>
-            <a:off x="10348722" y="3236976"/>
-            <a:ext cx="109728" cy="109728"/>
+            <a:off x="9934956" y="3159252"/>
+            <a:ext cx="91440" cy="91440"/>
           </a:xfrm>
           <a:prstGeom prst="ellipse">
             <a:avLst/>
@@ -8096,8 +8346,8 @@
         </p:nvSpPr>
         <p:spPr>
           <a:xfrm>
-            <a:off x="10618470" y="3236976"/>
-            <a:ext cx="109728" cy="109728"/>
+            <a:off x="10200132" y="3159252"/>
+            <a:ext cx="91440" cy="91440"/>
           </a:xfrm>
           <a:prstGeom prst="ellipse">
             <a:avLst/>
@@ -8116,8 +8366,8 @@
         </p:nvSpPr>
         <p:spPr>
           <a:xfrm>
-            <a:off x="10888218" y="3236976"/>
-            <a:ext cx="109728" cy="109728"/>
+            <a:off x="10465308" y="3159252"/>
+            <a:ext cx="91440" cy="91440"/>
           </a:xfrm>
           <a:prstGeom prst="ellipse">
             <a:avLst/>
@@ -8136,8 +8386,8 @@
         </p:nvSpPr>
         <p:spPr>
           <a:xfrm>
-            <a:off x="11157966" y="3236976"/>
-            <a:ext cx="109728" cy="109728"/>
+            <a:off x="10730484" y="3159252"/>
+            <a:ext cx="91440" cy="91440"/>
           </a:xfrm>
           <a:prstGeom prst="ellipse">
             <a:avLst/>
@@ -8156,8 +8406,8 @@
         </p:nvSpPr>
         <p:spPr>
           <a:xfrm>
-            <a:off x="11427714" y="3236976"/>
-            <a:ext cx="109728" cy="109728"/>
+            <a:off x="10995660" y="3159252"/>
+            <a:ext cx="91440" cy="91440"/>
           </a:xfrm>
           <a:prstGeom prst="ellipse">
             <a:avLst/>
@@ -8176,8 +8426,8 @@
         </p:nvSpPr>
         <p:spPr>
           <a:xfrm>
-            <a:off x="11697462" y="3236976"/>
-            <a:ext cx="109728" cy="109728"/>
+            <a:off x="11260836" y="3159252"/>
+            <a:ext cx="91440" cy="91440"/>
           </a:xfrm>
           <a:prstGeom prst="ellipse">
             <a:avLst/>
@@ -8196,8 +8446,8 @@
         </p:nvSpPr>
         <p:spPr>
           <a:xfrm>
-            <a:off x="6572250" y="3602736"/>
-            <a:ext cx="109728" cy="109728"/>
+            <a:off x="11526012" y="3159252"/>
+            <a:ext cx="91440" cy="91440"/>
           </a:xfrm>
           <a:prstGeom prst="ellipse">
             <a:avLst/>
@@ -8216,8 +8466,8 @@
         </p:nvSpPr>
         <p:spPr>
           <a:xfrm>
-            <a:off x="6841998" y="3602736"/>
-            <a:ext cx="109728" cy="109728"/>
+            <a:off x="6487668" y="3497580"/>
+            <a:ext cx="91440" cy="91440"/>
           </a:xfrm>
           <a:prstGeom prst="ellipse">
             <a:avLst/>
@@ -8236,8 +8486,8 @@
         </p:nvSpPr>
         <p:spPr>
           <a:xfrm>
-            <a:off x="7111746" y="3602736"/>
-            <a:ext cx="109728" cy="109728"/>
+            <a:off x="6752844" y="3497580"/>
+            <a:ext cx="91440" cy="91440"/>
           </a:xfrm>
           <a:prstGeom prst="ellipse">
             <a:avLst/>
@@ -8256,8 +8506,8 @@
         </p:nvSpPr>
         <p:spPr>
           <a:xfrm>
-            <a:off x="7381494" y="3602736"/>
-            <a:ext cx="109728" cy="109728"/>
+            <a:off x="7018020" y="3497580"/>
+            <a:ext cx="91440" cy="91440"/>
           </a:xfrm>
           <a:prstGeom prst="ellipse">
             <a:avLst/>
@@ -8276,8 +8526,8 @@
         </p:nvSpPr>
         <p:spPr>
           <a:xfrm>
-            <a:off x="7651242" y="3602736"/>
-            <a:ext cx="109728" cy="109728"/>
+            <a:off x="7283196" y="3497580"/>
+            <a:ext cx="91440" cy="91440"/>
           </a:xfrm>
           <a:prstGeom prst="ellipse">
             <a:avLst/>
@@ -8296,8 +8546,8 @@
         </p:nvSpPr>
         <p:spPr>
           <a:xfrm>
-            <a:off x="7920990" y="3602736"/>
-            <a:ext cx="109728" cy="109728"/>
+            <a:off x="7548372" y="3497580"/>
+            <a:ext cx="91440" cy="91440"/>
           </a:xfrm>
           <a:prstGeom prst="ellipse">
             <a:avLst/>
@@ -8316,8 +8566,8 @@
         </p:nvSpPr>
         <p:spPr>
           <a:xfrm>
-            <a:off x="8190738" y="3602736"/>
-            <a:ext cx="109728" cy="109728"/>
+            <a:off x="7813548" y="3497580"/>
+            <a:ext cx="91440" cy="91440"/>
           </a:xfrm>
           <a:prstGeom prst="ellipse">
             <a:avLst/>
@@ -8336,8 +8586,8 @@
         </p:nvSpPr>
         <p:spPr>
           <a:xfrm>
-            <a:off x="8460486" y="3602736"/>
-            <a:ext cx="109728" cy="109728"/>
+            <a:off x="8078724" y="3497580"/>
+            <a:ext cx="91440" cy="91440"/>
           </a:xfrm>
           <a:prstGeom prst="ellipse">
             <a:avLst/>
@@ -8356,8 +8606,8 @@
         </p:nvSpPr>
         <p:spPr>
           <a:xfrm>
-            <a:off x="8730234" y="3602736"/>
-            <a:ext cx="109728" cy="109728"/>
+            <a:off x="8343900" y="3497580"/>
+            <a:ext cx="91440" cy="91440"/>
           </a:xfrm>
           <a:prstGeom prst="ellipse">
             <a:avLst/>
@@ -8376,8 +8626,8 @@
         </p:nvSpPr>
         <p:spPr>
           <a:xfrm>
-            <a:off x="8999982" y="3602736"/>
-            <a:ext cx="109728" cy="109728"/>
+            <a:off x="8609076" y="3497580"/>
+            <a:ext cx="91440" cy="91440"/>
           </a:xfrm>
           <a:prstGeom prst="ellipse">
             <a:avLst/>
@@ -8396,8 +8646,8 @@
         </p:nvSpPr>
         <p:spPr>
           <a:xfrm>
-            <a:off x="9269730" y="3602736"/>
-            <a:ext cx="109728" cy="109728"/>
+            <a:off x="8874252" y="3497580"/>
+            <a:ext cx="91440" cy="91440"/>
           </a:xfrm>
           <a:prstGeom prst="ellipse">
             <a:avLst/>
@@ -8416,8 +8666,8 @@
         </p:nvSpPr>
         <p:spPr>
           <a:xfrm>
-            <a:off x="9539478" y="3602736"/>
-            <a:ext cx="109728" cy="109728"/>
+            <a:off x="9139428" y="3497580"/>
+            <a:ext cx="91440" cy="91440"/>
           </a:xfrm>
           <a:prstGeom prst="ellipse">
             <a:avLst/>
@@ -8436,8 +8686,8 @@
         </p:nvSpPr>
         <p:spPr>
           <a:xfrm>
-            <a:off x="9809226" y="3602736"/>
-            <a:ext cx="109728" cy="109728"/>
+            <a:off x="9404604" y="3497580"/>
+            <a:ext cx="91440" cy="91440"/>
           </a:xfrm>
           <a:prstGeom prst="ellipse">
             <a:avLst/>
@@ -8456,8 +8706,8 @@
         </p:nvSpPr>
         <p:spPr>
           <a:xfrm>
-            <a:off x="10078974" y="3602736"/>
-            <a:ext cx="109728" cy="109728"/>
+            <a:off x="9669780" y="3497580"/>
+            <a:ext cx="91440" cy="91440"/>
           </a:xfrm>
           <a:prstGeom prst="ellipse">
             <a:avLst/>
@@ -8476,8 +8726,8 @@
         </p:nvSpPr>
         <p:spPr>
           <a:xfrm>
-            <a:off x="10348722" y="3602736"/>
-            <a:ext cx="109728" cy="109728"/>
+            <a:off x="9934956" y="3497580"/>
+            <a:ext cx="91440" cy="91440"/>
           </a:xfrm>
           <a:prstGeom prst="ellipse">
             <a:avLst/>
@@ -8496,8 +8746,8 @@
         </p:nvSpPr>
         <p:spPr>
           <a:xfrm>
-            <a:off x="10618470" y="3602736"/>
-            <a:ext cx="109728" cy="109728"/>
+            <a:off x="10200132" y="3497580"/>
+            <a:ext cx="91440" cy="91440"/>
           </a:xfrm>
           <a:prstGeom prst="ellipse">
             <a:avLst/>
@@ -8516,8 +8766,8 @@
         </p:nvSpPr>
         <p:spPr>
           <a:xfrm>
-            <a:off x="10888218" y="3602736"/>
-            <a:ext cx="109728" cy="109728"/>
+            <a:off x="10465308" y="3497580"/>
+            <a:ext cx="91440" cy="91440"/>
           </a:xfrm>
           <a:prstGeom prst="ellipse">
             <a:avLst/>
@@ -8536,8 +8786,8 @@
         </p:nvSpPr>
         <p:spPr>
           <a:xfrm>
-            <a:off x="11157966" y="3602736"/>
-            <a:ext cx="109728" cy="109728"/>
+            <a:off x="10730484" y="3497580"/>
+            <a:ext cx="91440" cy="91440"/>
           </a:xfrm>
           <a:prstGeom prst="ellipse">
             <a:avLst/>
@@ -8556,8 +8806,8 @@
         </p:nvSpPr>
         <p:spPr>
           <a:xfrm>
-            <a:off x="11427714" y="3602736"/>
-            <a:ext cx="109728" cy="109728"/>
+            <a:off x="10995660" y="3497580"/>
+            <a:ext cx="91440" cy="91440"/>
           </a:xfrm>
           <a:prstGeom prst="ellipse">
             <a:avLst/>
@@ -8576,8 +8826,8 @@
         </p:nvSpPr>
         <p:spPr>
           <a:xfrm>
-            <a:off x="11697462" y="3602736"/>
-            <a:ext cx="109728" cy="109728"/>
+            <a:off x="11260836" y="3497580"/>
+            <a:ext cx="91440" cy="91440"/>
           </a:xfrm>
           <a:prstGeom prst="ellipse">
             <a:avLst/>
@@ -8596,8 +8846,8 @@
         </p:nvSpPr>
         <p:spPr>
           <a:xfrm>
-            <a:off x="6572250" y="3968496"/>
-            <a:ext cx="109728" cy="109728"/>
+            <a:off x="11526012" y="3497580"/>
+            <a:ext cx="91440" cy="91440"/>
           </a:xfrm>
           <a:prstGeom prst="ellipse">
             <a:avLst/>
@@ -8616,8 +8866,8 @@
         </p:nvSpPr>
         <p:spPr>
           <a:xfrm>
-            <a:off x="6841998" y="3968496"/>
-            <a:ext cx="109728" cy="109728"/>
+            <a:off x="6487668" y="3835908"/>
+            <a:ext cx="91440" cy="91440"/>
           </a:xfrm>
           <a:prstGeom prst="ellipse">
             <a:avLst/>
@@ -8636,8 +8886,8 @@
         </p:nvSpPr>
         <p:spPr>
           <a:xfrm>
-            <a:off x="7111746" y="3968496"/>
-            <a:ext cx="109728" cy="109728"/>
+            <a:off x="6752844" y="3835908"/>
+            <a:ext cx="91440" cy="91440"/>
           </a:xfrm>
           <a:prstGeom prst="ellipse">
             <a:avLst/>
@@ -8656,8 +8906,8 @@
         </p:nvSpPr>
         <p:spPr>
           <a:xfrm>
-            <a:off x="7381494" y="3968496"/>
-            <a:ext cx="109728" cy="109728"/>
+            <a:off x="7018020" y="3835908"/>
+            <a:ext cx="91440" cy="91440"/>
           </a:xfrm>
           <a:prstGeom prst="ellipse">
             <a:avLst/>
@@ -8676,8 +8926,8 @@
         </p:nvSpPr>
         <p:spPr>
           <a:xfrm>
-            <a:off x="7651242" y="3968496"/>
-            <a:ext cx="109728" cy="109728"/>
+            <a:off x="7283196" y="3835908"/>
+            <a:ext cx="91440" cy="91440"/>
           </a:xfrm>
           <a:prstGeom prst="ellipse">
             <a:avLst/>
@@ -8696,8 +8946,8 @@
         </p:nvSpPr>
         <p:spPr>
           <a:xfrm>
-            <a:off x="7920990" y="3968496"/>
-            <a:ext cx="109728" cy="109728"/>
+            <a:off x="7548372" y="3835908"/>
+            <a:ext cx="91440" cy="91440"/>
           </a:xfrm>
           <a:prstGeom prst="ellipse">
             <a:avLst/>
@@ -8716,8 +8966,8 @@
         </p:nvSpPr>
         <p:spPr>
           <a:xfrm>
-            <a:off x="8190738" y="3968496"/>
-            <a:ext cx="109728" cy="109728"/>
+            <a:off x="7813548" y="3835908"/>
+            <a:ext cx="91440" cy="91440"/>
           </a:xfrm>
           <a:prstGeom prst="ellipse">
             <a:avLst/>
@@ -8736,8 +8986,8 @@
         </p:nvSpPr>
         <p:spPr>
           <a:xfrm>
-            <a:off x="8460486" y="3968496"/>
-            <a:ext cx="109728" cy="109728"/>
+            <a:off x="8078724" y="3835908"/>
+            <a:ext cx="91440" cy="91440"/>
           </a:xfrm>
           <a:prstGeom prst="ellipse">
             <a:avLst/>
@@ -8756,8 +9006,8 @@
         </p:nvSpPr>
         <p:spPr>
           <a:xfrm>
-            <a:off x="8730234" y="3968496"/>
-            <a:ext cx="109728" cy="109728"/>
+            <a:off x="8343900" y="3835908"/>
+            <a:ext cx="91440" cy="91440"/>
           </a:xfrm>
           <a:prstGeom prst="ellipse">
             <a:avLst/>
@@ -8776,8 +9026,8 @@
         </p:nvSpPr>
         <p:spPr>
           <a:xfrm>
-            <a:off x="8999982" y="3968496"/>
-            <a:ext cx="109728" cy="109728"/>
+            <a:off x="8609076" y="3835908"/>
+            <a:ext cx="91440" cy="91440"/>
           </a:xfrm>
           <a:prstGeom prst="ellipse">
             <a:avLst/>
@@ -8796,8 +9046,8 @@
         </p:nvSpPr>
         <p:spPr>
           <a:xfrm>
-            <a:off x="9269730" y="3968496"/>
-            <a:ext cx="109728" cy="109728"/>
+            <a:off x="8874252" y="3835908"/>
+            <a:ext cx="91440" cy="91440"/>
           </a:xfrm>
           <a:prstGeom prst="ellipse">
             <a:avLst/>
@@ -8816,8 +9066,8 @@
         </p:nvSpPr>
         <p:spPr>
           <a:xfrm>
-            <a:off x="9539478" y="3968496"/>
-            <a:ext cx="109728" cy="109728"/>
+            <a:off x="9139428" y="3835908"/>
+            <a:ext cx="91440" cy="91440"/>
           </a:xfrm>
           <a:prstGeom prst="ellipse">
             <a:avLst/>
@@ -8836,8 +9086,8 @@
         </p:nvSpPr>
         <p:spPr>
           <a:xfrm>
-            <a:off x="9809226" y="3968496"/>
-            <a:ext cx="109728" cy="109728"/>
+            <a:off x="9404604" y="3835908"/>
+            <a:ext cx="91440" cy="91440"/>
           </a:xfrm>
           <a:prstGeom prst="ellipse">
             <a:avLst/>
@@ -8856,8 +9106,8 @@
         </p:nvSpPr>
         <p:spPr>
           <a:xfrm>
-            <a:off x="10078974" y="3968496"/>
-            <a:ext cx="109728" cy="109728"/>
+            <a:off x="9669780" y="3835908"/>
+            <a:ext cx="91440" cy="91440"/>
           </a:xfrm>
           <a:prstGeom prst="ellipse">
             <a:avLst/>
@@ -8876,8 +9126,8 @@
         </p:nvSpPr>
         <p:spPr>
           <a:xfrm>
-            <a:off x="10348722" y="3968496"/>
-            <a:ext cx="109728" cy="109728"/>
+            <a:off x="9934956" y="3835908"/>
+            <a:ext cx="91440" cy="91440"/>
           </a:xfrm>
           <a:prstGeom prst="ellipse">
             <a:avLst/>
@@ -8896,8 +9146,8 @@
         </p:nvSpPr>
         <p:spPr>
           <a:xfrm>
-            <a:off x="10618470" y="3968496"/>
-            <a:ext cx="109728" cy="109728"/>
+            <a:off x="10200132" y="3835908"/>
+            <a:ext cx="91440" cy="91440"/>
           </a:xfrm>
           <a:prstGeom prst="ellipse">
             <a:avLst/>
@@ -8916,8 +9166,8 @@
         </p:nvSpPr>
         <p:spPr>
           <a:xfrm>
-            <a:off x="10888218" y="3968496"/>
-            <a:ext cx="109728" cy="109728"/>
+            <a:off x="10465308" y="3835908"/>
+            <a:ext cx="91440" cy="91440"/>
           </a:xfrm>
           <a:prstGeom prst="ellipse">
             <a:avLst/>
@@ -8936,8 +9186,8 @@
         </p:nvSpPr>
         <p:spPr>
           <a:xfrm>
-            <a:off x="11157966" y="3968496"/>
-            <a:ext cx="109728" cy="109728"/>
+            <a:off x="10730484" y="3835908"/>
+            <a:ext cx="91440" cy="91440"/>
           </a:xfrm>
           <a:prstGeom prst="ellipse">
             <a:avLst/>
@@ -8956,8 +9206,8 @@
         </p:nvSpPr>
         <p:spPr>
           <a:xfrm>
-            <a:off x="11427714" y="3968496"/>
-            <a:ext cx="109728" cy="109728"/>
+            <a:off x="10995660" y="3835908"/>
+            <a:ext cx="91440" cy="91440"/>
           </a:xfrm>
           <a:prstGeom prst="ellipse">
             <a:avLst/>
@@ -8976,8 +9226,8 @@
         </p:nvSpPr>
         <p:spPr>
           <a:xfrm>
-            <a:off x="11697462" y="3968496"/>
-            <a:ext cx="109728" cy="109728"/>
+            <a:off x="11260836" y="3835908"/>
+            <a:ext cx="91440" cy="91440"/>
           </a:xfrm>
           <a:prstGeom prst="ellipse">
             <a:avLst/>
@@ -8996,8 +9246,8 @@
         </p:nvSpPr>
         <p:spPr>
           <a:xfrm>
-            <a:off x="6572250" y="4334256"/>
-            <a:ext cx="109728" cy="109728"/>
+            <a:off x="11526012" y="3835908"/>
+            <a:ext cx="91440" cy="91440"/>
           </a:xfrm>
           <a:prstGeom prst="ellipse">
             <a:avLst/>
@@ -9016,8 +9266,8 @@
         </p:nvSpPr>
         <p:spPr>
           <a:xfrm>
-            <a:off x="6841998" y="4334256"/>
-            <a:ext cx="109728" cy="109728"/>
+            <a:off x="6487668" y="4174236"/>
+            <a:ext cx="91440" cy="91440"/>
           </a:xfrm>
           <a:prstGeom prst="ellipse">
             <a:avLst/>
@@ -9036,8 +9286,8 @@
         </p:nvSpPr>
         <p:spPr>
           <a:xfrm>
-            <a:off x="7111746" y="4334256"/>
-            <a:ext cx="109728" cy="109728"/>
+            <a:off x="6752844" y="4174236"/>
+            <a:ext cx="91440" cy="91440"/>
           </a:xfrm>
           <a:prstGeom prst="ellipse">
             <a:avLst/>
@@ -9056,8 +9306,8 @@
         </p:nvSpPr>
         <p:spPr>
           <a:xfrm>
-            <a:off x="7381494" y="4334256"/>
-            <a:ext cx="109728" cy="109728"/>
+            <a:off x="7018020" y="4174236"/>
+            <a:ext cx="91440" cy="91440"/>
           </a:xfrm>
           <a:prstGeom prst="ellipse">
             <a:avLst/>
@@ -9076,8 +9326,8 @@
         </p:nvSpPr>
         <p:spPr>
           <a:xfrm>
-            <a:off x="7651242" y="4334256"/>
-            <a:ext cx="109728" cy="109728"/>
+            <a:off x="7283196" y="4174236"/>
+            <a:ext cx="91440" cy="91440"/>
           </a:xfrm>
           <a:prstGeom prst="ellipse">
             <a:avLst/>
@@ -9096,8 +9346,8 @@
         </p:nvSpPr>
         <p:spPr>
           <a:xfrm>
-            <a:off x="7920990" y="4334256"/>
-            <a:ext cx="109728" cy="109728"/>
+            <a:off x="7548372" y="4174236"/>
+            <a:ext cx="91440" cy="91440"/>
           </a:xfrm>
           <a:prstGeom prst="ellipse">
             <a:avLst/>
@@ -9116,7 +9366,27 @@
         </p:nvSpPr>
         <p:spPr>
           <a:xfrm>
-            <a:off x="8190738" y="4334256"/>
+            <a:off x="7813548" y="4174236"/>
+            <a:ext cx="91440" cy="91440"/>
+          </a:xfrm>
+          <a:prstGeom prst="ellipse">
+            <a:avLst/>
+          </a:prstGeom>
+          <a:solidFill>
+            <a:srgbClr val="22E07A"/>
+          </a:solidFill>
+          <a:ln/>
+        </p:spPr>
+      </p:sp>
+      <p:sp>
+        <p:nvSpPr>
+          <p:cNvPr id="94" name="Shape 92"/>
+          <p:cNvSpPr/>
+          <p:nvPr/>
+        </p:nvSpPr>
+        <p:spPr>
+          <a:xfrm>
+            <a:off x="8023860" y="4119372"/>
             <a:ext cx="201168" cy="201168"/>
           </a:xfrm>
           <a:prstGeom prst="ellipse">
@@ -9130,34 +9400,14 @@
       </p:sp>
       <p:sp>
         <p:nvSpPr>
-          <p:cNvPr id="94" name="Shape 92"/>
-          <p:cNvSpPr/>
-          <p:nvPr/>
-        </p:nvSpPr>
-        <p:spPr>
-          <a:xfrm>
-            <a:off x="8460486" y="4334256"/>
-            <a:ext cx="109728" cy="109728"/>
-          </a:xfrm>
-          <a:prstGeom prst="ellipse">
-            <a:avLst/>
-          </a:prstGeom>
-          <a:solidFill>
-            <a:srgbClr val="22E07A"/>
-          </a:solidFill>
-          <a:ln/>
-        </p:spPr>
-      </p:sp>
-      <p:sp>
-        <p:nvSpPr>
           <p:cNvPr id="95" name="Shape 93"/>
           <p:cNvSpPr/>
           <p:nvPr/>
         </p:nvSpPr>
         <p:spPr>
           <a:xfrm>
-            <a:off x="8730234" y="4334256"/>
-            <a:ext cx="109728" cy="109728"/>
+            <a:off x="8343900" y="4174236"/>
+            <a:ext cx="91440" cy="91440"/>
           </a:xfrm>
           <a:prstGeom prst="ellipse">
             <a:avLst/>
@@ -9176,8 +9426,8 @@
         </p:nvSpPr>
         <p:spPr>
           <a:xfrm>
-            <a:off x="8999982" y="4334256"/>
-            <a:ext cx="109728" cy="109728"/>
+            <a:off x="8609076" y="4174236"/>
+            <a:ext cx="91440" cy="91440"/>
           </a:xfrm>
           <a:prstGeom prst="ellipse">
             <a:avLst/>
@@ -9196,8 +9446,8 @@
         </p:nvSpPr>
         <p:spPr>
           <a:xfrm>
-            <a:off x="9269730" y="4334256"/>
-            <a:ext cx="109728" cy="109728"/>
+            <a:off x="8874252" y="4174236"/>
+            <a:ext cx="91440" cy="91440"/>
           </a:xfrm>
           <a:prstGeom prst="ellipse">
             <a:avLst/>
@@ -9216,8 +9466,8 @@
         </p:nvSpPr>
         <p:spPr>
           <a:xfrm>
-            <a:off x="9539478" y="4334256"/>
-            <a:ext cx="109728" cy="109728"/>
+            <a:off x="9139428" y="4174236"/>
+            <a:ext cx="91440" cy="91440"/>
           </a:xfrm>
           <a:prstGeom prst="ellipse">
             <a:avLst/>
@@ -9236,8 +9486,8 @@
         </p:nvSpPr>
         <p:spPr>
           <a:xfrm>
-            <a:off x="9809226" y="4334256"/>
-            <a:ext cx="109728" cy="109728"/>
+            <a:off x="9404604" y="4174236"/>
+            <a:ext cx="91440" cy="91440"/>
           </a:xfrm>
           <a:prstGeom prst="ellipse">
             <a:avLst/>
@@ -9256,8 +9506,8 @@
         </p:nvSpPr>
         <p:spPr>
           <a:xfrm>
-            <a:off x="10078974" y="4334256"/>
-            <a:ext cx="109728" cy="109728"/>
+            <a:off x="9669780" y="4174236"/>
+            <a:ext cx="91440" cy="91440"/>
           </a:xfrm>
           <a:prstGeom prst="ellipse">
             <a:avLst/>
@@ -9276,8 +9526,8 @@
         </p:nvSpPr>
         <p:spPr>
           <a:xfrm>
-            <a:off x="10348722" y="4334256"/>
-            <a:ext cx="109728" cy="109728"/>
+            <a:off x="9934956" y="4174236"/>
+            <a:ext cx="91440" cy="91440"/>
           </a:xfrm>
           <a:prstGeom prst="ellipse">
             <a:avLst/>
@@ -9296,8 +9546,8 @@
         </p:nvSpPr>
         <p:spPr>
           <a:xfrm>
-            <a:off x="10618470" y="4334256"/>
-            <a:ext cx="109728" cy="109728"/>
+            <a:off x="10200132" y="4174236"/>
+            <a:ext cx="91440" cy="91440"/>
           </a:xfrm>
           <a:prstGeom prst="ellipse">
             <a:avLst/>
@@ -9316,8 +9566,8 @@
         </p:nvSpPr>
         <p:spPr>
           <a:xfrm>
-            <a:off x="10888218" y="4334256"/>
-            <a:ext cx="109728" cy="109728"/>
+            <a:off x="10465308" y="4174236"/>
+            <a:ext cx="91440" cy="91440"/>
           </a:xfrm>
           <a:prstGeom prst="ellipse">
             <a:avLst/>
@@ -9336,8 +9586,8 @@
         </p:nvSpPr>
         <p:spPr>
           <a:xfrm>
-            <a:off x="11157966" y="4334256"/>
-            <a:ext cx="109728" cy="109728"/>
+            <a:off x="10730484" y="4174236"/>
+            <a:ext cx="91440" cy="91440"/>
           </a:xfrm>
           <a:prstGeom prst="ellipse">
             <a:avLst/>
@@ -9356,8 +9606,8 @@
         </p:nvSpPr>
         <p:spPr>
           <a:xfrm>
-            <a:off x="11427714" y="4334256"/>
-            <a:ext cx="109728" cy="109728"/>
+            <a:off x="10995660" y="4174236"/>
+            <a:ext cx="91440" cy="91440"/>
           </a:xfrm>
           <a:prstGeom prst="ellipse">
             <a:avLst/>
@@ -9376,8 +9626,8 @@
         </p:nvSpPr>
         <p:spPr>
           <a:xfrm>
-            <a:off x="11697462" y="4334256"/>
-            <a:ext cx="109728" cy="109728"/>
+            <a:off x="11260836" y="4174236"/>
+            <a:ext cx="91440" cy="91440"/>
           </a:xfrm>
           <a:prstGeom prst="ellipse">
             <a:avLst/>
@@ -9396,8 +9646,8 @@
         </p:nvSpPr>
         <p:spPr>
           <a:xfrm>
-            <a:off x="6572250" y="4700016"/>
-            <a:ext cx="109728" cy="109728"/>
+            <a:off x="11526012" y="4174236"/>
+            <a:ext cx="91440" cy="91440"/>
           </a:xfrm>
           <a:prstGeom prst="ellipse">
             <a:avLst/>
@@ -9416,8 +9666,8 @@
         </p:nvSpPr>
         <p:spPr>
           <a:xfrm>
-            <a:off x="6841998" y="4700016"/>
-            <a:ext cx="109728" cy="109728"/>
+            <a:off x="6487668" y="4512564"/>
+            <a:ext cx="91440" cy="91440"/>
           </a:xfrm>
           <a:prstGeom prst="ellipse">
             <a:avLst/>
@@ -9436,8 +9686,8 @@
         </p:nvSpPr>
         <p:spPr>
           <a:xfrm>
-            <a:off x="7111746" y="4700016"/>
-            <a:ext cx="109728" cy="109728"/>
+            <a:off x="6752844" y="4512564"/>
+            <a:ext cx="91440" cy="91440"/>
           </a:xfrm>
           <a:prstGeom prst="ellipse">
             <a:avLst/>
@@ -9456,8 +9706,8 @@
         </p:nvSpPr>
         <p:spPr>
           <a:xfrm>
-            <a:off x="7381494" y="4700016"/>
-            <a:ext cx="109728" cy="109728"/>
+            <a:off x="7018020" y="4512564"/>
+            <a:ext cx="91440" cy="91440"/>
           </a:xfrm>
           <a:prstGeom prst="ellipse">
             <a:avLst/>
@@ -9476,8 +9726,8 @@
         </p:nvSpPr>
         <p:spPr>
           <a:xfrm>
-            <a:off x="7651242" y="4700016"/>
-            <a:ext cx="109728" cy="109728"/>
+            <a:off x="7283196" y="4512564"/>
+            <a:ext cx="91440" cy="91440"/>
           </a:xfrm>
           <a:prstGeom prst="ellipse">
             <a:avLst/>
@@ -9496,8 +9746,8 @@
         </p:nvSpPr>
         <p:spPr>
           <a:xfrm>
-            <a:off x="7920990" y="4700016"/>
-            <a:ext cx="109728" cy="109728"/>
+            <a:off x="7548372" y="4512564"/>
+            <a:ext cx="91440" cy="91440"/>
           </a:xfrm>
           <a:prstGeom prst="ellipse">
             <a:avLst/>
@@ -9516,8 +9766,8 @@
         </p:nvSpPr>
         <p:spPr>
           <a:xfrm>
-            <a:off x="8190738" y="4700016"/>
-            <a:ext cx="109728" cy="109728"/>
+            <a:off x="7813548" y="4512564"/>
+            <a:ext cx="91440" cy="91440"/>
           </a:xfrm>
           <a:prstGeom prst="ellipse">
             <a:avLst/>
@@ -9536,8 +9786,8 @@
         </p:nvSpPr>
         <p:spPr>
           <a:xfrm>
-            <a:off x="8460486" y="4700016"/>
-            <a:ext cx="109728" cy="109728"/>
+            <a:off x="8078724" y="4512564"/>
+            <a:ext cx="91440" cy="91440"/>
           </a:xfrm>
           <a:prstGeom prst="ellipse">
             <a:avLst/>
@@ -9556,8 +9806,8 @@
         </p:nvSpPr>
         <p:spPr>
           <a:xfrm>
-            <a:off x="8730234" y="4700016"/>
-            <a:ext cx="109728" cy="109728"/>
+            <a:off x="8343900" y="4512564"/>
+            <a:ext cx="91440" cy="91440"/>
           </a:xfrm>
           <a:prstGeom prst="ellipse">
             <a:avLst/>
@@ -9576,8 +9826,8 @@
         </p:nvSpPr>
         <p:spPr>
           <a:xfrm>
-            <a:off x="8999982" y="4700016"/>
-            <a:ext cx="109728" cy="109728"/>
+            <a:off x="8609076" y="4512564"/>
+            <a:ext cx="91440" cy="91440"/>
           </a:xfrm>
           <a:prstGeom prst="ellipse">
             <a:avLst/>
@@ -9596,8 +9846,8 @@
         </p:nvSpPr>
         <p:spPr>
           <a:xfrm>
-            <a:off x="9269730" y="4700016"/>
-            <a:ext cx="109728" cy="109728"/>
+            <a:off x="8874252" y="4512564"/>
+            <a:ext cx="91440" cy="91440"/>
           </a:xfrm>
           <a:prstGeom prst="ellipse">
             <a:avLst/>
@@ -9616,8 +9866,8 @@
         </p:nvSpPr>
         <p:spPr>
           <a:xfrm>
-            <a:off x="9539478" y="4700016"/>
-            <a:ext cx="109728" cy="109728"/>
+            <a:off x="9139428" y="4512564"/>
+            <a:ext cx="91440" cy="91440"/>
           </a:xfrm>
           <a:prstGeom prst="ellipse">
             <a:avLst/>
@@ -9636,8 +9886,8 @@
         </p:nvSpPr>
         <p:spPr>
           <a:xfrm>
-            <a:off x="9809226" y="4700016"/>
-            <a:ext cx="109728" cy="109728"/>
+            <a:off x="9404604" y="4512564"/>
+            <a:ext cx="91440" cy="91440"/>
           </a:xfrm>
           <a:prstGeom prst="ellipse">
             <a:avLst/>
@@ -9656,8 +9906,8 @@
         </p:nvSpPr>
         <p:spPr>
           <a:xfrm>
-            <a:off x="10078974" y="4700016"/>
-            <a:ext cx="109728" cy="109728"/>
+            <a:off x="9669780" y="4512564"/>
+            <a:ext cx="91440" cy="91440"/>
           </a:xfrm>
           <a:prstGeom prst="ellipse">
             <a:avLst/>
@@ -9676,8 +9926,8 @@
         </p:nvSpPr>
         <p:spPr>
           <a:xfrm>
-            <a:off x="10348722" y="4700016"/>
-            <a:ext cx="109728" cy="109728"/>
+            <a:off x="9934956" y="4512564"/>
+            <a:ext cx="91440" cy="91440"/>
           </a:xfrm>
           <a:prstGeom prst="ellipse">
             <a:avLst/>
@@ -9696,8 +9946,8 @@
         </p:nvSpPr>
         <p:spPr>
           <a:xfrm>
-            <a:off x="10618470" y="4700016"/>
-            <a:ext cx="109728" cy="109728"/>
+            <a:off x="10200132" y="4512564"/>
+            <a:ext cx="91440" cy="91440"/>
           </a:xfrm>
           <a:prstGeom prst="ellipse">
             <a:avLst/>
@@ -9716,8 +9966,8 @@
         </p:nvSpPr>
         <p:spPr>
           <a:xfrm>
-            <a:off x="10888218" y="4700016"/>
-            <a:ext cx="109728" cy="109728"/>
+            <a:off x="10465308" y="4512564"/>
+            <a:ext cx="91440" cy="91440"/>
           </a:xfrm>
           <a:prstGeom prst="ellipse">
             <a:avLst/>
@@ -9736,8 +9986,8 @@
         </p:nvSpPr>
         <p:spPr>
           <a:xfrm>
-            <a:off x="11157966" y="4700016"/>
-            <a:ext cx="109728" cy="109728"/>
+            <a:off x="10730484" y="4512564"/>
+            <a:ext cx="91440" cy="91440"/>
           </a:xfrm>
           <a:prstGeom prst="ellipse">
             <a:avLst/>
@@ -9756,8 +10006,8 @@
         </p:nvSpPr>
         <p:spPr>
           <a:xfrm>
-            <a:off x="11427714" y="4700016"/>
-            <a:ext cx="109728" cy="109728"/>
+            <a:off x="10995660" y="4512564"/>
+            <a:ext cx="91440" cy="91440"/>
           </a:xfrm>
           <a:prstGeom prst="ellipse">
             <a:avLst/>
@@ -9776,8 +10026,8 @@
         </p:nvSpPr>
         <p:spPr>
           <a:xfrm>
-            <a:off x="11697462" y="4700016"/>
-            <a:ext cx="109728" cy="109728"/>
+            <a:off x="11260836" y="4512564"/>
+            <a:ext cx="91440" cy="91440"/>
           </a:xfrm>
           <a:prstGeom prst="ellipse">
             <a:avLst/>
@@ -9796,8 +10046,8 @@
         </p:nvSpPr>
         <p:spPr>
           <a:xfrm>
-            <a:off x="6572250" y="5065776"/>
-            <a:ext cx="109728" cy="109728"/>
+            <a:off x="11526012" y="4512564"/>
+            <a:ext cx="91440" cy="91440"/>
           </a:xfrm>
           <a:prstGeom prst="ellipse">
             <a:avLst/>
@@ -9816,8 +10066,8 @@
         </p:nvSpPr>
         <p:spPr>
           <a:xfrm>
-            <a:off x="6841998" y="5065776"/>
-            <a:ext cx="109728" cy="109728"/>
+            <a:off x="6487668" y="4850892"/>
+            <a:ext cx="91440" cy="91440"/>
           </a:xfrm>
           <a:prstGeom prst="ellipse">
             <a:avLst/>
@@ -9836,8 +10086,8 @@
         </p:nvSpPr>
         <p:spPr>
           <a:xfrm>
-            <a:off x="7111746" y="5065776"/>
-            <a:ext cx="109728" cy="109728"/>
+            <a:off x="6752844" y="4850892"/>
+            <a:ext cx="91440" cy="91440"/>
           </a:xfrm>
           <a:prstGeom prst="ellipse">
             <a:avLst/>
@@ -9856,8 +10106,8 @@
         </p:nvSpPr>
         <p:spPr>
           <a:xfrm>
-            <a:off x="7381494" y="5065776"/>
-            <a:ext cx="109728" cy="109728"/>
+            <a:off x="7018020" y="4850892"/>
+            <a:ext cx="91440" cy="91440"/>
           </a:xfrm>
           <a:prstGeom prst="ellipse">
             <a:avLst/>
@@ -9876,8 +10126,8 @@
         </p:nvSpPr>
         <p:spPr>
           <a:xfrm>
-            <a:off x="7651242" y="5065776"/>
-            <a:ext cx="109728" cy="109728"/>
+            <a:off x="7283196" y="4850892"/>
+            <a:ext cx="91440" cy="91440"/>
           </a:xfrm>
           <a:prstGeom prst="ellipse">
             <a:avLst/>
@@ -9896,8 +10146,8 @@
         </p:nvSpPr>
         <p:spPr>
           <a:xfrm>
-            <a:off x="7920990" y="5065776"/>
-            <a:ext cx="109728" cy="109728"/>
+            <a:off x="7548372" y="4850892"/>
+            <a:ext cx="91440" cy="91440"/>
           </a:xfrm>
           <a:prstGeom prst="ellipse">
             <a:avLst/>
@@ -9916,8 +10166,8 @@
         </p:nvSpPr>
         <p:spPr>
           <a:xfrm>
-            <a:off x="8190738" y="5065776"/>
-            <a:ext cx="109728" cy="109728"/>
+            <a:off x="7813548" y="4850892"/>
+            <a:ext cx="91440" cy="91440"/>
           </a:xfrm>
           <a:prstGeom prst="ellipse">
             <a:avLst/>
@@ -9936,8 +10186,8 @@
         </p:nvSpPr>
         <p:spPr>
           <a:xfrm>
-            <a:off x="8460486" y="5065776"/>
-            <a:ext cx="109728" cy="109728"/>
+            <a:off x="8078724" y="4850892"/>
+            <a:ext cx="91440" cy="91440"/>
           </a:xfrm>
           <a:prstGeom prst="ellipse">
             <a:avLst/>
@@ -9956,8 +10206,8 @@
         </p:nvSpPr>
         <p:spPr>
           <a:xfrm>
-            <a:off x="8730234" y="5065776"/>
-            <a:ext cx="109728" cy="109728"/>
+            <a:off x="8343900" y="4850892"/>
+            <a:ext cx="91440" cy="91440"/>
           </a:xfrm>
           <a:prstGeom prst="ellipse">
             <a:avLst/>
@@ -9976,8 +10226,8 @@
         </p:nvSpPr>
         <p:spPr>
           <a:xfrm>
-            <a:off x="8999982" y="5065776"/>
-            <a:ext cx="109728" cy="109728"/>
+            <a:off x="8609076" y="4850892"/>
+            <a:ext cx="91440" cy="91440"/>
           </a:xfrm>
           <a:prstGeom prst="ellipse">
             <a:avLst/>
@@ -9996,8 +10246,8 @@
         </p:nvSpPr>
         <p:spPr>
           <a:xfrm>
-            <a:off x="9269730" y="5065776"/>
-            <a:ext cx="109728" cy="109728"/>
+            <a:off x="8874252" y="4850892"/>
+            <a:ext cx="91440" cy="91440"/>
           </a:xfrm>
           <a:prstGeom prst="ellipse">
             <a:avLst/>
@@ -10016,8 +10266,8 @@
         </p:nvSpPr>
         <p:spPr>
           <a:xfrm>
-            <a:off x="9539478" y="5065776"/>
-            <a:ext cx="109728" cy="109728"/>
+            <a:off x="9139428" y="4850892"/>
+            <a:ext cx="91440" cy="91440"/>
           </a:xfrm>
           <a:prstGeom prst="ellipse">
             <a:avLst/>
@@ -10036,8 +10286,8 @@
         </p:nvSpPr>
         <p:spPr>
           <a:xfrm>
-            <a:off x="9809226" y="5065776"/>
-            <a:ext cx="109728" cy="109728"/>
+            <a:off x="9404604" y="4850892"/>
+            <a:ext cx="91440" cy="91440"/>
           </a:xfrm>
           <a:prstGeom prst="ellipse">
             <a:avLst/>
@@ -10056,8 +10306,8 @@
         </p:nvSpPr>
         <p:spPr>
           <a:xfrm>
-            <a:off x="10078974" y="5065776"/>
-            <a:ext cx="109728" cy="109728"/>
+            <a:off x="9669780" y="4850892"/>
+            <a:ext cx="91440" cy="91440"/>
           </a:xfrm>
           <a:prstGeom prst="ellipse">
             <a:avLst/>
@@ -10076,8 +10326,8 @@
         </p:nvSpPr>
         <p:spPr>
           <a:xfrm>
-            <a:off x="10348722" y="5065776"/>
-            <a:ext cx="109728" cy="109728"/>
+            <a:off x="9934956" y="4850892"/>
+            <a:ext cx="91440" cy="91440"/>
           </a:xfrm>
           <a:prstGeom prst="ellipse">
             <a:avLst/>
@@ -10096,8 +10346,8 @@
         </p:nvSpPr>
         <p:spPr>
           <a:xfrm>
-            <a:off x="10618470" y="5065776"/>
-            <a:ext cx="109728" cy="109728"/>
+            <a:off x="10200132" y="4850892"/>
+            <a:ext cx="91440" cy="91440"/>
           </a:xfrm>
           <a:prstGeom prst="ellipse">
             <a:avLst/>
@@ -10116,8 +10366,8 @@
         </p:nvSpPr>
         <p:spPr>
           <a:xfrm>
-            <a:off x="10888218" y="5065776"/>
-            <a:ext cx="109728" cy="109728"/>
+            <a:off x="10465308" y="4850892"/>
+            <a:ext cx="91440" cy="91440"/>
           </a:xfrm>
           <a:prstGeom prst="ellipse">
             <a:avLst/>
@@ -10136,8 +10386,8 @@
         </p:nvSpPr>
         <p:spPr>
           <a:xfrm>
-            <a:off x="11157966" y="5065776"/>
-            <a:ext cx="109728" cy="109728"/>
+            <a:off x="10730484" y="4850892"/>
+            <a:ext cx="91440" cy="91440"/>
           </a:xfrm>
           <a:prstGeom prst="ellipse">
             <a:avLst/>
@@ -10156,8 +10406,8 @@
         </p:nvSpPr>
         <p:spPr>
           <a:xfrm>
-            <a:off x="11427714" y="5065776"/>
-            <a:ext cx="109728" cy="109728"/>
+            <a:off x="10995660" y="4850892"/>
+            <a:ext cx="91440" cy="91440"/>
           </a:xfrm>
           <a:prstGeom prst="ellipse">
             <a:avLst/>
@@ -10176,8 +10426,8 @@
         </p:nvSpPr>
         <p:spPr>
           <a:xfrm>
-            <a:off x="11697462" y="5065776"/>
-            <a:ext cx="109728" cy="109728"/>
+            <a:off x="11260836" y="4850892"/>
+            <a:ext cx="91440" cy="91440"/>
           </a:xfrm>
           <a:prstGeom prst="ellipse">
             <a:avLst/>
@@ -10196,8 +10446,8 @@
         </p:nvSpPr>
         <p:spPr>
           <a:xfrm>
-            <a:off x="6572250" y="5431536"/>
-            <a:ext cx="109728" cy="109728"/>
+            <a:off x="11526012" y="4850892"/>
+            <a:ext cx="91440" cy="91440"/>
           </a:xfrm>
           <a:prstGeom prst="ellipse">
             <a:avLst/>
@@ -10216,8 +10466,8 @@
         </p:nvSpPr>
         <p:spPr>
           <a:xfrm>
-            <a:off x="6841998" y="5431536"/>
-            <a:ext cx="109728" cy="109728"/>
+            <a:off x="6487668" y="5189220"/>
+            <a:ext cx="91440" cy="91440"/>
           </a:xfrm>
           <a:prstGeom prst="ellipse">
             <a:avLst/>
@@ -10236,8 +10486,8 @@
         </p:nvSpPr>
         <p:spPr>
           <a:xfrm>
-            <a:off x="7111746" y="5431536"/>
-            <a:ext cx="109728" cy="109728"/>
+            <a:off x="6752844" y="5189220"/>
+            <a:ext cx="91440" cy="91440"/>
           </a:xfrm>
           <a:prstGeom prst="ellipse">
             <a:avLst/>
@@ -10256,8 +10506,8 @@
         </p:nvSpPr>
         <p:spPr>
           <a:xfrm>
-            <a:off x="7381494" y="5431536"/>
-            <a:ext cx="109728" cy="109728"/>
+            <a:off x="7018020" y="5189220"/>
+            <a:ext cx="91440" cy="91440"/>
           </a:xfrm>
           <a:prstGeom prst="ellipse">
             <a:avLst/>
@@ -10276,8 +10526,8 @@
         </p:nvSpPr>
         <p:spPr>
           <a:xfrm>
-            <a:off x="7651242" y="5431536"/>
-            <a:ext cx="109728" cy="109728"/>
+            <a:off x="7283196" y="5189220"/>
+            <a:ext cx="91440" cy="91440"/>
           </a:xfrm>
           <a:prstGeom prst="ellipse">
             <a:avLst/>
@@ -10296,8 +10546,8 @@
         </p:nvSpPr>
         <p:spPr>
           <a:xfrm>
-            <a:off x="7920990" y="5431536"/>
-            <a:ext cx="109728" cy="109728"/>
+            <a:off x="7548372" y="5189220"/>
+            <a:ext cx="91440" cy="91440"/>
           </a:xfrm>
           <a:prstGeom prst="ellipse">
             <a:avLst/>
@@ -10316,8 +10566,8 @@
         </p:nvSpPr>
         <p:spPr>
           <a:xfrm>
-            <a:off x="8190738" y="5431536"/>
-            <a:ext cx="109728" cy="109728"/>
+            <a:off x="7813548" y="5189220"/>
+            <a:ext cx="91440" cy="91440"/>
           </a:xfrm>
           <a:prstGeom prst="ellipse">
             <a:avLst/>
@@ -10336,8 +10586,8 @@
         </p:nvSpPr>
         <p:spPr>
           <a:xfrm>
-            <a:off x="8460486" y="5431536"/>
-            <a:ext cx="109728" cy="109728"/>
+            <a:off x="8078724" y="5189220"/>
+            <a:ext cx="91440" cy="91440"/>
           </a:xfrm>
           <a:prstGeom prst="ellipse">
             <a:avLst/>
@@ -10356,8 +10606,8 @@
         </p:nvSpPr>
         <p:spPr>
           <a:xfrm>
-            <a:off x="8730234" y="5431536"/>
-            <a:ext cx="109728" cy="109728"/>
+            <a:off x="8343900" y="5189220"/>
+            <a:ext cx="91440" cy="91440"/>
           </a:xfrm>
           <a:prstGeom prst="ellipse">
             <a:avLst/>
@@ -10376,8 +10626,8 @@
         </p:nvSpPr>
         <p:spPr>
           <a:xfrm>
-            <a:off x="8999982" y="5431536"/>
-            <a:ext cx="109728" cy="109728"/>
+            <a:off x="8609076" y="5189220"/>
+            <a:ext cx="91440" cy="91440"/>
           </a:xfrm>
           <a:prstGeom prst="ellipse">
             <a:avLst/>
@@ -10396,8 +10646,8 @@
         </p:nvSpPr>
         <p:spPr>
           <a:xfrm>
-            <a:off x="9269730" y="5431536"/>
-            <a:ext cx="109728" cy="109728"/>
+            <a:off x="8874252" y="5189220"/>
+            <a:ext cx="91440" cy="91440"/>
           </a:xfrm>
           <a:prstGeom prst="ellipse">
             <a:avLst/>
@@ -10416,8 +10666,8 @@
         </p:nvSpPr>
         <p:spPr>
           <a:xfrm>
-            <a:off x="9539478" y="5431536"/>
-            <a:ext cx="109728" cy="109728"/>
+            <a:off x="9139428" y="5189220"/>
+            <a:ext cx="91440" cy="91440"/>
           </a:xfrm>
           <a:prstGeom prst="ellipse">
             <a:avLst/>
@@ -10436,8 +10686,8 @@
         </p:nvSpPr>
         <p:spPr>
           <a:xfrm>
-            <a:off x="9809226" y="5431536"/>
-            <a:ext cx="109728" cy="109728"/>
+            <a:off x="9404604" y="5189220"/>
+            <a:ext cx="91440" cy="91440"/>
           </a:xfrm>
           <a:prstGeom prst="ellipse">
             <a:avLst/>
@@ -10456,8 +10706,8 @@
         </p:nvSpPr>
         <p:spPr>
           <a:xfrm>
-            <a:off x="10078974" y="5431536"/>
-            <a:ext cx="109728" cy="109728"/>
+            <a:off x="9669780" y="5189220"/>
+            <a:ext cx="91440" cy="91440"/>
           </a:xfrm>
           <a:prstGeom prst="ellipse">
             <a:avLst/>
@@ -10476,8 +10726,8 @@
         </p:nvSpPr>
         <p:spPr>
           <a:xfrm>
-            <a:off x="10348722" y="5431536"/>
-            <a:ext cx="109728" cy="109728"/>
+            <a:off x="9934956" y="5189220"/>
+            <a:ext cx="91440" cy="91440"/>
           </a:xfrm>
           <a:prstGeom prst="ellipse">
             <a:avLst/>
@@ -10496,8 +10746,8 @@
         </p:nvSpPr>
         <p:spPr>
           <a:xfrm>
-            <a:off x="10618470" y="5431536"/>
-            <a:ext cx="109728" cy="109728"/>
+            <a:off x="10200132" y="5189220"/>
+            <a:ext cx="91440" cy="91440"/>
           </a:xfrm>
           <a:prstGeom prst="ellipse">
             <a:avLst/>
@@ -10516,8 +10766,8 @@
         </p:nvSpPr>
         <p:spPr>
           <a:xfrm>
-            <a:off x="10888218" y="5431536"/>
-            <a:ext cx="109728" cy="109728"/>
+            <a:off x="10465308" y="5189220"/>
+            <a:ext cx="91440" cy="91440"/>
           </a:xfrm>
           <a:prstGeom prst="ellipse">
             <a:avLst/>
@@ -10536,8 +10786,8 @@
         </p:nvSpPr>
         <p:spPr>
           <a:xfrm>
-            <a:off x="11157966" y="5431536"/>
-            <a:ext cx="109728" cy="109728"/>
+            <a:off x="10730484" y="5189220"/>
+            <a:ext cx="91440" cy="91440"/>
           </a:xfrm>
           <a:prstGeom prst="ellipse">
             <a:avLst/>
@@ -10556,8 +10806,8 @@
         </p:nvSpPr>
         <p:spPr>
           <a:xfrm>
-            <a:off x="11427714" y="5431536"/>
-            <a:ext cx="109728" cy="109728"/>
+            <a:off x="10995660" y="5189220"/>
+            <a:ext cx="91440" cy="91440"/>
           </a:xfrm>
           <a:prstGeom prst="ellipse">
             <a:avLst/>
@@ -10576,8 +10826,8 @@
         </p:nvSpPr>
         <p:spPr>
           <a:xfrm>
-            <a:off x="11697462" y="5431536"/>
-            <a:ext cx="109728" cy="109728"/>
+            <a:off x="11260836" y="5189220"/>
+            <a:ext cx="91440" cy="91440"/>
           </a:xfrm>
           <a:prstGeom prst="ellipse">
             <a:avLst/>
@@ -10596,8 +10846,8 @@
         </p:nvSpPr>
         <p:spPr>
           <a:xfrm>
-            <a:off x="6572250" y="5797296"/>
-            <a:ext cx="109728" cy="109728"/>
+            <a:off x="11526012" y="5189220"/>
+            <a:ext cx="91440" cy="91440"/>
           </a:xfrm>
           <a:prstGeom prst="ellipse">
             <a:avLst/>
@@ -10616,8 +10866,8 @@
         </p:nvSpPr>
         <p:spPr>
           <a:xfrm>
-            <a:off x="6841998" y="5797296"/>
-            <a:ext cx="109728" cy="109728"/>
+            <a:off x="6487668" y="5527548"/>
+            <a:ext cx="91440" cy="91440"/>
           </a:xfrm>
           <a:prstGeom prst="ellipse">
             <a:avLst/>
@@ -10636,8 +10886,8 @@
         </p:nvSpPr>
         <p:spPr>
           <a:xfrm>
-            <a:off x="7111746" y="5797296"/>
-            <a:ext cx="109728" cy="109728"/>
+            <a:off x="6752844" y="5527548"/>
+            <a:ext cx="91440" cy="91440"/>
           </a:xfrm>
           <a:prstGeom prst="ellipse">
             <a:avLst/>
@@ -10656,8 +10906,8 @@
         </p:nvSpPr>
         <p:spPr>
           <a:xfrm>
-            <a:off x="7381494" y="5797296"/>
-            <a:ext cx="109728" cy="109728"/>
+            <a:off x="7018020" y="5527548"/>
+            <a:ext cx="91440" cy="91440"/>
           </a:xfrm>
           <a:prstGeom prst="ellipse">
             <a:avLst/>
@@ -10676,8 +10926,8 @@
         </p:nvSpPr>
         <p:spPr>
           <a:xfrm>
-            <a:off x="7651242" y="5797296"/>
-            <a:ext cx="109728" cy="109728"/>
+            <a:off x="7283196" y="5527548"/>
+            <a:ext cx="91440" cy="91440"/>
           </a:xfrm>
           <a:prstGeom prst="ellipse">
             <a:avLst/>
@@ -10696,8 +10946,8 @@
         </p:nvSpPr>
         <p:spPr>
           <a:xfrm>
-            <a:off x="7920990" y="5797296"/>
-            <a:ext cx="109728" cy="109728"/>
+            <a:off x="7548372" y="5527548"/>
+            <a:ext cx="91440" cy="91440"/>
           </a:xfrm>
           <a:prstGeom prst="ellipse">
             <a:avLst/>
@@ -10716,8 +10966,8 @@
         </p:nvSpPr>
         <p:spPr>
           <a:xfrm>
-            <a:off x="8190738" y="5797296"/>
-            <a:ext cx="109728" cy="109728"/>
+            <a:off x="7813548" y="5527548"/>
+            <a:ext cx="91440" cy="91440"/>
           </a:xfrm>
           <a:prstGeom prst="ellipse">
             <a:avLst/>
@@ -10736,8 +10986,8 @@
         </p:nvSpPr>
         <p:spPr>
           <a:xfrm>
-            <a:off x="8460486" y="5797296"/>
-            <a:ext cx="109728" cy="109728"/>
+            <a:off x="8078724" y="5527548"/>
+            <a:ext cx="91440" cy="91440"/>
           </a:xfrm>
           <a:prstGeom prst="ellipse">
             <a:avLst/>
@@ -10756,8 +11006,8 @@
         </p:nvSpPr>
         <p:spPr>
           <a:xfrm>
-            <a:off x="8730234" y="5797296"/>
-            <a:ext cx="109728" cy="109728"/>
+            <a:off x="8343900" y="5527548"/>
+            <a:ext cx="91440" cy="91440"/>
           </a:xfrm>
           <a:prstGeom prst="ellipse">
             <a:avLst/>
@@ -10776,8 +11026,8 @@
         </p:nvSpPr>
         <p:spPr>
           <a:xfrm>
-            <a:off x="8999982" y="5797296"/>
-            <a:ext cx="109728" cy="109728"/>
+            <a:off x="8609076" y="5527548"/>
+            <a:ext cx="91440" cy="91440"/>
           </a:xfrm>
           <a:prstGeom prst="ellipse">
             <a:avLst/>
@@ -10796,8 +11046,8 @@
         </p:nvSpPr>
         <p:spPr>
           <a:xfrm>
-            <a:off x="9269730" y="5797296"/>
-            <a:ext cx="109728" cy="109728"/>
+            <a:off x="8874252" y="5527548"/>
+            <a:ext cx="91440" cy="91440"/>
           </a:xfrm>
           <a:prstGeom prst="ellipse">
             <a:avLst/>
@@ -10816,8 +11066,8 @@
         </p:nvSpPr>
         <p:spPr>
           <a:xfrm>
-            <a:off x="9539478" y="5797296"/>
-            <a:ext cx="109728" cy="109728"/>
+            <a:off x="9139428" y="5527548"/>
+            <a:ext cx="91440" cy="91440"/>
           </a:xfrm>
           <a:prstGeom prst="ellipse">
             <a:avLst/>
@@ -10836,8 +11086,8 @@
         </p:nvSpPr>
         <p:spPr>
           <a:xfrm>
-            <a:off x="9809226" y="5797296"/>
-            <a:ext cx="109728" cy="109728"/>
+            <a:off x="9404604" y="5527548"/>
+            <a:ext cx="91440" cy="91440"/>
           </a:xfrm>
           <a:prstGeom prst="ellipse">
             <a:avLst/>
@@ -10856,8 +11106,8 @@
         </p:nvSpPr>
         <p:spPr>
           <a:xfrm>
-            <a:off x="10078974" y="5797296"/>
-            <a:ext cx="109728" cy="109728"/>
+            <a:off x="9669780" y="5527548"/>
+            <a:ext cx="91440" cy="91440"/>
           </a:xfrm>
           <a:prstGeom prst="ellipse">
             <a:avLst/>
@@ -10876,8 +11126,8 @@
         </p:nvSpPr>
         <p:spPr>
           <a:xfrm>
-            <a:off x="10348722" y="5797296"/>
-            <a:ext cx="109728" cy="109728"/>
+            <a:off x="9934956" y="5527548"/>
+            <a:ext cx="91440" cy="91440"/>
           </a:xfrm>
           <a:prstGeom prst="ellipse">
             <a:avLst/>
@@ -10896,8 +11146,8 @@
         </p:nvSpPr>
         <p:spPr>
           <a:xfrm>
-            <a:off x="10618470" y="5797296"/>
-            <a:ext cx="109728" cy="109728"/>
+            <a:off x="10200132" y="5527548"/>
+            <a:ext cx="91440" cy="91440"/>
           </a:xfrm>
           <a:prstGeom prst="ellipse">
             <a:avLst/>
@@ -10916,8 +11166,8 @@
         </p:nvSpPr>
         <p:spPr>
           <a:xfrm>
-            <a:off x="10888218" y="5797296"/>
-            <a:ext cx="109728" cy="109728"/>
+            <a:off x="10465308" y="5527548"/>
+            <a:ext cx="91440" cy="91440"/>
           </a:xfrm>
           <a:prstGeom prst="ellipse">
             <a:avLst/>
@@ -10936,8 +11186,8 @@
         </p:nvSpPr>
         <p:spPr>
           <a:xfrm>
-            <a:off x="11157966" y="5797296"/>
-            <a:ext cx="109728" cy="109728"/>
+            <a:off x="10730484" y="5527548"/>
+            <a:ext cx="91440" cy="91440"/>
           </a:xfrm>
           <a:prstGeom prst="ellipse">
             <a:avLst/>
@@ -10956,8 +11206,8 @@
         </p:nvSpPr>
         <p:spPr>
           <a:xfrm>
-            <a:off x="11427714" y="5797296"/>
-            <a:ext cx="109728" cy="109728"/>
+            <a:off x="10995660" y="5527548"/>
+            <a:ext cx="91440" cy="91440"/>
           </a:xfrm>
           <a:prstGeom prst="ellipse">
             <a:avLst/>
@@ -10976,8 +11226,8 @@
         </p:nvSpPr>
         <p:spPr>
           <a:xfrm>
-            <a:off x="11697462" y="5797296"/>
-            <a:ext cx="109728" cy="109728"/>
+            <a:off x="11260836" y="5527548"/>
+            <a:ext cx="91440" cy="91440"/>
           </a:xfrm>
           <a:prstGeom prst="ellipse">
             <a:avLst/>
@@ -10996,8 +11246,8 @@
         </p:nvSpPr>
         <p:spPr>
           <a:xfrm>
-            <a:off x="6572250" y="6163056"/>
-            <a:ext cx="109728" cy="109728"/>
+            <a:off x="11526012" y="5527548"/>
+            <a:ext cx="91440" cy="91440"/>
           </a:xfrm>
           <a:prstGeom prst="ellipse">
             <a:avLst/>
@@ -11016,8 +11266,8 @@
         </p:nvSpPr>
         <p:spPr>
           <a:xfrm>
-            <a:off x="6841998" y="6163056"/>
-            <a:ext cx="109728" cy="109728"/>
+            <a:off x="6487668" y="5865876"/>
+            <a:ext cx="91440" cy="91440"/>
           </a:xfrm>
           <a:prstGeom prst="ellipse">
             <a:avLst/>
@@ -11036,8 +11286,8 @@
         </p:nvSpPr>
         <p:spPr>
           <a:xfrm>
-            <a:off x="7111746" y="6163056"/>
-            <a:ext cx="109728" cy="109728"/>
+            <a:off x="6752844" y="5865876"/>
+            <a:ext cx="91440" cy="91440"/>
           </a:xfrm>
           <a:prstGeom prst="ellipse">
             <a:avLst/>
@@ -11056,8 +11306,8 @@
         </p:nvSpPr>
         <p:spPr>
           <a:xfrm>
-            <a:off x="7381494" y="6163056"/>
-            <a:ext cx="109728" cy="109728"/>
+            <a:off x="7018020" y="5865876"/>
+            <a:ext cx="91440" cy="91440"/>
           </a:xfrm>
           <a:prstGeom prst="ellipse">
             <a:avLst/>
@@ -11076,8 +11326,8 @@
         </p:nvSpPr>
         <p:spPr>
           <a:xfrm>
-            <a:off x="7651242" y="6163056"/>
-            <a:ext cx="109728" cy="109728"/>
+            <a:off x="7283196" y="5865876"/>
+            <a:ext cx="91440" cy="91440"/>
           </a:xfrm>
           <a:prstGeom prst="ellipse">
             <a:avLst/>
@@ -11096,8 +11346,8 @@
         </p:nvSpPr>
         <p:spPr>
           <a:xfrm>
-            <a:off x="7920990" y="6163056"/>
-            <a:ext cx="109728" cy="109728"/>
+            <a:off x="7548372" y="5865876"/>
+            <a:ext cx="91440" cy="91440"/>
           </a:xfrm>
           <a:prstGeom prst="ellipse">
             <a:avLst/>
@@ -11116,8 +11366,8 @@
         </p:nvSpPr>
         <p:spPr>
           <a:xfrm>
-            <a:off x="8190738" y="6163056"/>
-            <a:ext cx="109728" cy="109728"/>
+            <a:off x="7813548" y="5865876"/>
+            <a:ext cx="91440" cy="91440"/>
           </a:xfrm>
           <a:prstGeom prst="ellipse">
             <a:avLst/>
@@ -11136,8 +11386,8 @@
         </p:nvSpPr>
         <p:spPr>
           <a:xfrm>
-            <a:off x="8460486" y="6163056"/>
-            <a:ext cx="109728" cy="109728"/>
+            <a:off x="8078724" y="5865876"/>
+            <a:ext cx="91440" cy="91440"/>
           </a:xfrm>
           <a:prstGeom prst="ellipse">
             <a:avLst/>
@@ -11156,8 +11406,8 @@
         </p:nvSpPr>
         <p:spPr>
           <a:xfrm>
-            <a:off x="8730234" y="6163056"/>
-            <a:ext cx="109728" cy="109728"/>
+            <a:off x="8343900" y="5865876"/>
+            <a:ext cx="91440" cy="91440"/>
           </a:xfrm>
           <a:prstGeom prst="ellipse">
             <a:avLst/>
@@ -11176,8 +11426,8 @@
         </p:nvSpPr>
         <p:spPr>
           <a:xfrm>
-            <a:off x="8999982" y="6163056"/>
-            <a:ext cx="109728" cy="109728"/>
+            <a:off x="8609076" y="5865876"/>
+            <a:ext cx="91440" cy="91440"/>
           </a:xfrm>
           <a:prstGeom prst="ellipse">
             <a:avLst/>
@@ -11196,8 +11446,8 @@
         </p:nvSpPr>
         <p:spPr>
           <a:xfrm>
-            <a:off x="9269730" y="6163056"/>
-            <a:ext cx="109728" cy="109728"/>
+            <a:off x="8874252" y="5865876"/>
+            <a:ext cx="91440" cy="91440"/>
           </a:xfrm>
           <a:prstGeom prst="ellipse">
             <a:avLst/>
@@ -11216,8 +11466,8 @@
         </p:nvSpPr>
         <p:spPr>
           <a:xfrm>
-            <a:off x="9539478" y="6163056"/>
-            <a:ext cx="109728" cy="109728"/>
+            <a:off x="9139428" y="5865876"/>
+            <a:ext cx="91440" cy="91440"/>
           </a:xfrm>
           <a:prstGeom prst="ellipse">
             <a:avLst/>
@@ -11236,8 +11486,8 @@
         </p:nvSpPr>
         <p:spPr>
           <a:xfrm>
-            <a:off x="9809226" y="6163056"/>
-            <a:ext cx="109728" cy="109728"/>
+            <a:off x="9404604" y="5865876"/>
+            <a:ext cx="91440" cy="91440"/>
           </a:xfrm>
           <a:prstGeom prst="ellipse">
             <a:avLst/>
@@ -11256,8 +11506,8 @@
         </p:nvSpPr>
         <p:spPr>
           <a:xfrm>
-            <a:off x="10078974" y="6163056"/>
-            <a:ext cx="109728" cy="109728"/>
+            <a:off x="9669780" y="5865876"/>
+            <a:ext cx="91440" cy="91440"/>
           </a:xfrm>
           <a:prstGeom prst="ellipse">
             <a:avLst/>
@@ -11276,8 +11526,8 @@
         </p:nvSpPr>
         <p:spPr>
           <a:xfrm>
-            <a:off x="10348722" y="6163056"/>
-            <a:ext cx="109728" cy="109728"/>
+            <a:off x="9934956" y="5865876"/>
+            <a:ext cx="91440" cy="91440"/>
           </a:xfrm>
           <a:prstGeom prst="ellipse">
             <a:avLst/>
@@ -11296,8 +11546,8 @@
         </p:nvSpPr>
         <p:spPr>
           <a:xfrm>
-            <a:off x="10618470" y="6163056"/>
-            <a:ext cx="109728" cy="109728"/>
+            <a:off x="10200132" y="5865876"/>
+            <a:ext cx="91440" cy="91440"/>
           </a:xfrm>
           <a:prstGeom prst="ellipse">
             <a:avLst/>
@@ -11316,8 +11566,8 @@
         </p:nvSpPr>
         <p:spPr>
           <a:xfrm>
-            <a:off x="10888218" y="6163056"/>
-            <a:ext cx="109728" cy="109728"/>
+            <a:off x="10465308" y="5865876"/>
+            <a:ext cx="91440" cy="91440"/>
           </a:xfrm>
           <a:prstGeom prst="ellipse">
             <a:avLst/>
@@ -11336,8 +11586,8 @@
         </p:nvSpPr>
         <p:spPr>
           <a:xfrm>
-            <a:off x="11157966" y="6163056"/>
-            <a:ext cx="109728" cy="109728"/>
+            <a:off x="10730484" y="5865876"/>
+            <a:ext cx="91440" cy="91440"/>
           </a:xfrm>
           <a:prstGeom prst="ellipse">
             <a:avLst/>
@@ -11356,8 +11606,8 @@
         </p:nvSpPr>
         <p:spPr>
           <a:xfrm>
-            <a:off x="11427714" y="6163056"/>
-            <a:ext cx="109728" cy="109728"/>
+            <a:off x="10995660" y="5865876"/>
+            <a:ext cx="91440" cy="91440"/>
           </a:xfrm>
           <a:prstGeom prst="ellipse">
             <a:avLst/>
@@ -11376,40 +11626,60 @@
         </p:nvSpPr>
         <p:spPr>
           <a:xfrm>
-            <a:off x="11697462" y="6163056"/>
-            <a:ext cx="109728" cy="109728"/>
-          </a:xfrm>
-          <a:prstGeom prst="ellipse">
-            <a:avLst/>
-          </a:prstGeom>
-          <a:solidFill>
-            <a:srgbClr val="22E07A"/>
-          </a:solidFill>
-          <a:ln/>
-        </p:spPr>
-      </p:sp>
-      <p:sp>
-        <p:nvSpPr>
-          <p:cNvPr id="207" name="Text 205"/>
-          <p:cNvSpPr txBox="1"/>
-          <p:nvPr/>
-        </p:nvSpPr>
-        <p:spPr>
-          <a:xfrm>
-            <a:off x="6492240" y="6492240"/>
-            <a:ext cx="5394960" cy="274320"/>
-          </a:xfrm>
-          <a:prstGeom prst="rect">
-            <a:avLst/>
-          </a:prstGeom>
-          <a:noFill/>
-          <a:ln/>
-        </p:spPr>
-        <p:txBody>
-          <a:bodyPr wrap="square" lIns="0" tIns="0" rIns="0" bIns="0" rtlCol="0" anchor="ctr"/>
-          <a:lstStyle/>
-          <a:p>
-            <a:pPr algn="r" indent="0" marL="0">
+            <a:off x="11260836" y="5865876"/>
+            <a:ext cx="91440" cy="91440"/>
+          </a:xfrm>
+          <a:prstGeom prst="ellipse">
+            <a:avLst/>
+          </a:prstGeom>
+          <a:solidFill>
+            <a:srgbClr val="22E07A"/>
+          </a:solidFill>
+          <a:ln/>
+        </p:spPr>
+      </p:sp>
+      <p:sp>
+        <p:nvSpPr>
+          <p:cNvPr id="207" name="Shape 205"/>
+          <p:cNvSpPr/>
+          <p:nvPr/>
+        </p:nvSpPr>
+        <p:spPr>
+          <a:xfrm>
+            <a:off x="11526012" y="5865876"/>
+            <a:ext cx="91440" cy="91440"/>
+          </a:xfrm>
+          <a:prstGeom prst="ellipse">
+            <a:avLst/>
+          </a:prstGeom>
+          <a:solidFill>
+            <a:srgbClr val="22E07A"/>
+          </a:solidFill>
+          <a:ln/>
+        </p:spPr>
+      </p:sp>
+      <p:sp>
+        <p:nvSpPr>
+          <p:cNvPr id="208" name="Text 206"/>
+          <p:cNvSpPr txBox="1"/>
+          <p:nvPr/>
+        </p:nvSpPr>
+        <p:spPr>
+          <a:xfrm>
+            <a:off x="6400800" y="6172200"/>
+            <a:ext cx="5303520" cy="274320"/>
+          </a:xfrm>
+          <a:prstGeom prst="rect">
+            <a:avLst/>
+          </a:prstGeom>
+          <a:noFill/>
+          <a:ln/>
+        </p:spPr>
+        <p:txBody>
+          <a:bodyPr wrap="square" lIns="0" tIns="0" rIns="0" bIns="0" rtlCol="0" anchor="ctr"/>
+          <a:lstStyle/>
+          <a:p>
+            <a:pPr algn="l" indent="0" marL="0">
               <a:buNone/>
             </a:pPr>
             <a:r>
@@ -11421,7 +11691,7 @@
                 <a:ea typeface="Consolas" pitchFamily="34" charset="-122"/>
                 <a:cs typeface="Consolas" pitchFamily="34" charset="-120"/>
               </a:rPr>
-              <a:t>• patched &amp; verified   • compromised</a:t>
+              <a:t>• patched &amp; verified    ⬤ one device PreVent is patching today</a:t>
             </a:r>
             <a:endParaRPr lang="en-US" sz="900" dirty="0"/>
           </a:p>
@@ -11461,7 +11731,7 @@
         <p:spPr>
           <a:xfrm>
             <a:off x="457200" y="365760"/>
-            <a:ext cx="11247120" cy="274320"/>
+            <a:ext cx="11274552" cy="274320"/>
           </a:xfrm>
           <a:prstGeom prst="rect">
             <a:avLst/>
@@ -11513,8 +11783,8 @@
         </p:nvSpPr>
         <p:spPr>
           <a:xfrm>
-            <a:off x="457200" y="868680"/>
-            <a:ext cx="11247120" cy="2194560"/>
+            <a:off x="457200" y="914400"/>
+            <a:ext cx="11274552" cy="2103120"/>
           </a:xfrm>
           <a:prstGeom prst="rect">
             <a:avLst/>
@@ -11530,7 +11800,7 @@
               <a:buNone/>
             </a:pPr>
             <a:r>
-              <a:rPr lang="en-US" sz="6000" b="1" spc="-200" kern="0" dirty="0">
+              <a:rPr lang="en-US" sz="5400" b="1" spc="-200" kern="0" dirty="0">
                 <a:solidFill>
                   <a:srgbClr val="FAFAFA"/>
                 </a:solidFill>
@@ -11545,7 +11815,7 @@
               <a:buNone/>
             </a:pPr>
             <a:r>
-              <a:rPr lang="en-US" sz="6000" b="1" i="1" spc="-200" kern="0" dirty="0">
+              <a:rPr lang="en-US" sz="5400" b="1" i="1" spc="-200" kern="0" dirty="0">
                 <a:solidFill>
                   <a:srgbClr val="FF2D4A"/>
                 </a:solidFill>
@@ -11555,7 +11825,7 @@
               </a:rPr>
               <a:t>watch themselves.</a:t>
             </a:r>
-            <a:endParaRPr lang="en-US" sz="6000" dirty="0"/>
+            <a:endParaRPr lang="en-US" sz="5400" dirty="0"/>
           </a:p>
         </p:txBody>
       </p:sp>
@@ -11567,8 +11837,8 @@
         </p:nvSpPr>
         <p:spPr>
           <a:xfrm>
-            <a:off x="457200" y="3108960"/>
-            <a:ext cx="11247120" cy="365760"/>
+            <a:off x="457200" y="3017520"/>
+            <a:ext cx="11274552" cy="365760"/>
           </a:xfrm>
           <a:prstGeom prst="rect">
             <a:avLst/>
@@ -11584,7 +11854,7 @@
               <a:buNone/>
             </a:pPr>
             <a:r>
-              <a:rPr lang="en-US" sz="2000" i="1" dirty="0">
+              <a:rPr lang="en-US" sz="1800" i="1" dirty="0">
                 <a:solidFill>
                   <a:srgbClr val="BABABB"/>
                 </a:solidFill>
@@ -11594,7 +11864,7 @@
               </a:rPr>
               <a:t>Find the hole. Prove the kill. Close it. Show the receipt.</a:t>
             </a:r>
-            <a:endParaRPr lang="en-US" sz="2000" dirty="0"/>
+            <a:endParaRPr lang="en-US" sz="1800" dirty="0"/>
           </a:p>
         </p:txBody>
       </p:sp>
@@ -11606,8 +11876,8 @@
         </p:nvSpPr>
         <p:spPr>
           <a:xfrm>
-            <a:off x="548640" y="3931920"/>
-            <a:ext cx="2697480" cy="2286000"/>
+            <a:off x="655168" y="3840480"/>
+            <a:ext cx="2651760" cy="2377440"/>
           </a:xfrm>
           <a:prstGeom prst="rect">
             <a:avLst/>
@@ -11631,7 +11901,7 @@
         </p:nvSpPr>
         <p:spPr>
           <a:xfrm>
-            <a:off x="777240" y="4114800"/>
+            <a:off x="883768" y="4023360"/>
             <a:ext cx="731520" cy="228600"/>
           </a:xfrm>
           <a:prstGeom prst="rect">
@@ -11670,24 +11940,24 @@
         </p:nvSpPr>
         <p:spPr>
           <a:xfrm>
-            <a:off x="777240" y="4526280"/>
-            <a:ext cx="2240280" cy="1005840"/>
-          </a:xfrm>
-          <a:prstGeom prst="rect">
-            <a:avLst/>
-          </a:prstGeom>
-          <a:noFill/>
-          <a:ln/>
-        </p:spPr>
-        <p:txBody>
-          <a:bodyPr wrap="square" lIns="0" tIns="0" rIns="0" bIns="0" rtlCol="0" anchor="ctr"/>
-          <a:lstStyle/>
-          <a:p>
-            <a:pPr indent="0" marL="0">
-              <a:buNone/>
-            </a:pPr>
-            <a:r>
-              <a:rPr lang="en-US" sz="2400" b="1" spc="-100" kern="0" dirty="0">
+            <a:off x="883768" y="4389120"/>
+            <a:ext cx="2194560" cy="1051560"/>
+          </a:xfrm>
+          <a:prstGeom prst="rect">
+            <a:avLst/>
+          </a:prstGeom>
+          <a:noFill/>
+          <a:ln/>
+        </p:spPr>
+        <p:txBody>
+          <a:bodyPr wrap="square" lIns="0" tIns="0" rIns="0" bIns="0" rtlCol="0" anchor="ctr"/>
+          <a:lstStyle/>
+          <a:p>
+            <a:pPr indent="0" marL="0">
+              <a:buNone/>
+            </a:pPr>
+            <a:r>
+              <a:rPr lang="en-US" sz="2200" b="1" spc="-100" kern="0" dirty="0">
                 <a:solidFill>
                   <a:srgbClr val="FAFAFA"/>
                 </a:solidFill>
@@ -11702,7 +11972,7 @@
               <a:buNone/>
             </a:pPr>
             <a:r>
-              <a:rPr lang="en-US" sz="2400" i="1" spc="-100" kern="0" dirty="0">
+              <a:rPr lang="en-US" sz="2200" i="1" spc="-100" kern="0" dirty="0">
                 <a:solidFill>
                   <a:srgbClr val="FAFAFA"/>
                 </a:solidFill>
@@ -11712,7 +11982,7 @@
               </a:rPr>
               <a:t>Ogwu</a:t>
             </a:r>
-            <a:endParaRPr lang="en-US" sz="2400" dirty="0"/>
+            <a:endParaRPr lang="en-US" sz="2200" dirty="0"/>
           </a:p>
         </p:txBody>
       </p:sp>
@@ -11724,24 +11994,24 @@
         </p:nvSpPr>
         <p:spPr>
           <a:xfrm>
-            <a:off x="777240" y="5440680"/>
-            <a:ext cx="2240280" cy="274320"/>
-          </a:xfrm>
-          <a:prstGeom prst="rect">
-            <a:avLst/>
-          </a:prstGeom>
-          <a:noFill/>
-          <a:ln/>
-        </p:spPr>
-        <p:txBody>
-          <a:bodyPr wrap="square" lIns="0" tIns="0" rIns="0" bIns="0" rtlCol="0" anchor="ctr"/>
-          <a:lstStyle/>
-          <a:p>
-            <a:pPr indent="0" marL="0">
-              <a:buNone/>
-            </a:pPr>
-            <a:r>
-              <a:rPr lang="en-US" sz="1000" spc="200" kern="0" dirty="0">
+            <a:off x="883768" y="5440680"/>
+            <a:ext cx="2194560" cy="274320"/>
+          </a:xfrm>
+          <a:prstGeom prst="rect">
+            <a:avLst/>
+          </a:prstGeom>
+          <a:noFill/>
+          <a:ln/>
+        </p:spPr>
+        <p:txBody>
+          <a:bodyPr wrap="square" lIns="0" tIns="0" rIns="0" bIns="0" rtlCol="0" anchor="ctr"/>
+          <a:lstStyle/>
+          <a:p>
+            <a:pPr indent="0" marL="0">
+              <a:buNone/>
+            </a:pPr>
+            <a:r>
+              <a:rPr lang="en-US" sz="950" spc="200" kern="0" dirty="0">
                 <a:solidFill>
                   <a:srgbClr val="FF2D4A"/>
                 </a:solidFill>
@@ -11751,7 +12021,7 @@
               </a:rPr>
               <a:t>AGENTS · ORCHESTRATION</a:t>
             </a:r>
-            <a:endParaRPr lang="en-US" sz="1000" dirty="0"/>
+            <a:endParaRPr lang="en-US" sz="950" dirty="0"/>
           </a:p>
         </p:txBody>
       </p:sp>
@@ -11763,24 +12033,24 @@
         </p:nvSpPr>
         <p:spPr>
           <a:xfrm>
-            <a:off x="777240" y="5715000"/>
-            <a:ext cx="2240280" cy="457200"/>
-          </a:xfrm>
-          <a:prstGeom prst="rect">
-            <a:avLst/>
-          </a:prstGeom>
-          <a:noFill/>
-          <a:ln/>
-        </p:spPr>
-        <p:txBody>
-          <a:bodyPr wrap="square" lIns="0" tIns="0" rIns="0" bIns="0" rtlCol="0" anchor="ctr"/>
-          <a:lstStyle/>
-          <a:p>
-            <a:pPr indent="0" marL="0">
-              <a:buNone/>
-            </a:pPr>
-            <a:r>
-              <a:rPr lang="en-US" sz="1100" dirty="0">
+            <a:off x="883768" y="5715000"/>
+            <a:ext cx="2194560" cy="457200"/>
+          </a:xfrm>
+          <a:prstGeom prst="rect">
+            <a:avLst/>
+          </a:prstGeom>
+          <a:noFill/>
+          <a:ln/>
+        </p:spPr>
+        <p:txBody>
+          <a:bodyPr wrap="square" lIns="0" tIns="0" rIns="0" bIns="0" rtlCol="0" anchor="ctr"/>
+          <a:lstStyle/>
+          <a:p>
+            <a:pPr indent="0" marL="0">
+              <a:buNone/>
+            </a:pPr>
+            <a:r>
+              <a:rPr lang="en-US" sz="1050" dirty="0">
                 <a:solidFill>
                   <a:srgbClr val="BABABB"/>
                 </a:solidFill>
@@ -11790,7 +12060,7 @@
               </a:rPr>
               <a:t>UMD · Anthropic Campus Ambassador · Claude Builder Club.</a:t>
             </a:r>
-            <a:endParaRPr lang="en-US" sz="1100" dirty="0"/>
+            <a:endParaRPr lang="en-US" sz="1050" dirty="0"/>
           </a:p>
         </p:txBody>
       </p:sp>
@@ -11802,8 +12072,8 @@
         </p:nvSpPr>
         <p:spPr>
           <a:xfrm>
-            <a:off x="3337560" y="3931920"/>
-            <a:ext cx="2697480" cy="2286000"/>
+            <a:off x="3398368" y="3840480"/>
+            <a:ext cx="2651760" cy="2377440"/>
           </a:xfrm>
           <a:prstGeom prst="rect">
             <a:avLst/>
@@ -11827,7 +12097,7 @@
         </p:nvSpPr>
         <p:spPr>
           <a:xfrm>
-            <a:off x="3566160" y="4114800"/>
+            <a:off x="3626968" y="4023360"/>
             <a:ext cx="731520" cy="228600"/>
           </a:xfrm>
           <a:prstGeom prst="rect">
@@ -11866,24 +12136,24 @@
         </p:nvSpPr>
         <p:spPr>
           <a:xfrm>
-            <a:off x="3566160" y="4526280"/>
-            <a:ext cx="2240280" cy="1005840"/>
-          </a:xfrm>
-          <a:prstGeom prst="rect">
-            <a:avLst/>
-          </a:prstGeom>
-          <a:noFill/>
-          <a:ln/>
-        </p:spPr>
-        <p:txBody>
-          <a:bodyPr wrap="square" lIns="0" tIns="0" rIns="0" bIns="0" rtlCol="0" anchor="ctr"/>
-          <a:lstStyle/>
-          <a:p>
-            <a:pPr indent="0" marL="0">
-              <a:buNone/>
-            </a:pPr>
-            <a:r>
-              <a:rPr lang="en-US" sz="2400" b="1" spc="-100" kern="0" dirty="0">
+            <a:off x="3626968" y="4389120"/>
+            <a:ext cx="2194560" cy="1051560"/>
+          </a:xfrm>
+          <a:prstGeom prst="rect">
+            <a:avLst/>
+          </a:prstGeom>
+          <a:noFill/>
+          <a:ln/>
+        </p:spPr>
+        <p:txBody>
+          <a:bodyPr wrap="square" lIns="0" tIns="0" rIns="0" bIns="0" rtlCol="0" anchor="ctr"/>
+          <a:lstStyle/>
+          <a:p>
+            <a:pPr indent="0" marL="0">
+              <a:buNone/>
+            </a:pPr>
+            <a:r>
+              <a:rPr lang="en-US" sz="2200" b="1" spc="-100" kern="0" dirty="0">
                 <a:solidFill>
                   <a:srgbClr val="FAFAFA"/>
                 </a:solidFill>
@@ -11898,7 +12168,7 @@
               <a:buNone/>
             </a:pPr>
             <a:r>
-              <a:rPr lang="en-US" sz="2400" i="1" spc="-100" kern="0" dirty="0">
+              <a:rPr lang="en-US" sz="2200" i="1" spc="-100" kern="0" dirty="0">
                 <a:solidFill>
                   <a:srgbClr val="FAFAFA"/>
                 </a:solidFill>
@@ -11908,7 +12178,7 @@
               </a:rPr>
               <a:t>Ibarbia Ruiz</a:t>
             </a:r>
-            <a:endParaRPr lang="en-US" sz="2400" dirty="0"/>
+            <a:endParaRPr lang="en-US" sz="2200" dirty="0"/>
           </a:p>
         </p:txBody>
       </p:sp>
@@ -11920,24 +12190,24 @@
         </p:nvSpPr>
         <p:spPr>
           <a:xfrm>
-            <a:off x="3566160" y="5440680"/>
-            <a:ext cx="2240280" cy="274320"/>
-          </a:xfrm>
-          <a:prstGeom prst="rect">
-            <a:avLst/>
-          </a:prstGeom>
-          <a:noFill/>
-          <a:ln/>
-        </p:spPr>
-        <p:txBody>
-          <a:bodyPr wrap="square" lIns="0" tIns="0" rIns="0" bIns="0" rtlCol="0" anchor="ctr"/>
-          <a:lstStyle/>
-          <a:p>
-            <a:pPr indent="0" marL="0">
-              <a:buNone/>
-            </a:pPr>
-            <a:r>
-              <a:rPr lang="en-US" sz="1000" spc="200" kern="0" dirty="0">
+            <a:off x="3626968" y="5440680"/>
+            <a:ext cx="2194560" cy="274320"/>
+          </a:xfrm>
+          <a:prstGeom prst="rect">
+            <a:avLst/>
+          </a:prstGeom>
+          <a:noFill/>
+          <a:ln/>
+        </p:spPr>
+        <p:txBody>
+          <a:bodyPr wrap="square" lIns="0" tIns="0" rIns="0" bIns="0" rtlCol="0" anchor="ctr"/>
+          <a:lstStyle/>
+          <a:p>
+            <a:pPr indent="0" marL="0">
+              <a:buNone/>
+            </a:pPr>
+            <a:r>
+              <a:rPr lang="en-US" sz="950" spc="200" kern="0" dirty="0">
                 <a:solidFill>
                   <a:srgbClr val="FF2D4A"/>
                 </a:solidFill>
@@ -11947,7 +12217,7 @@
               </a:rPr>
               <a:t>SECURITY · INTEGRATION</a:t>
             </a:r>
-            <a:endParaRPr lang="en-US" sz="1000" dirty="0"/>
+            <a:endParaRPr lang="en-US" sz="950" dirty="0"/>
           </a:p>
         </p:txBody>
       </p:sp>
@@ -11959,24 +12229,24 @@
         </p:nvSpPr>
         <p:spPr>
           <a:xfrm>
-            <a:off x="3566160" y="5715000"/>
-            <a:ext cx="2240280" cy="457200"/>
-          </a:xfrm>
-          <a:prstGeom prst="rect">
-            <a:avLst/>
-          </a:prstGeom>
-          <a:noFill/>
-          <a:ln/>
-        </p:spPr>
-        <p:txBody>
-          <a:bodyPr wrap="square" lIns="0" tIns="0" rIns="0" bIns="0" rtlCol="0" anchor="ctr"/>
-          <a:lstStyle/>
-          <a:p>
-            <a:pPr indent="0" marL="0">
-              <a:buNone/>
-            </a:pPr>
-            <a:r>
-              <a:rPr lang="en-US" sz="1100" dirty="0">
+            <a:off x="3626968" y="5715000"/>
+            <a:ext cx="2194560" cy="457200"/>
+          </a:xfrm>
+          <a:prstGeom prst="rect">
+            <a:avLst/>
+          </a:prstGeom>
+          <a:noFill/>
+          <a:ln/>
+        </p:spPr>
+        <p:txBody>
+          <a:bodyPr wrap="square" lIns="0" tIns="0" rIns="0" bIns="0" rtlCol="0" anchor="ctr"/>
+          <a:lstStyle/>
+          <a:p>
+            <a:pPr indent="0" marL="0">
+              <a:buNone/>
+            </a:pPr>
+            <a:r>
+              <a:rPr lang="en-US" sz="1050" dirty="0">
                 <a:solidFill>
                   <a:srgbClr val="BABABB"/>
                 </a:solidFill>
@@ -11986,7 +12256,7 @@
               </a:rPr>
               <a:t>UF · ex-Google Gmail · agentic full-stack.</a:t>
             </a:r>
-            <a:endParaRPr lang="en-US" sz="1100" dirty="0"/>
+            <a:endParaRPr lang="en-US" sz="1050" dirty="0"/>
           </a:p>
         </p:txBody>
       </p:sp>
@@ -11998,8 +12268,8 @@
         </p:nvSpPr>
         <p:spPr>
           <a:xfrm>
-            <a:off x="6126480" y="3931920"/>
-            <a:ext cx="2697480" cy="2286000"/>
+            <a:off x="6141568" y="3840480"/>
+            <a:ext cx="2651760" cy="2377440"/>
           </a:xfrm>
           <a:prstGeom prst="rect">
             <a:avLst/>
@@ -12023,7 +12293,7 @@
         </p:nvSpPr>
         <p:spPr>
           <a:xfrm>
-            <a:off x="6355080" y="4114800"/>
+            <a:off x="6370168" y="4023360"/>
             <a:ext cx="731520" cy="228600"/>
           </a:xfrm>
           <a:prstGeom prst="rect">
@@ -12062,24 +12332,24 @@
         </p:nvSpPr>
         <p:spPr>
           <a:xfrm>
-            <a:off x="6355080" y="4526280"/>
-            <a:ext cx="2240280" cy="1005840"/>
-          </a:xfrm>
-          <a:prstGeom prst="rect">
-            <a:avLst/>
-          </a:prstGeom>
-          <a:noFill/>
-          <a:ln/>
-        </p:spPr>
-        <p:txBody>
-          <a:bodyPr wrap="square" lIns="0" tIns="0" rIns="0" bIns="0" rtlCol="0" anchor="ctr"/>
-          <a:lstStyle/>
-          <a:p>
-            <a:pPr indent="0" marL="0">
-              <a:buNone/>
-            </a:pPr>
-            <a:r>
-              <a:rPr lang="en-US" sz="2400" b="1" spc="-100" kern="0" dirty="0">
+            <a:off x="6370168" y="4389120"/>
+            <a:ext cx="2194560" cy="1051560"/>
+          </a:xfrm>
+          <a:prstGeom prst="rect">
+            <a:avLst/>
+          </a:prstGeom>
+          <a:noFill/>
+          <a:ln/>
+        </p:spPr>
+        <p:txBody>
+          <a:bodyPr wrap="square" lIns="0" tIns="0" rIns="0" bIns="0" rtlCol="0" anchor="ctr"/>
+          <a:lstStyle/>
+          <a:p>
+            <a:pPr indent="0" marL="0">
+              <a:buNone/>
+            </a:pPr>
+            <a:r>
+              <a:rPr lang="en-US" sz="2200" b="1" spc="-100" kern="0" dirty="0">
                 <a:solidFill>
                   <a:srgbClr val="FAFAFA"/>
                 </a:solidFill>
@@ -12094,7 +12364,7 @@
               <a:buNone/>
             </a:pPr>
             <a:r>
-              <a:rPr lang="en-US" sz="2400" i="1" spc="-100" kern="0" dirty="0">
+              <a:rPr lang="en-US" sz="2200" i="1" spc="-100" kern="0" dirty="0">
                 <a:solidFill>
                   <a:srgbClr val="FAFAFA"/>
                 </a:solidFill>
@@ -12104,7 +12374,7 @@
               </a:rPr>
               <a:t>Poori</a:t>
             </a:r>
-            <a:endParaRPr lang="en-US" sz="2400" dirty="0"/>
+            <a:endParaRPr lang="en-US" sz="2200" dirty="0"/>
           </a:p>
         </p:txBody>
       </p:sp>
@@ -12116,24 +12386,24 @@
         </p:nvSpPr>
         <p:spPr>
           <a:xfrm>
-            <a:off x="6355080" y="5440680"/>
-            <a:ext cx="2240280" cy="274320"/>
-          </a:xfrm>
-          <a:prstGeom prst="rect">
-            <a:avLst/>
-          </a:prstGeom>
-          <a:noFill/>
-          <a:ln/>
-        </p:spPr>
-        <p:txBody>
-          <a:bodyPr wrap="square" lIns="0" tIns="0" rIns="0" bIns="0" rtlCol="0" anchor="ctr"/>
-          <a:lstStyle/>
-          <a:p>
-            <a:pPr indent="0" marL="0">
-              <a:buNone/>
-            </a:pPr>
-            <a:r>
-              <a:rPr lang="en-US" sz="1000" spc="200" kern="0" dirty="0">
+            <a:off x="6370168" y="5440680"/>
+            <a:ext cx="2194560" cy="274320"/>
+          </a:xfrm>
+          <a:prstGeom prst="rect">
+            <a:avLst/>
+          </a:prstGeom>
+          <a:noFill/>
+          <a:ln/>
+        </p:spPr>
+        <p:txBody>
+          <a:bodyPr wrap="square" lIns="0" tIns="0" rIns="0" bIns="0" rtlCol="0" anchor="ctr"/>
+          <a:lstStyle/>
+          <a:p>
+            <a:pPr indent="0" marL="0">
+              <a:buNone/>
+            </a:pPr>
+            <a:r>
+              <a:rPr lang="en-US" sz="950" spc="200" kern="0" dirty="0">
                 <a:solidFill>
                   <a:srgbClr val="FF2D4A"/>
                 </a:solidFill>
@@ -12143,7 +12413,7 @@
               </a:rPr>
               <a:t>HARDWARE · SIMULATION</a:t>
             </a:r>
-            <a:endParaRPr lang="en-US" sz="1000" dirty="0"/>
+            <a:endParaRPr lang="en-US" sz="950" dirty="0"/>
           </a:p>
         </p:txBody>
       </p:sp>
@@ -12155,24 +12425,24 @@
         </p:nvSpPr>
         <p:spPr>
           <a:xfrm>
-            <a:off x="6355080" y="5715000"/>
-            <a:ext cx="2240280" cy="457200"/>
-          </a:xfrm>
-          <a:prstGeom prst="rect">
-            <a:avLst/>
-          </a:prstGeom>
-          <a:noFill/>
-          <a:ln/>
-        </p:spPr>
-        <p:txBody>
-          <a:bodyPr wrap="square" lIns="0" tIns="0" rIns="0" bIns="0" rtlCol="0" anchor="ctr"/>
-          <a:lstStyle/>
-          <a:p>
-            <a:pPr indent="0" marL="0">
-              <a:buNone/>
-            </a:pPr>
-            <a:r>
-              <a:rPr lang="en-US" sz="1100" dirty="0">
+            <a:off x="6370168" y="5715000"/>
+            <a:ext cx="2194560" cy="457200"/>
+          </a:xfrm>
+          <a:prstGeom prst="rect">
+            <a:avLst/>
+          </a:prstGeom>
+          <a:noFill/>
+          <a:ln/>
+        </p:spPr>
+        <p:txBody>
+          <a:bodyPr wrap="square" lIns="0" tIns="0" rIns="0" bIns="0" rtlCol="0" anchor="ctr"/>
+          <a:lstStyle/>
+          <a:p>
+            <a:pPr indent="0" marL="0">
+              <a:buNone/>
+            </a:pPr>
+            <a:r>
+              <a:rPr lang="en-US" sz="1050" dirty="0">
                 <a:solidFill>
                   <a:srgbClr val="BABABB"/>
                 </a:solidFill>
@@ -12182,7 +12452,7 @@
               </a:rPr>
               <a:t>14 hackathons · 8 awards · CV + hardware.</a:t>
             </a:r>
-            <a:endParaRPr lang="en-US" sz="1100" dirty="0"/>
+            <a:endParaRPr lang="en-US" sz="1050" dirty="0"/>
           </a:p>
         </p:txBody>
       </p:sp>
@@ -12194,8 +12464,8 @@
         </p:nvSpPr>
         <p:spPr>
           <a:xfrm>
-            <a:off x="8915400" y="3931920"/>
-            <a:ext cx="2697480" cy="2286000"/>
+            <a:off x="8884768" y="3840480"/>
+            <a:ext cx="2651760" cy="2377440"/>
           </a:xfrm>
           <a:prstGeom prst="rect">
             <a:avLst/>
@@ -12219,7 +12489,7 @@
         </p:nvSpPr>
         <p:spPr>
           <a:xfrm>
-            <a:off x="9144000" y="4114800"/>
+            <a:off x="9113368" y="4023360"/>
             <a:ext cx="731520" cy="228600"/>
           </a:xfrm>
           <a:prstGeom prst="rect">
@@ -12258,24 +12528,24 @@
         </p:nvSpPr>
         <p:spPr>
           <a:xfrm>
-            <a:off x="9144000" y="4526280"/>
-            <a:ext cx="2240280" cy="1005840"/>
-          </a:xfrm>
-          <a:prstGeom prst="rect">
-            <a:avLst/>
-          </a:prstGeom>
-          <a:noFill/>
-          <a:ln/>
-        </p:spPr>
-        <p:txBody>
-          <a:bodyPr wrap="square" lIns="0" tIns="0" rIns="0" bIns="0" rtlCol="0" anchor="ctr"/>
-          <a:lstStyle/>
-          <a:p>
-            <a:pPr indent="0" marL="0">
-              <a:buNone/>
-            </a:pPr>
-            <a:r>
-              <a:rPr lang="en-US" sz="2400" b="1" spc="-100" kern="0" dirty="0">
+            <a:off x="9113368" y="4389120"/>
+            <a:ext cx="2194560" cy="1051560"/>
+          </a:xfrm>
+          <a:prstGeom prst="rect">
+            <a:avLst/>
+          </a:prstGeom>
+          <a:noFill/>
+          <a:ln/>
+        </p:spPr>
+        <p:txBody>
+          <a:bodyPr wrap="square" lIns="0" tIns="0" rIns="0" bIns="0" rtlCol="0" anchor="ctr"/>
+          <a:lstStyle/>
+          <a:p>
+            <a:pPr indent="0" marL="0">
+              <a:buNone/>
+            </a:pPr>
+            <a:r>
+              <a:rPr lang="en-US" sz="2200" b="1" spc="-100" kern="0" dirty="0">
                 <a:solidFill>
                   <a:srgbClr val="FAFAFA"/>
                 </a:solidFill>
@@ -12290,7 +12560,7 @@
               <a:buNone/>
             </a:pPr>
             <a:r>
-              <a:rPr lang="en-US" sz="2400" i="1" spc="-100" kern="0" dirty="0">
+              <a:rPr lang="en-US" sz="2200" i="1" spc="-100" kern="0" dirty="0">
                 <a:solidFill>
                   <a:srgbClr val="FAFAFA"/>
                 </a:solidFill>
@@ -12300,7 +12570,7 @@
               </a:rPr>
               <a:t>Ghodasara</a:t>
             </a:r>
-            <a:endParaRPr lang="en-US" sz="2400" dirty="0"/>
+            <a:endParaRPr lang="en-US" sz="2200" dirty="0"/>
           </a:p>
         </p:txBody>
       </p:sp>
@@ -12312,24 +12582,24 @@
         </p:nvSpPr>
         <p:spPr>
           <a:xfrm>
-            <a:off x="9144000" y="5440680"/>
-            <a:ext cx="2240280" cy="274320"/>
-          </a:xfrm>
-          <a:prstGeom prst="rect">
-            <a:avLst/>
-          </a:prstGeom>
-          <a:noFill/>
-          <a:ln/>
-        </p:spPr>
-        <p:txBody>
-          <a:bodyPr wrap="square" lIns="0" tIns="0" rIns="0" bIns="0" rtlCol="0" anchor="ctr"/>
-          <a:lstStyle/>
-          <a:p>
-            <a:pPr indent="0" marL="0">
-              <a:buNone/>
-            </a:pPr>
-            <a:r>
-              <a:rPr lang="en-US" sz="1000" spc="200" kern="0" dirty="0">
+            <a:off x="9113368" y="5440680"/>
+            <a:ext cx="2194560" cy="274320"/>
+          </a:xfrm>
+          <a:prstGeom prst="rect">
+            <a:avLst/>
+          </a:prstGeom>
+          <a:noFill/>
+          <a:ln/>
+        </p:spPr>
+        <p:txBody>
+          <a:bodyPr wrap="square" lIns="0" tIns="0" rIns="0" bIns="0" rtlCol="0" anchor="ctr"/>
+          <a:lstStyle/>
+          <a:p>
+            <a:pPr indent="0" marL="0">
+              <a:buNone/>
+            </a:pPr>
+            <a:r>
+              <a:rPr lang="en-US" sz="950" spc="200" kern="0" dirty="0">
                 <a:solidFill>
                   <a:srgbClr val="FF2D4A"/>
                 </a:solidFill>
@@ -12339,7 +12609,7 @@
               </a:rPr>
               <a:t>REALTIME · FRONTEND</a:t>
             </a:r>
-            <a:endParaRPr lang="en-US" sz="1000" dirty="0"/>
+            <a:endParaRPr lang="en-US" sz="950" dirty="0"/>
           </a:p>
         </p:txBody>
       </p:sp>
@@ -12351,24 +12621,24 @@
         </p:nvSpPr>
         <p:spPr>
           <a:xfrm>
-            <a:off x="9144000" y="5715000"/>
-            <a:ext cx="2240280" cy="457200"/>
-          </a:xfrm>
-          <a:prstGeom prst="rect">
-            <a:avLst/>
-          </a:prstGeom>
-          <a:noFill/>
-          <a:ln/>
-        </p:spPr>
-        <p:txBody>
-          <a:bodyPr wrap="square" lIns="0" tIns="0" rIns="0" bIns="0" rtlCol="0" anchor="ctr"/>
-          <a:lstStyle/>
-          <a:p>
-            <a:pPr indent="0" marL="0">
-              <a:buNone/>
-            </a:pPr>
-            <a:r>
-              <a:rPr lang="en-US" sz="1100" dirty="0">
+            <a:off x="9113368" y="5715000"/>
+            <a:ext cx="2194560" cy="457200"/>
+          </a:xfrm>
+          <a:prstGeom prst="rect">
+            <a:avLst/>
+          </a:prstGeom>
+          <a:noFill/>
+          <a:ln/>
+        </p:spPr>
+        <p:txBody>
+          <a:bodyPr wrap="square" lIns="0" tIns="0" rIns="0" bIns="0" rtlCol="0" anchor="ctr"/>
+          <a:lstStyle/>
+          <a:p>
+            <a:pPr indent="0" marL="0">
+              <a:buNone/>
+            </a:pPr>
+            <a:r>
+              <a:rPr lang="en-US" sz="1050" dirty="0">
                 <a:solidFill>
                   <a:srgbClr val="BABABB"/>
                 </a:solidFill>
@@ -12378,7 +12648,7 @@
               </a:rPr>
               <a:t>Stevens MS ML · 8+ hackathon wins.</a:t>
             </a:r>
-            <a:endParaRPr lang="en-US" sz="1100" dirty="0"/>
+            <a:endParaRPr lang="en-US" sz="1050" dirty="0"/>
           </a:p>
         </p:txBody>
       </p:sp>

--- a/deck/PreVent-pitch.pptx
+++ b/deck/PreVent-pitch.pptx
@@ -2325,7 +2325,7 @@
         <p:spPr>
           <a:xfrm>
             <a:off x="457200" y="2743200"/>
-            <a:ext cx="5486400" cy="2651760"/>
+            <a:ext cx="5486400" cy="2743200"/>
           </a:xfrm>
           <a:prstGeom prst="rect">
             <a:avLst/>
@@ -2349,8 +2349,8 @@
         </p:nvSpPr>
         <p:spPr>
           <a:xfrm>
-            <a:off x="731520" y="2926080"/>
-            <a:ext cx="4937760" cy="274320"/>
+            <a:off x="777240" y="2971800"/>
+            <a:ext cx="4846320" cy="274320"/>
           </a:xfrm>
           <a:prstGeom prst="rect">
             <a:avLst/>
@@ -2388,38 +2388,141 @@
         </p:nvSpPr>
         <p:spPr>
           <a:xfrm>
-            <a:off x="731520" y="3246120"/>
-            <a:ext cx="4937760" cy="1463040"/>
-          </a:xfrm>
-          <a:prstGeom prst="rect">
-            <a:avLst/>
-          </a:prstGeom>
-          <a:noFill/>
-          <a:ln/>
-        </p:spPr>
-        <p:txBody>
-          <a:bodyPr wrap="square" lIns="0" tIns="0" rIns="0" bIns="0" rtlCol="0" anchor="ctr"/>
-          <a:lstStyle/>
-          <a:p>
-            <a:pPr indent="0" marL="0">
-              <a:buNone/>
-            </a:pPr>
-            <a:r>
-              <a:rPr lang="en-US" sz="4400" b="1" spc="-200" kern="0" dirty="0">
-                <a:solidFill>
-                  <a:srgbClr val="BABABB"/>
+            <a:off x="777240" y="3520440"/>
+            <a:ext cx="2377440" cy="274320"/>
+          </a:xfrm>
+          <a:prstGeom prst="rect">
+            <a:avLst/>
+          </a:prstGeom>
+          <a:noFill/>
+          <a:ln/>
+        </p:spPr>
+        <p:txBody>
+          <a:bodyPr wrap="square" lIns="0" tIns="0" rIns="0" bIns="0" rtlCol="0" anchor="ctr"/>
+          <a:lstStyle/>
+          <a:p>
+            <a:pPr indent="0" marL="0">
+              <a:buNone/>
+            </a:pPr>
+            <a:r>
+              <a:rPr lang="en-US" sz="1100" spc="300" kern="0" dirty="0">
+                <a:solidFill>
+                  <a:srgbClr val="777779"/>
+                </a:solidFill>
+                <a:latin typeface="Consolas" pitchFamily="34" charset="0"/>
+                <a:ea typeface="Consolas" pitchFamily="34" charset="-122"/>
+                <a:cs typeface="Consolas" pitchFamily="34" charset="-120"/>
+              </a:rPr>
+              <a:t>HR</a:t>
+            </a:r>
+            <a:endParaRPr lang="en-US" sz="1100" dirty="0"/>
+          </a:p>
+        </p:txBody>
+      </p:sp>
+      <p:sp>
+        <p:nvSpPr>
+          <p:cNvPr id="7" name="Text 5"/>
+          <p:cNvSpPr txBox="1"/>
+          <p:nvPr/>
+        </p:nvSpPr>
+        <p:spPr>
+          <a:xfrm>
+            <a:off x="777240" y="3794760"/>
+            <a:ext cx="2377440" cy="1188720"/>
+          </a:xfrm>
+          <a:prstGeom prst="rect">
+            <a:avLst/>
+          </a:prstGeom>
+          <a:noFill/>
+          <a:ln/>
+        </p:spPr>
+        <p:txBody>
+          <a:bodyPr wrap="square" lIns="0" tIns="0" rIns="0" bIns="0" rtlCol="0" anchor="t"/>
+          <a:lstStyle/>
+          <a:p>
+            <a:pPr indent="0" marL="0">
+              <a:buNone/>
+            </a:pPr>
+            <a:r>
+              <a:rPr lang="en-US" sz="7200" b="1" spc="-100" kern="0" dirty="0">
+                <a:solidFill>
+                  <a:srgbClr val="22E07A"/>
                 </a:solidFill>
                 <a:latin typeface="Cambria" pitchFamily="34" charset="0"/>
                 <a:ea typeface="Cambria" pitchFamily="34" charset="-122"/>
                 <a:cs typeface="Cambria" pitchFamily="34" charset="-120"/>
               </a:rPr>
-              <a:t>HR </a:t>
-            </a:r>
-            <a:pPr indent="0" marL="0">
-              <a:buNone/>
-            </a:pPr>
-            <a:r>
-              <a:rPr lang="en-US" sz="10000" b="1" spc="-200" kern="0" dirty="0">
+              <a:t>72</a:t>
+            </a:r>
+            <a:endParaRPr lang="en-US" sz="7200" dirty="0"/>
+          </a:p>
+        </p:txBody>
+      </p:sp>
+      <p:sp>
+        <p:nvSpPr>
+          <p:cNvPr id="8" name="Text 6"/>
+          <p:cNvSpPr txBox="1"/>
+          <p:nvPr/>
+        </p:nvSpPr>
+        <p:spPr>
+          <a:xfrm>
+            <a:off x="3291840" y="3520440"/>
+            <a:ext cx="2286000" cy="274320"/>
+          </a:xfrm>
+          <a:prstGeom prst="rect">
+            <a:avLst/>
+          </a:prstGeom>
+          <a:noFill/>
+          <a:ln/>
+        </p:spPr>
+        <p:txBody>
+          <a:bodyPr wrap="square" lIns="0" tIns="0" rIns="0" bIns="0" rtlCol="0" anchor="ctr"/>
+          <a:lstStyle/>
+          <a:p>
+            <a:pPr indent="0" marL="0">
+              <a:buNone/>
+            </a:pPr>
+            <a:r>
+              <a:rPr lang="en-US" sz="1100" spc="300" kern="0" dirty="0">
+                <a:solidFill>
+                  <a:srgbClr val="777779"/>
+                </a:solidFill>
+                <a:latin typeface="Consolas" pitchFamily="34" charset="0"/>
+                <a:ea typeface="Consolas" pitchFamily="34" charset="-122"/>
+                <a:cs typeface="Consolas" pitchFamily="34" charset="-120"/>
+              </a:rPr>
+              <a:t>SpO₂</a:t>
+            </a:r>
+            <a:endParaRPr lang="en-US" sz="1100" dirty="0"/>
+          </a:p>
+        </p:txBody>
+      </p:sp>
+      <p:sp>
+        <p:nvSpPr>
+          <p:cNvPr id="9" name="Text 7"/>
+          <p:cNvSpPr txBox="1"/>
+          <p:nvPr/>
+        </p:nvSpPr>
+        <p:spPr>
+          <a:xfrm>
+            <a:off x="3291840" y="3794760"/>
+            <a:ext cx="2286000" cy="1188720"/>
+          </a:xfrm>
+          <a:prstGeom prst="rect">
+            <a:avLst/>
+          </a:prstGeom>
+          <a:noFill/>
+          <a:ln/>
+        </p:spPr>
+        <p:txBody>
+          <a:bodyPr wrap="square" lIns="0" tIns="0" rIns="0" bIns="0" rtlCol="0" anchor="t"/>
+          <a:lstStyle/>
+          <a:p>
+            <a:pPr indent="0" marL="0">
+              <a:buNone/>
+            </a:pPr>
+            <a:r>
+              <a:rPr lang="en-US" sz="7200" b="1" spc="-100" kern="0" dirty="0">
                 <a:solidFill>
                   <a:srgbClr val="22E07A"/>
                 </a:solidFill>
@@ -2427,80 +2530,38 @@
                 <a:ea typeface="Cambria" pitchFamily="34" charset="-122"/>
                 <a:cs typeface="Cambria" pitchFamily="34" charset="-120"/>
               </a:rPr>
-              <a:t>72</a:t>
-            </a:r>
-            <a:pPr indent="0" marL="0">
-              <a:buNone/>
-            </a:pPr>
-            <a:r>
-              <a:rPr lang="en-US" sz="4400" b="1" spc="-200" kern="0" dirty="0">
-                <a:solidFill>
-                  <a:srgbClr val="BABABB"/>
-                </a:solidFill>
-                <a:latin typeface="Cambria" pitchFamily="34" charset="0"/>
-                <a:ea typeface="Cambria" pitchFamily="34" charset="-122"/>
-                <a:cs typeface="Cambria" pitchFamily="34" charset="-120"/>
-              </a:rPr>
-              <a:t>    SpO₂ </a:t>
-            </a:r>
-            <a:pPr indent="0" marL="0">
-              <a:buNone/>
-            </a:pPr>
-            <a:r>
-              <a:rPr lang="en-US" sz="10000" b="1" spc="-200" kern="0" dirty="0">
-                <a:solidFill>
-                  <a:srgbClr val="22E07A"/>
-                </a:solidFill>
-                <a:latin typeface="Cambria" pitchFamily="34" charset="0"/>
-                <a:ea typeface="Cambria" pitchFamily="34" charset="-122"/>
-                <a:cs typeface="Cambria" pitchFamily="34" charset="-120"/>
-              </a:rPr>
-              <a:t>98</a:t>
-            </a:r>
-            <a:pPr indent="0" marL="0">
-              <a:buNone/>
-            </a:pPr>
-            <a:r>
-              <a:rPr lang="en-US" sz="5400" b="1" spc="-200" kern="0" dirty="0">
-                <a:solidFill>
-                  <a:srgbClr val="22E07A"/>
-                </a:solidFill>
-                <a:latin typeface="Cambria" pitchFamily="34" charset="0"/>
-                <a:ea typeface="Cambria" pitchFamily="34" charset="-122"/>
-                <a:cs typeface="Cambria" pitchFamily="34" charset="-120"/>
-              </a:rPr>
-              <a:t>%</a:t>
-            </a:r>
-            <a:endParaRPr lang="en-US" sz="4400" dirty="0"/>
-          </a:p>
-        </p:txBody>
-      </p:sp>
-      <p:sp>
-        <p:nvSpPr>
-          <p:cNvPr id="7" name="Text 5"/>
-          <p:cNvSpPr txBox="1"/>
-          <p:nvPr/>
-        </p:nvSpPr>
-        <p:spPr>
-          <a:xfrm>
-            <a:off x="731520" y="4800600"/>
-            <a:ext cx="4937760" cy="365760"/>
-          </a:xfrm>
-          <a:prstGeom prst="rect">
-            <a:avLst/>
-          </a:prstGeom>
-          <a:noFill/>
-          <a:ln/>
-        </p:spPr>
-        <p:txBody>
-          <a:bodyPr wrap="square" lIns="0" tIns="0" rIns="0" bIns="0" rtlCol="0" anchor="ctr"/>
-          <a:lstStyle/>
-          <a:p>
-            <a:pPr indent="0" marL="0">
-              <a:buNone/>
-            </a:pPr>
-            <a:r>
-              <a:rPr lang="en-US" sz="1300" dirty="0">
+              <a:t>98%</a:t>
+            </a:r>
+            <a:endParaRPr lang="en-US" sz="7200" dirty="0"/>
+          </a:p>
+        </p:txBody>
+      </p:sp>
+      <p:sp>
+        <p:nvSpPr>
+          <p:cNvPr id="10" name="Text 8"/>
+          <p:cNvSpPr txBox="1"/>
+          <p:nvPr/>
+        </p:nvSpPr>
+        <p:spPr>
+          <a:xfrm>
+            <a:off x="777240" y="4983480"/>
+            <a:ext cx="4846320" cy="365760"/>
+          </a:xfrm>
+          <a:prstGeom prst="rect">
+            <a:avLst/>
+          </a:prstGeom>
+          <a:noFill/>
+          <a:ln/>
+        </p:spPr>
+        <p:txBody>
+          <a:bodyPr wrap="square" lIns="0" tIns="0" rIns="0" bIns="0" rtlCol="0" anchor="ctr"/>
+          <a:lstStyle/>
+          <a:p>
+            <a:pPr indent="0" marL="0">
+              <a:buNone/>
+            </a:pPr>
+            <a:r>
+              <a:rPr lang="en-US" sz="1200" dirty="0">
                 <a:solidFill>
                   <a:srgbClr val="BABABB"/>
                 </a:solidFill>
@@ -2510,20 +2571,20 @@
               </a:rPr>
               <a:t>Green reads. Alarm silent. Monitor insists the patient is fine.</a:t>
             </a:r>
-            <a:endParaRPr lang="en-US" sz="1300" dirty="0"/>
-          </a:p>
-        </p:txBody>
-      </p:sp>
-      <p:sp>
-        <p:nvSpPr>
-          <p:cNvPr id="8" name="Shape 6"/>
+            <a:endParaRPr lang="en-US" sz="1200" dirty="0"/>
+          </a:p>
+        </p:txBody>
+      </p:sp>
+      <p:sp>
+        <p:nvSpPr>
+          <p:cNvPr id="11" name="Shape 9"/>
           <p:cNvSpPr/>
           <p:nvPr/>
         </p:nvSpPr>
         <p:spPr>
           <a:xfrm>
             <a:off x="6217920" y="2743200"/>
-            <a:ext cx="5486400" cy="2651760"/>
+            <a:ext cx="5486400" cy="2743200"/>
           </a:xfrm>
           <a:prstGeom prst="rect">
             <a:avLst/>
@@ -2541,14 +2602,14 @@
       </p:sp>
       <p:sp>
         <p:nvSpPr>
-          <p:cNvPr id="9" name="Text 7"/>
-          <p:cNvSpPr txBox="1"/>
-          <p:nvPr/>
-        </p:nvSpPr>
-        <p:spPr>
-          <a:xfrm>
-            <a:off x="6492240" y="2926080"/>
-            <a:ext cx="4937760" cy="274320"/>
+          <p:cNvPr id="12" name="Text 10"/>
+          <p:cNvSpPr txBox="1"/>
+          <p:nvPr/>
+        </p:nvSpPr>
+        <p:spPr>
+          <a:xfrm>
+            <a:off x="6537960" y="2971800"/>
+            <a:ext cx="4846320" cy="274320"/>
           </a:xfrm>
           <a:prstGeom prst="rect">
             <a:avLst/>
@@ -2580,44 +2641,147 @@
       </p:sp>
       <p:sp>
         <p:nvSpPr>
-          <p:cNvPr id="10" name="Text 8"/>
-          <p:cNvSpPr txBox="1"/>
-          <p:nvPr/>
-        </p:nvSpPr>
-        <p:spPr>
-          <a:xfrm>
-            <a:off x="6492240" y="3246120"/>
-            <a:ext cx="4937760" cy="1463040"/>
-          </a:xfrm>
-          <a:prstGeom prst="rect">
-            <a:avLst/>
-          </a:prstGeom>
-          <a:noFill/>
-          <a:ln/>
-        </p:spPr>
-        <p:txBody>
-          <a:bodyPr wrap="square" lIns="0" tIns="0" rIns="0" bIns="0" rtlCol="0" anchor="ctr"/>
-          <a:lstStyle/>
-          <a:p>
-            <a:pPr indent="0" marL="0">
-              <a:buNone/>
-            </a:pPr>
-            <a:r>
-              <a:rPr lang="en-US" sz="4400" b="1" spc="-200" kern="0" dirty="0">
-                <a:solidFill>
-                  <a:srgbClr val="BABABB"/>
+          <p:cNvPr id="13" name="Text 11"/>
+          <p:cNvSpPr txBox="1"/>
+          <p:nvPr/>
+        </p:nvSpPr>
+        <p:spPr>
+          <a:xfrm>
+            <a:off x="6537960" y="3520440"/>
+            <a:ext cx="2377440" cy="274320"/>
+          </a:xfrm>
+          <a:prstGeom prst="rect">
+            <a:avLst/>
+          </a:prstGeom>
+          <a:noFill/>
+          <a:ln/>
+        </p:spPr>
+        <p:txBody>
+          <a:bodyPr wrap="square" lIns="0" tIns="0" rIns="0" bIns="0" rtlCol="0" anchor="ctr"/>
+          <a:lstStyle/>
+          <a:p>
+            <a:pPr indent="0" marL="0">
+              <a:buNone/>
+            </a:pPr>
+            <a:r>
+              <a:rPr lang="en-US" sz="1100" spc="300" kern="0" dirty="0">
+                <a:solidFill>
+                  <a:srgbClr val="777779"/>
+                </a:solidFill>
+                <a:latin typeface="Consolas" pitchFamily="34" charset="0"/>
+                <a:ea typeface="Consolas" pitchFamily="34" charset="-122"/>
+                <a:cs typeface="Consolas" pitchFamily="34" charset="-120"/>
+              </a:rPr>
+              <a:t>HR</a:t>
+            </a:r>
+            <a:endParaRPr lang="en-US" sz="1100" dirty="0"/>
+          </a:p>
+        </p:txBody>
+      </p:sp>
+      <p:sp>
+        <p:nvSpPr>
+          <p:cNvPr id="14" name="Text 12"/>
+          <p:cNvSpPr txBox="1"/>
+          <p:nvPr/>
+        </p:nvSpPr>
+        <p:spPr>
+          <a:xfrm>
+            <a:off x="6537960" y="3794760"/>
+            <a:ext cx="2377440" cy="1188720"/>
+          </a:xfrm>
+          <a:prstGeom prst="rect">
+            <a:avLst/>
+          </a:prstGeom>
+          <a:noFill/>
+          <a:ln/>
+        </p:spPr>
+        <p:txBody>
+          <a:bodyPr wrap="square" lIns="0" tIns="0" rIns="0" bIns="0" rtlCol="0" anchor="t"/>
+          <a:lstStyle/>
+          <a:p>
+            <a:pPr indent="0" marL="0">
+              <a:buNone/>
+            </a:pPr>
+            <a:r>
+              <a:rPr lang="en-US" sz="7200" b="1" spc="-100" kern="0" dirty="0">
+                <a:solidFill>
+                  <a:srgbClr val="FF2D4A"/>
                 </a:solidFill>
                 <a:latin typeface="Cambria" pitchFamily="34" charset="0"/>
                 <a:ea typeface="Cambria" pitchFamily="34" charset="-122"/>
                 <a:cs typeface="Cambria" pitchFamily="34" charset="-120"/>
               </a:rPr>
-              <a:t>HR </a:t>
-            </a:r>
-            <a:pPr indent="0" marL="0">
-              <a:buNone/>
-            </a:pPr>
-            <a:r>
-              <a:rPr lang="en-US" sz="10000" b="1" spc="-200" kern="0" dirty="0">
+              <a:t>32</a:t>
+            </a:r>
+            <a:endParaRPr lang="en-US" sz="7200" dirty="0"/>
+          </a:p>
+        </p:txBody>
+      </p:sp>
+      <p:sp>
+        <p:nvSpPr>
+          <p:cNvPr id="15" name="Text 13"/>
+          <p:cNvSpPr txBox="1"/>
+          <p:nvPr/>
+        </p:nvSpPr>
+        <p:spPr>
+          <a:xfrm>
+            <a:off x="9052560" y="3520440"/>
+            <a:ext cx="2286000" cy="274320"/>
+          </a:xfrm>
+          <a:prstGeom prst="rect">
+            <a:avLst/>
+          </a:prstGeom>
+          <a:noFill/>
+          <a:ln/>
+        </p:spPr>
+        <p:txBody>
+          <a:bodyPr wrap="square" lIns="0" tIns="0" rIns="0" bIns="0" rtlCol="0" anchor="ctr"/>
+          <a:lstStyle/>
+          <a:p>
+            <a:pPr indent="0" marL="0">
+              <a:buNone/>
+            </a:pPr>
+            <a:r>
+              <a:rPr lang="en-US" sz="1100" spc="300" kern="0" dirty="0">
+                <a:solidFill>
+                  <a:srgbClr val="777779"/>
+                </a:solidFill>
+                <a:latin typeface="Consolas" pitchFamily="34" charset="0"/>
+                <a:ea typeface="Consolas" pitchFamily="34" charset="-122"/>
+                <a:cs typeface="Consolas" pitchFamily="34" charset="-120"/>
+              </a:rPr>
+              <a:t>SpO₂</a:t>
+            </a:r>
+            <a:endParaRPr lang="en-US" sz="1100" dirty="0"/>
+          </a:p>
+        </p:txBody>
+      </p:sp>
+      <p:sp>
+        <p:nvSpPr>
+          <p:cNvPr id="16" name="Text 14"/>
+          <p:cNvSpPr txBox="1"/>
+          <p:nvPr/>
+        </p:nvSpPr>
+        <p:spPr>
+          <a:xfrm>
+            <a:off x="9052560" y="3794760"/>
+            <a:ext cx="2286000" cy="1188720"/>
+          </a:xfrm>
+          <a:prstGeom prst="rect">
+            <a:avLst/>
+          </a:prstGeom>
+          <a:noFill/>
+          <a:ln/>
+        </p:spPr>
+        <p:txBody>
+          <a:bodyPr wrap="square" lIns="0" tIns="0" rIns="0" bIns="0" rtlCol="0" anchor="t"/>
+          <a:lstStyle/>
+          <a:p>
+            <a:pPr indent="0" marL="0">
+              <a:buNone/>
+            </a:pPr>
+            <a:r>
+              <a:rPr lang="en-US" sz="7200" b="1" spc="-100" kern="0" dirty="0">
                 <a:solidFill>
                   <a:srgbClr val="FF2D4A"/>
                 </a:solidFill>
@@ -2625,80 +2789,38 @@
                 <a:ea typeface="Cambria" pitchFamily="34" charset="-122"/>
                 <a:cs typeface="Cambria" pitchFamily="34" charset="-120"/>
               </a:rPr>
-              <a:t>32</a:t>
-            </a:r>
-            <a:pPr indent="0" marL="0">
-              <a:buNone/>
-            </a:pPr>
-            <a:r>
-              <a:rPr lang="en-US" sz="4400" b="1" spc="-200" kern="0" dirty="0">
-                <a:solidFill>
-                  <a:srgbClr val="BABABB"/>
-                </a:solidFill>
-                <a:latin typeface="Cambria" pitchFamily="34" charset="0"/>
-                <a:ea typeface="Cambria" pitchFamily="34" charset="-122"/>
-                <a:cs typeface="Cambria" pitchFamily="34" charset="-120"/>
-              </a:rPr>
-              <a:t>    SpO₂ </a:t>
-            </a:r>
-            <a:pPr indent="0" marL="0">
-              <a:buNone/>
-            </a:pPr>
-            <a:r>
-              <a:rPr lang="en-US" sz="10000" b="1" spc="-200" kern="0" dirty="0">
-                <a:solidFill>
-                  <a:srgbClr val="FF2D4A"/>
-                </a:solidFill>
-                <a:latin typeface="Cambria" pitchFamily="34" charset="0"/>
-                <a:ea typeface="Cambria" pitchFamily="34" charset="-122"/>
-                <a:cs typeface="Cambria" pitchFamily="34" charset="-120"/>
-              </a:rPr>
-              <a:t>76</a:t>
-            </a:r>
-            <a:pPr indent="0" marL="0">
-              <a:buNone/>
-            </a:pPr>
-            <a:r>
-              <a:rPr lang="en-US" sz="5400" b="1" spc="-200" kern="0" dirty="0">
-                <a:solidFill>
-                  <a:srgbClr val="FF2D4A"/>
-                </a:solidFill>
-                <a:latin typeface="Cambria" pitchFamily="34" charset="0"/>
-                <a:ea typeface="Cambria" pitchFamily="34" charset="-122"/>
-                <a:cs typeface="Cambria" pitchFamily="34" charset="-120"/>
-              </a:rPr>
-              <a:t>%</a:t>
-            </a:r>
-            <a:endParaRPr lang="en-US" sz="4400" dirty="0"/>
-          </a:p>
-        </p:txBody>
-      </p:sp>
-      <p:sp>
-        <p:nvSpPr>
-          <p:cNvPr id="11" name="Text 9"/>
-          <p:cNvSpPr txBox="1"/>
-          <p:nvPr/>
-        </p:nvSpPr>
-        <p:spPr>
-          <a:xfrm>
-            <a:off x="6492240" y="4800600"/>
-            <a:ext cx="4937760" cy="365760"/>
-          </a:xfrm>
-          <a:prstGeom prst="rect">
-            <a:avLst/>
-          </a:prstGeom>
-          <a:noFill/>
-          <a:ln/>
-        </p:spPr>
-        <p:txBody>
-          <a:bodyPr wrap="square" lIns="0" tIns="0" rIns="0" bIns="0" rtlCol="0" anchor="ctr"/>
-          <a:lstStyle/>
-          <a:p>
-            <a:pPr indent="0" marL="0">
-              <a:buNone/>
-            </a:pPr>
-            <a:r>
-              <a:rPr lang="en-US" sz="1300" dirty="0">
+              <a:t>76%</a:t>
+            </a:r>
+            <a:endParaRPr lang="en-US" sz="7200" dirty="0"/>
+          </a:p>
+        </p:txBody>
+      </p:sp>
+      <p:sp>
+        <p:nvSpPr>
+          <p:cNvPr id="17" name="Text 15"/>
+          <p:cNvSpPr txBox="1"/>
+          <p:nvPr/>
+        </p:nvSpPr>
+        <p:spPr>
+          <a:xfrm>
+            <a:off x="6537960" y="4983480"/>
+            <a:ext cx="4846320" cy="365760"/>
+          </a:xfrm>
+          <a:prstGeom prst="rect">
+            <a:avLst/>
+          </a:prstGeom>
+          <a:noFill/>
+          <a:ln/>
+        </p:spPr>
+        <p:txBody>
+          <a:bodyPr wrap="square" lIns="0" tIns="0" rIns="0" bIns="0" rtlCol="0" anchor="ctr"/>
+          <a:lstStyle/>
+          <a:p>
+            <a:pPr indent="0" marL="0">
+              <a:buNone/>
+            </a:pPr>
+            <a:r>
+              <a:rPr lang="en-US" sz="1200" dirty="0">
                 <a:solidFill>
                   <a:srgbClr val="BABABB"/>
                 </a:solidFill>
@@ -2708,13 +2830,13 @@
               </a:rPr>
               <a:t>Fan stopped. Respiration flat. The alarm was suppressed by the attacker.</a:t>
             </a:r>
-            <a:endParaRPr lang="en-US" sz="1300" dirty="0"/>
-          </a:p>
-        </p:txBody>
-      </p:sp>
-      <p:sp>
-        <p:nvSpPr>
-          <p:cNvPr id="12" name="Text 10"/>
+            <a:endParaRPr lang="en-US" sz="1200" dirty="0"/>
+          </a:p>
+        </p:txBody>
+      </p:sp>
+      <p:sp>
+        <p:nvSpPr>
+          <p:cNvPr id="18" name="Text 16"/>
           <p:cNvSpPr txBox="1"/>
           <p:nvPr/>
         </p:nvSpPr>
@@ -5762,7 +5884,7 @@
         <p:spPr>
           <a:xfrm>
             <a:off x="457200" y="2651760"/>
-            <a:ext cx="3200400" cy="274320"/>
+            <a:ext cx="3474720" cy="274320"/>
           </a:xfrm>
           <a:prstGeom prst="rect">
             <a:avLst/>
@@ -5800,8 +5922,8 @@
         </p:nvSpPr>
         <p:spPr>
           <a:xfrm>
-            <a:off x="5029200" y="2651760"/>
-            <a:ext cx="3200400" cy="274320"/>
+            <a:off x="4572000" y="2651760"/>
+            <a:ext cx="3474720" cy="274320"/>
           </a:xfrm>
           <a:prstGeom prst="rect">
             <a:avLst/>
@@ -5839,24 +5961,24 @@
         </p:nvSpPr>
         <p:spPr>
           <a:xfrm>
-            <a:off x="457200" y="2971800"/>
-            <a:ext cx="3200400" cy="2286000"/>
-          </a:xfrm>
-          <a:prstGeom prst="rect">
-            <a:avLst/>
-          </a:prstGeom>
-          <a:noFill/>
-          <a:ln/>
-        </p:spPr>
-        <p:txBody>
-          <a:bodyPr wrap="square" lIns="0" tIns="0" rIns="0" bIns="0" rtlCol="0" anchor="ctr"/>
+            <a:off x="457200" y="3063240"/>
+            <a:ext cx="3474720" cy="1828800"/>
+          </a:xfrm>
+          <a:prstGeom prst="rect">
+            <a:avLst/>
+          </a:prstGeom>
+          <a:noFill/>
+          <a:ln/>
+        </p:spPr>
+        <p:txBody>
+          <a:bodyPr wrap="square" lIns="0" tIns="0" rIns="0" bIns="0" rtlCol="0" anchor="t"/>
           <a:lstStyle/>
           <a:p>
             <a:pPr algn="ctr" indent="0" marL="0">
               <a:buNone/>
             </a:pPr>
             <a:r>
-              <a:rPr lang="en-US" sz="17000" b="1" spc="-500" kern="0" dirty="0">
+              <a:rPr lang="en-US" sz="11000" b="1" dirty="0">
                 <a:solidFill>
                   <a:srgbClr val="FF2D4A"/>
                 </a:solidFill>
@@ -5866,7 +5988,7 @@
               </a:rPr>
               <a:t>200</a:t>
             </a:r>
-            <a:endParaRPr lang="en-US" sz="17000" dirty="0"/>
+            <a:endParaRPr lang="en-US" sz="11000" dirty="0"/>
           </a:p>
         </p:txBody>
       </p:sp>
@@ -5878,24 +6000,24 @@
         </p:nvSpPr>
         <p:spPr>
           <a:xfrm>
-            <a:off x="3749040" y="3291840"/>
-            <a:ext cx="1188720" cy="1645920"/>
-          </a:xfrm>
-          <a:prstGeom prst="rect">
-            <a:avLst/>
-          </a:prstGeom>
-          <a:noFill/>
-          <a:ln/>
-        </p:spPr>
-        <p:txBody>
-          <a:bodyPr wrap="square" lIns="0" tIns="0" rIns="0" bIns="0" rtlCol="0" anchor="ctr"/>
+            <a:off x="3931920" y="3520440"/>
+            <a:ext cx="640080" cy="914400"/>
+          </a:xfrm>
+          <a:prstGeom prst="rect">
+            <a:avLst/>
+          </a:prstGeom>
+          <a:noFill/>
+          <a:ln/>
+        </p:spPr>
+        <p:txBody>
+          <a:bodyPr wrap="square" lIns="0" tIns="0" rIns="0" bIns="0" rtlCol="0" anchor="t"/>
           <a:lstStyle/>
           <a:p>
             <a:pPr algn="ctr" indent="0" marL="0">
               <a:buNone/>
             </a:pPr>
             <a:r>
-              <a:rPr lang="en-US" sz="10000" dirty="0">
+              <a:rPr lang="en-US" sz="6000" dirty="0">
                 <a:solidFill>
                   <a:srgbClr val="777779"/>
                 </a:solidFill>
@@ -5905,7 +6027,7 @@
               </a:rPr>
               <a:t>→</a:t>
             </a:r>
-            <a:endParaRPr lang="en-US" sz="10000" dirty="0"/>
+            <a:endParaRPr lang="en-US" sz="6000" dirty="0"/>
           </a:p>
         </p:txBody>
       </p:sp>
@@ -5917,24 +6039,24 @@
         </p:nvSpPr>
         <p:spPr>
           <a:xfrm>
-            <a:off x="5029200" y="2971800"/>
-            <a:ext cx="3200400" cy="2286000"/>
-          </a:xfrm>
-          <a:prstGeom prst="rect">
-            <a:avLst/>
-          </a:prstGeom>
-          <a:noFill/>
-          <a:ln/>
-        </p:spPr>
-        <p:txBody>
-          <a:bodyPr wrap="square" lIns="0" tIns="0" rIns="0" bIns="0" rtlCol="0" anchor="ctr"/>
+            <a:off x="4572000" y="3063240"/>
+            <a:ext cx="3474720" cy="1828800"/>
+          </a:xfrm>
+          <a:prstGeom prst="rect">
+            <a:avLst/>
+          </a:prstGeom>
+          <a:noFill/>
+          <a:ln/>
+        </p:spPr>
+        <p:txBody>
+          <a:bodyPr wrap="square" lIns="0" tIns="0" rIns="0" bIns="0" rtlCol="0" anchor="t"/>
           <a:lstStyle/>
           <a:p>
             <a:pPr algn="ctr" indent="0" marL="0">
               <a:buNone/>
             </a:pPr>
             <a:r>
-              <a:rPr lang="en-US" sz="17000" b="1" spc="-500" kern="0" dirty="0">
+              <a:rPr lang="en-US" sz="11000" b="1" dirty="0">
                 <a:solidFill>
                   <a:srgbClr val="22E07A"/>
                 </a:solidFill>
@@ -5944,7 +6066,7 @@
               </a:rPr>
               <a:t>401</a:t>
             </a:r>
-            <a:endParaRPr lang="en-US" sz="17000" dirty="0"/>
+            <a:endParaRPr lang="en-US" sz="11000" dirty="0"/>
           </a:p>
         </p:txBody>
       </p:sp>
@@ -11783,8 +11905,8 @@
         </p:nvSpPr>
         <p:spPr>
           <a:xfrm>
-            <a:off x="457200" y="914400"/>
-            <a:ext cx="11274552" cy="2103120"/>
+            <a:off x="457200" y="868680"/>
+            <a:ext cx="11274552" cy="1005840"/>
           </a:xfrm>
           <a:prstGeom prst="rect">
             <a:avLst/>
@@ -11800,7 +11922,7 @@
               <a:buNone/>
             </a:pPr>
             <a:r>
-              <a:rPr lang="en-US" sz="5400" b="1" spc="-200" kern="0" dirty="0">
+              <a:rPr lang="en-US" sz="4800" b="1" dirty="0">
                 <a:solidFill>
                   <a:srgbClr val="FAFAFA"/>
                 </a:solidFill>
@@ -11808,14 +11930,38 @@
                 <a:ea typeface="Cambria" pitchFamily="34" charset="-122"/>
                 <a:cs typeface="Cambria" pitchFamily="34" charset="-120"/>
               </a:rPr>
-              <a:t>Make the devices
-</a:t>
-            </a:r>
+              <a:t>Make the devices</a:t>
+            </a:r>
+            <a:endParaRPr lang="en-US" sz="4800" dirty="0"/>
+          </a:p>
+        </p:txBody>
+      </p:sp>
+      <p:sp>
+        <p:nvSpPr>
+          <p:cNvPr id="4" name="Text 2"/>
+          <p:cNvSpPr txBox="1"/>
+          <p:nvPr/>
+        </p:nvSpPr>
+        <p:spPr>
+          <a:xfrm>
+            <a:off x="457200" y="1783080"/>
+            <a:ext cx="11274552" cy="1188720"/>
+          </a:xfrm>
+          <a:prstGeom prst="rect">
+            <a:avLst/>
+          </a:prstGeom>
+          <a:noFill/>
+          <a:ln/>
+        </p:spPr>
+        <p:txBody>
+          <a:bodyPr wrap="square" lIns="0" tIns="0" rIns="0" bIns="0" rtlCol="0" anchor="ctr"/>
+          <a:lstStyle/>
+          <a:p>
             <a:pPr algn="ctr" indent="0" marL="0">
               <a:buNone/>
             </a:pPr>
             <a:r>
-              <a:rPr lang="en-US" sz="5400" b="1" i="1" spc="-200" kern="0" dirty="0">
+              <a:rPr lang="en-US" sz="4800" b="1" i="1" dirty="0">
                 <a:solidFill>
                   <a:srgbClr val="FF2D4A"/>
                 </a:solidFill>
@@ -11825,13 +11971,13 @@
               </a:rPr>
               <a:t>watch themselves.</a:t>
             </a:r>
-            <a:endParaRPr lang="en-US" sz="5400" dirty="0"/>
-          </a:p>
-        </p:txBody>
-      </p:sp>
-      <p:sp>
-        <p:nvSpPr>
-          <p:cNvPr id="4" name="Text 2"/>
+            <a:endParaRPr lang="en-US" sz="4800" dirty="0"/>
+          </a:p>
+        </p:txBody>
+      </p:sp>
+      <p:sp>
+        <p:nvSpPr>
+          <p:cNvPr id="5" name="Text 3"/>
           <p:cNvSpPr txBox="1"/>
           <p:nvPr/>
         </p:nvSpPr>
@@ -11870,7 +12016,7 @@
       </p:sp>
       <p:sp>
         <p:nvSpPr>
-          <p:cNvPr id="5" name="Shape 3"/>
+          <p:cNvPr id="6" name="Shape 4"/>
           <p:cNvSpPr/>
           <p:nvPr/>
         </p:nvSpPr>
@@ -11895,7 +12041,7 @@
       </p:sp>
       <p:sp>
         <p:nvSpPr>
-          <p:cNvPr id="6" name="Text 4"/>
+          <p:cNvPr id="7" name="Text 5"/>
           <p:cNvSpPr txBox="1"/>
           <p:nvPr/>
         </p:nvSpPr>
@@ -11934,7 +12080,7 @@
       </p:sp>
       <p:sp>
         <p:nvSpPr>
-          <p:cNvPr id="7" name="Text 5"/>
+          <p:cNvPr id="8" name="Text 6"/>
           <p:cNvSpPr txBox="1"/>
           <p:nvPr/>
         </p:nvSpPr>
@@ -11988,7 +12134,7 @@
       </p:sp>
       <p:sp>
         <p:nvSpPr>
-          <p:cNvPr id="8" name="Text 6"/>
+          <p:cNvPr id="9" name="Text 7"/>
           <p:cNvSpPr txBox="1"/>
           <p:nvPr/>
         </p:nvSpPr>
@@ -12027,7 +12173,7 @@
       </p:sp>
       <p:sp>
         <p:nvSpPr>
-          <p:cNvPr id="9" name="Text 7"/>
+          <p:cNvPr id="10" name="Text 8"/>
           <p:cNvSpPr txBox="1"/>
           <p:nvPr/>
         </p:nvSpPr>
@@ -12066,7 +12212,7 @@
       </p:sp>
       <p:sp>
         <p:nvSpPr>
-          <p:cNvPr id="10" name="Shape 8"/>
+          <p:cNvPr id="11" name="Shape 9"/>
           <p:cNvSpPr/>
           <p:nvPr/>
         </p:nvSpPr>
@@ -12091,7 +12237,7 @@
       </p:sp>
       <p:sp>
         <p:nvSpPr>
-          <p:cNvPr id="11" name="Text 9"/>
+          <p:cNvPr id="12" name="Text 10"/>
           <p:cNvSpPr txBox="1"/>
           <p:nvPr/>
         </p:nvSpPr>
@@ -12130,7 +12276,7 @@
       </p:sp>
       <p:sp>
         <p:nvSpPr>
-          <p:cNvPr id="12" name="Text 10"/>
+          <p:cNvPr id="13" name="Text 11"/>
           <p:cNvSpPr txBox="1"/>
           <p:nvPr/>
         </p:nvSpPr>
@@ -12184,7 +12330,7 @@
       </p:sp>
       <p:sp>
         <p:nvSpPr>
-          <p:cNvPr id="13" name="Text 11"/>
+          <p:cNvPr id="14" name="Text 12"/>
           <p:cNvSpPr txBox="1"/>
           <p:nvPr/>
         </p:nvSpPr>
@@ -12223,7 +12369,7 @@
       </p:sp>
       <p:sp>
         <p:nvSpPr>
-          <p:cNvPr id="14" name="Text 12"/>
+          <p:cNvPr id="15" name="Text 13"/>
           <p:cNvSpPr txBox="1"/>
           <p:nvPr/>
         </p:nvSpPr>
@@ -12262,7 +12408,7 @@
       </p:sp>
       <p:sp>
         <p:nvSpPr>
-          <p:cNvPr id="15" name="Shape 13"/>
+          <p:cNvPr id="16" name="Shape 14"/>
           <p:cNvSpPr/>
           <p:nvPr/>
         </p:nvSpPr>
@@ -12287,7 +12433,7 @@
       </p:sp>
       <p:sp>
         <p:nvSpPr>
-          <p:cNvPr id="16" name="Text 14"/>
+          <p:cNvPr id="17" name="Text 15"/>
           <p:cNvSpPr txBox="1"/>
           <p:nvPr/>
         </p:nvSpPr>
@@ -12326,7 +12472,7 @@
       </p:sp>
       <p:sp>
         <p:nvSpPr>
-          <p:cNvPr id="17" name="Text 15"/>
+          <p:cNvPr id="18" name="Text 16"/>
           <p:cNvSpPr txBox="1"/>
           <p:nvPr/>
         </p:nvSpPr>
@@ -12380,7 +12526,7 @@
       </p:sp>
       <p:sp>
         <p:nvSpPr>
-          <p:cNvPr id="18" name="Text 16"/>
+          <p:cNvPr id="19" name="Text 17"/>
           <p:cNvSpPr txBox="1"/>
           <p:nvPr/>
         </p:nvSpPr>
@@ -12419,7 +12565,7 @@
       </p:sp>
       <p:sp>
         <p:nvSpPr>
-          <p:cNvPr id="19" name="Text 17"/>
+          <p:cNvPr id="20" name="Text 18"/>
           <p:cNvSpPr txBox="1"/>
           <p:nvPr/>
         </p:nvSpPr>
@@ -12458,7 +12604,7 @@
       </p:sp>
       <p:sp>
         <p:nvSpPr>
-          <p:cNvPr id="20" name="Shape 18"/>
+          <p:cNvPr id="21" name="Shape 19"/>
           <p:cNvSpPr/>
           <p:nvPr/>
         </p:nvSpPr>
@@ -12483,7 +12629,7 @@
       </p:sp>
       <p:sp>
         <p:nvSpPr>
-          <p:cNvPr id="21" name="Text 19"/>
+          <p:cNvPr id="22" name="Text 20"/>
           <p:cNvSpPr txBox="1"/>
           <p:nvPr/>
         </p:nvSpPr>
@@ -12522,7 +12668,7 @@
       </p:sp>
       <p:sp>
         <p:nvSpPr>
-          <p:cNvPr id="22" name="Text 20"/>
+          <p:cNvPr id="23" name="Text 21"/>
           <p:cNvSpPr txBox="1"/>
           <p:nvPr/>
         </p:nvSpPr>
@@ -12576,7 +12722,7 @@
       </p:sp>
       <p:sp>
         <p:nvSpPr>
-          <p:cNvPr id="23" name="Text 21"/>
+          <p:cNvPr id="24" name="Text 22"/>
           <p:cNvSpPr txBox="1"/>
           <p:nvPr/>
         </p:nvSpPr>
@@ -12615,7 +12761,7 @@
       </p:sp>
       <p:sp>
         <p:nvSpPr>
-          <p:cNvPr id="24" name="Text 22"/>
+          <p:cNvPr id="25" name="Text 23"/>
           <p:cNvSpPr txBox="1"/>
           <p:nvPr/>
         </p:nvSpPr>
